--- a/3.3 Hoofdstuk 3 - Overheid/3.3.1 Paragraaf 1 - De rol van de overheid/2. Leren/3.3.1 De rol van de overheid – presentatie.pptx
+++ b/3.3 Hoofdstuk 3 - Overheid/3.3.1 Paragraaf 1 - De rol van de overheid/2. Leren/3.3.1 De rol van de overheid – presentatie.pptx
@@ -2057,6 +2057,8 @@
               </a:rPr>
               <a:t>Marktfalen = de markt levert geen optimaal resultaat</a:t>
             </a:r>
+          </a:p>
+          <a:p>
             <a:pPr algn="l" marL="342900" indent="-342900">
               <a:lnSpc>
                 <a:spcPct val="160000"/>
@@ -2078,6 +2080,8 @@
               </a:rPr>
               <a:t>Natuurlijk monopolie: dalende GTK → één aanbieder efficiënter</a:t>
             </a:r>
+          </a:p>
+          <a:p>
             <a:pPr algn="l" marL="342900" indent="-342900">
               <a:lnSpc>
                 <a:spcPct val="160000"/>
@@ -2099,6 +2103,8 @@
               </a:rPr>
               <a:t>Negatief extern effect: kosten buiten de prijs → te veel productie</a:t>
             </a:r>
+          </a:p>
+          <a:p>
             <a:pPr algn="l" marL="342900" indent="-342900">
               <a:lnSpc>
                 <a:spcPct val="160000"/>
@@ -2120,6 +2126,8 @@
               </a:rPr>
               <a:t>Positief extern effect: baten buiten de prijs → te weinig consumptie</a:t>
             </a:r>
+          </a:p>
+          <a:p>
             <a:pPr algn="l" marL="342900" indent="-342900">
               <a:lnSpc>
                 <a:spcPct val="160000"/>
@@ -2141,7 +2149,6 @@
               </a:rPr>
               <a:t>Overheid corrigeert via belasting, subsidie, regulering of prijsbeleid</a:t>
             </a:r>
-            <a:endParaRPr lang="en-US" sz="1500" dirty="0"/>
           </a:p>
         </p:txBody>
       </p:sp>
@@ -2290,6 +2297,8 @@
               </a:rPr>
               <a:t>Uitleggen wanneer er sprake is van marktfalen</a:t>
             </a:r>
+          </a:p>
+          <a:p>
             <a:pPr algn="l" marL="342900" indent="-342900">
               <a:lnSpc>
                 <a:spcPct val="150000"/>
@@ -2311,6 +2320,8 @@
               </a:rPr>
               <a:t>Herkennen van een natuurlijk monopolie</a:t>
             </a:r>
+          </a:p>
+          <a:p>
             <a:pPr algn="l" marL="342900" indent="-342900">
               <a:lnSpc>
                 <a:spcPct val="150000"/>
@@ -2332,6 +2343,8 @@
               </a:rPr>
               <a:t>Uitleggen wat negatieve externe effecten zijn</a:t>
             </a:r>
+          </a:p>
+          <a:p>
             <a:pPr algn="l" marL="342900" indent="-342900">
               <a:lnSpc>
                 <a:spcPct val="150000"/>
@@ -2353,6 +2366,8 @@
               </a:rPr>
               <a:t>Uitleggen wat positieve externe effecten zijn</a:t>
             </a:r>
+          </a:p>
+          <a:p>
             <a:pPr algn="l" marL="342900" indent="-342900">
               <a:lnSpc>
                 <a:spcPct val="150000"/>
@@ -2374,7 +2389,6 @@
               </a:rPr>
               <a:t>Beschrijven hoe de overheid kan ingrijpen</a:t>
             </a:r>
-            <a:endParaRPr lang="en-US" sz="1500" dirty="0"/>
           </a:p>
         </p:txBody>
       </p:sp>
@@ -2470,6 +2484,10 @@
             </a:outerShdw>
           </a:effectLst>
         </p:spPr>
+        <p:txBody>
+          <a:bodyPr/>
+          <a:p/>
+        </p:txBody>
       </p:sp>
       <p:sp>
         <p:nvSpPr>
@@ -2490,6 +2508,10 @@
           </a:solidFill>
           <a:ln/>
         </p:spPr>
+        <p:txBody>
+          <a:bodyPr/>
+          <a:p/>
+        </p:txBody>
       </p:sp>
       <p:sp>
         <p:nvSpPr>
@@ -2719,6 +2741,10 @@
             </a:outerShdw>
           </a:effectLst>
         </p:spPr>
+        <p:txBody>
+          <a:bodyPr/>
+          <a:p/>
+        </p:txBody>
       </p:sp>
       <p:sp>
         <p:nvSpPr>
@@ -2739,6 +2765,10 @@
           </a:solidFill>
           <a:ln/>
         </p:spPr>
+        <p:txBody>
+          <a:bodyPr/>
+          <a:p/>
+        </p:txBody>
       </p:sp>
       <p:sp>
         <p:nvSpPr>
@@ -3071,6 +3101,10 @@
             </a:outerShdw>
           </a:effectLst>
         </p:spPr>
+        <p:txBody>
+          <a:bodyPr/>
+          <a:p/>
+        </p:txBody>
       </p:sp>
       <p:sp>
         <p:nvSpPr>
@@ -3091,6 +3125,10 @@
           </a:solidFill>
           <a:ln/>
         </p:spPr>
+        <p:txBody>
+          <a:bodyPr/>
+          <a:p/>
+        </p:txBody>
       </p:sp>
       <p:sp>
         <p:nvSpPr>
@@ -3201,6 +3239,10 @@
             </a:outerShdw>
           </a:effectLst>
         </p:spPr>
+        <p:txBody>
+          <a:bodyPr/>
+          <a:p/>
+        </p:txBody>
       </p:sp>
       <p:sp>
         <p:nvSpPr>
@@ -3221,6 +3263,10 @@
           </a:solidFill>
           <a:ln/>
         </p:spPr>
+        <p:txBody>
+          <a:bodyPr/>
+          <a:p/>
+        </p:txBody>
       </p:sp>
       <p:sp>
         <p:nvSpPr>
@@ -3331,6 +3377,10 @@
             </a:outerShdw>
           </a:effectLst>
         </p:spPr>
+        <p:txBody>
+          <a:bodyPr/>
+          <a:p/>
+        </p:txBody>
       </p:sp>
       <p:sp>
         <p:nvSpPr>
@@ -3351,6 +3401,10 @@
           </a:solidFill>
           <a:ln/>
         </p:spPr>
+        <p:txBody>
+          <a:bodyPr/>
+          <a:p/>
+        </p:txBody>
       </p:sp>
       <p:sp>
         <p:nvSpPr>
@@ -3530,6 +3584,10 @@
             </a:outerShdw>
           </a:effectLst>
         </p:spPr>
+        <p:txBody>
+          <a:bodyPr/>
+          <a:p/>
+        </p:txBody>
       </p:sp>
       <p:sp>
         <p:nvSpPr>
@@ -3642,6 +3700,10 @@
             </a:outerShdw>
           </a:effectLst>
         </p:spPr>
+        <p:txBody>
+          <a:bodyPr/>
+          <a:p/>
+        </p:txBody>
       </p:sp>
       <p:sp>
         <p:nvSpPr>
@@ -3754,6 +3816,10 @@
             </a:outerShdw>
           </a:effectLst>
         </p:spPr>
+        <p:txBody>
+          <a:bodyPr/>
+          <a:p/>
+        </p:txBody>
       </p:sp>
       <p:sp>
         <p:nvSpPr>
@@ -3866,6 +3932,10 @@
             </a:outerShdw>
           </a:effectLst>
         </p:spPr>
+        <p:txBody>
+          <a:bodyPr/>
+          <a:p/>
+        </p:txBody>
       </p:sp>
       <p:sp>
         <p:nvSpPr>
@@ -3934,6 +4004,10 @@
             </a:outerShdw>
           </a:effectLst>
         </p:spPr>
+        <p:txBody>
+          <a:bodyPr/>
+          <a:p/>
+        </p:txBody>
       </p:sp>
       <p:sp>
         <p:nvSpPr>
@@ -3954,6 +4028,10 @@
           </a:solidFill>
           <a:ln/>
         </p:spPr>
+        <p:txBody>
+          <a:bodyPr/>
+          <a:p/>
+        </p:txBody>
       </p:sp>
       <p:sp>
         <p:nvSpPr>
@@ -4151,6 +4229,10 @@
             </a:outerShdw>
           </a:effectLst>
         </p:spPr>
+        <p:txBody>
+          <a:bodyPr/>
+          <a:p/>
+        </p:txBody>
       </p:sp>
       <p:sp>
         <p:nvSpPr>
@@ -4263,6 +4345,10 @@
             </a:outerShdw>
           </a:effectLst>
         </p:spPr>
+        <p:txBody>
+          <a:bodyPr/>
+          <a:p/>
+        </p:txBody>
       </p:sp>
       <p:sp>
         <p:nvSpPr>
@@ -4375,6 +4461,10 @@
             </a:outerShdw>
           </a:effectLst>
         </p:spPr>
+        <p:txBody>
+          <a:bodyPr/>
+          <a:p/>
+        </p:txBody>
       </p:sp>
       <p:sp>
         <p:nvSpPr>
@@ -4487,6 +4577,10 @@
             </a:outerShdw>
           </a:effectLst>
         </p:spPr>
+        <p:txBody>
+          <a:bodyPr/>
+          <a:p/>
+        </p:txBody>
       </p:sp>
       <p:sp>
         <p:nvSpPr>
@@ -4555,6 +4649,10 @@
             </a:outerShdw>
           </a:effectLst>
         </p:spPr>
+        <p:txBody>
+          <a:bodyPr/>
+          <a:p/>
+        </p:txBody>
       </p:sp>
       <p:sp>
         <p:nvSpPr>
@@ -4575,6 +4673,10 @@
           </a:solidFill>
           <a:ln/>
         </p:spPr>
+        <p:txBody>
+          <a:bodyPr/>
+          <a:p/>
+        </p:txBody>
       </p:sp>
       <p:sp>
         <p:nvSpPr>
@@ -4767,6 +4869,10 @@
             </a:outerShdw>
           </a:effectLst>
         </p:spPr>
+        <p:txBody>
+          <a:bodyPr/>
+          <a:p/>
+        </p:txBody>
       </p:sp>
       <p:sp>
         <p:nvSpPr>
@@ -4835,6 +4941,10 @@
             </a:outerShdw>
           </a:effectLst>
         </p:spPr>
+        <p:txBody>
+          <a:bodyPr/>
+          <a:p/>
+        </p:txBody>
       </p:sp>
       <p:sp>
         <p:nvSpPr>
@@ -4903,6 +5013,10 @@
             </a:outerShdw>
           </a:effectLst>
         </p:spPr>
+        <p:txBody>
+          <a:bodyPr/>
+          <a:p/>
+        </p:txBody>
       </p:sp>
       <p:sp>
         <p:nvSpPr>
@@ -4971,6 +5085,10 @@
             </a:outerShdw>
           </a:effectLst>
         </p:spPr>
+        <p:txBody>
+          <a:bodyPr/>
+          <a:p/>
+        </p:txBody>
       </p:sp>
       <p:sp>
         <p:nvSpPr>
@@ -5039,6 +5157,10 @@
             </a:outerShdw>
           </a:effectLst>
         </p:spPr>
+        <p:txBody>
+          <a:bodyPr/>
+          <a:p/>
+        </p:txBody>
       </p:sp>
       <p:sp>
         <p:nvSpPr>
@@ -5100,6 +5222,10 @@
           </a:solidFill>
           <a:ln/>
         </p:spPr>
+        <p:txBody>
+          <a:bodyPr/>
+          <a:p/>
+        </p:txBody>
       </p:sp>
       <p:sp>
         <p:nvSpPr>
@@ -5120,6 +5246,10 @@
           </a:solidFill>
           <a:ln/>
         </p:spPr>
+        <p:txBody>
+          <a:bodyPr/>
+          <a:p/>
+        </p:txBody>
       </p:sp>
       <p:sp>
         <p:nvSpPr>
@@ -5252,6 +5382,10 @@
             </a:outerShdw>
           </a:effectLst>
         </p:spPr>
+        <p:txBody>
+          <a:bodyPr/>
+          <a:p/>
+        </p:txBody>
       </p:sp>
       <p:sp>
         <p:nvSpPr>
@@ -5272,6 +5406,10 @@
           </a:solidFill>
           <a:ln/>
         </p:spPr>
+        <p:txBody>
+          <a:bodyPr/>
+          <a:p/>
+        </p:txBody>
       </p:sp>
       <p:sp>
         <p:nvSpPr>
@@ -5382,6 +5520,10 @@
             </a:outerShdw>
           </a:effectLst>
         </p:spPr>
+        <p:txBody>
+          <a:bodyPr/>
+          <a:p/>
+        </p:txBody>
       </p:sp>
       <p:sp>
         <p:nvSpPr>
@@ -5402,6 +5544,10 @@
           </a:solidFill>
           <a:ln/>
         </p:spPr>
+        <p:txBody>
+          <a:bodyPr/>
+          <a:p/>
+        </p:txBody>
       </p:sp>
       <p:sp>
         <p:nvSpPr>
@@ -5512,6 +5658,10 @@
             </a:outerShdw>
           </a:effectLst>
         </p:spPr>
+        <p:txBody>
+          <a:bodyPr/>
+          <a:p/>
+        </p:txBody>
       </p:sp>
       <p:sp>
         <p:nvSpPr>
@@ -5532,6 +5682,10 @@
           </a:solidFill>
           <a:ln/>
         </p:spPr>
+        <p:txBody>
+          <a:bodyPr/>
+          <a:p/>
+        </p:txBody>
       </p:sp>
       <p:sp>
         <p:nvSpPr>
@@ -5642,6 +5796,10 @@
             </a:outerShdw>
           </a:effectLst>
         </p:spPr>
+        <p:txBody>
+          <a:bodyPr/>
+          <a:p/>
+        </p:txBody>
       </p:sp>
       <p:sp>
         <p:nvSpPr>
@@ -5662,6 +5820,10 @@
           </a:solidFill>
           <a:ln/>
         </p:spPr>
+        <p:txBody>
+          <a:bodyPr/>
+          <a:p/>
+        </p:txBody>
       </p:sp>
       <p:sp>
         <p:nvSpPr>
@@ -5836,6 +5998,10 @@
             </a:outerShdw>
           </a:effectLst>
         </p:spPr>
+        <p:txBody>
+          <a:bodyPr/>
+          <a:p/>
+        </p:txBody>
       </p:sp>
       <p:sp>
         <p:nvSpPr>
@@ -5856,6 +6022,10 @@
           </a:solidFill>
           <a:ln/>
         </p:spPr>
+        <p:txBody>
+          <a:bodyPr/>
+          <a:p/>
+        </p:txBody>
       </p:sp>
       <p:sp>
         <p:nvSpPr>
@@ -5963,6 +6133,10 @@
             </a:outerShdw>
           </a:effectLst>
         </p:spPr>
+        <p:txBody>
+          <a:bodyPr/>
+          <a:p/>
+        </p:txBody>
       </p:sp>
       <p:sp>
         <p:nvSpPr>
@@ -5983,6 +6157,10 @@
           </a:solidFill>
           <a:ln/>
         </p:spPr>
+        <p:txBody>
+          <a:bodyPr/>
+          <a:p/>
+        </p:txBody>
       </p:sp>
       <p:sp>
         <p:nvSpPr>
@@ -6090,6 +6268,10 @@
             </a:outerShdw>
           </a:effectLst>
         </p:spPr>
+        <p:txBody>
+          <a:bodyPr/>
+          <a:p/>
+        </p:txBody>
       </p:sp>
       <p:sp>
         <p:nvSpPr>
@@ -6110,6 +6292,10 @@
           </a:solidFill>
           <a:ln/>
         </p:spPr>
+        <p:txBody>
+          <a:bodyPr/>
+          <a:p/>
+        </p:txBody>
       </p:sp>
       <p:sp>
         <p:nvSpPr>

--- a/3.3 Hoofdstuk 3 - Overheid/3.3.1 Paragraaf 1 - De rol van de overheid/2. Leren/3.3.1 De rol van de overheid – presentatie.pptx
+++ b/3.3 Hoofdstuk 3 - Overheid/3.3.1 Paragraaf 1 - De rol van de overheid/2. Leren/3.3.1 De rol van de overheid – presentatie.pptx
@@ -15,9 +15,16 @@
     <p:sldId id="263" r:id="rId9"/>
     <p:sldId id="264" r:id="rId10"/>
     <p:sldId id="265" r:id="rId11"/>
+    <p:sldId id="266" r:id="rId12"/>
+    <p:sldId id="267" r:id="rId13"/>
+    <p:sldId id="268" r:id="rId14"/>
+    <p:sldId id="269" r:id="rId15"/>
+    <p:sldId id="270" r:id="rId16"/>
+    <p:sldId id="271" r:id="rId17"/>
+    <p:sldId id="272" r:id="rId18"/>
   </p:sldIdLst>
   <p:notesMasterIdLst>
-    <p:notesMasterId r:id="rId12"/>
+    <p:notesMasterId r:id="rId19"/>
   </p:notesMasterIdLst>
   <p:sldSz cx="9144000" cy="5143500"/>
   <p:notesSz cx="5143500" cy="9144000"/>
@@ -511,7 +518,7 @@
           <a:p>
             <a:r>
               <a:rPr lang="en-US" dirty="0"/>
-              <a:t>Welkom bij paragraaf 3.3.1 over de rol van de overheid. Waarom grijpt de overheid in op markten? We behandelen marktfalen, externe effecten en de instrumenten die de overheid heeft.</a:t>
+              <a:t>Welkom bij §3.3.1. We onderzoeken wanneer de markt faalt en hoe de overheid ingrijpt. De rode draad: drie oorzaken (monopolie, externe effecten, collectieve goederen) → drie soorten beleid.</a:t>
             </a:r>
             <a:endParaRPr lang="en-US" dirty="0"/>
           </a:p>
@@ -599,7 +606,7 @@
           <a:p>
             <a:r>
               <a:rPr lang="en-US" dirty="0"/>
-              <a:t>Samenvatting: de overheid grijpt in bij marktfalen. Ken elk instrument en weet wanneer het wordt ingezet.</a:t>
+              <a:t>Let op de spiegelbeeld-structuur met de vorige keten. Voorbeelden: vaccinatie, onderwijs, tuinonderhoud. Het 'meelifteffect' is de sleutel.</a:t>
             </a:r>
             <a:endParaRPr lang="en-US" dirty="0"/>
           </a:p>
@@ -623,6 +630,622 @@
             <a:fld id="{F7021451-1387-4CA6-816F-3879F97B5CBC}" type="slidenum">
               <a:rPr lang="en-US"/>
               <a:t>10</a:t>
+            </a:fld>
+            <a:endParaRPr lang="en-US"/>
+          </a:p>
+        </p:txBody>
+      </p:sp>
+    </p:spTree>
+    <p:extLst>
+      <p:ext uri="{BB962C8B-B14F-4D97-AF65-F5344CB8AC3E}">
+        <p14:creationId xmlns:p14="http://schemas.microsoft.com/office/powerpoint/2010/main" val="1024086991"/>
+      </p:ext>
+    </p:extLst>
+  </p:cSld>
+  <p:clrMapOvr>
+    <a:masterClrMapping/>
+  </p:clrMapOvr>
+</p:notes>
+</file>
+
+<file path=ppt/notesSlides/notesSlide11.xml><?xml version="1.0" encoding="utf-8"?>
+<p:notes xmlns:a="http://schemas.openxmlformats.org/drawingml/2006/main" xmlns:r="http://schemas.openxmlformats.org/officeDocument/2006/relationships" xmlns:p="http://schemas.openxmlformats.org/presentationml/2006/main">
+  <p:cSld>
+    <p:spTree>
+      <p:nvGrpSpPr>
+        <p:cNvPr id="1" name=""/>
+        <p:cNvGrpSpPr/>
+        <p:nvPr/>
+      </p:nvGrpSpPr>
+      <p:grpSpPr>
+        <a:xfrm>
+          <a:off x="0" y="0"/>
+          <a:ext cx="0" cy="0"/>
+          <a:chOff x="0" y="0"/>
+          <a:chExt cx="0" cy="0"/>
+        </a:xfrm>
+      </p:grpSpPr>
+      <p:sp>
+        <p:nvSpPr>
+          <p:cNvPr id="2" name="Slide Image Placeholder 1"/>
+          <p:cNvSpPr>
+            <a:spLocks noGrp="1" noRot="1" noChangeAspect="1"/>
+          </p:cNvSpPr>
+          <p:nvPr>
+            <p:ph type="sldImg"/>
+          </p:nvPr>
+        </p:nvSpPr>
+        <p:spPr/>
+      </p:sp>
+      <p:sp>
+        <p:nvSpPr>
+          <p:cNvPr id="3" name="Notes Placeholder 2"/>
+          <p:cNvSpPr>
+            <a:spLocks noGrp="1"/>
+          </p:cNvSpPr>
+          <p:nvPr>
+            <p:ph type="body" idx="1"/>
+          </p:nvPr>
+        </p:nvSpPr>
+        <p:spPr/>
+        <p:txBody>
+          <a:bodyPr/>
+          <a:lstStyle/>
+          <a:p>
+            <a:r>
+              <a:rPr lang="en-US" dirty="0"/>
+              <a:t>Nu ligt het welvaartsverlies aan de andere kant: de markt kiest Qm=15, maar optimum is Qs=20. MMB ligt boven MPB omdat derden ook profiteren. Bij Qm=15 is het verschil precies het externe baten-bedrag.</a:t>
+            </a:r>
+            <a:endParaRPr lang="en-US" dirty="0"/>
+          </a:p>
+        </p:txBody>
+      </p:sp>
+      <p:sp>
+        <p:nvSpPr>
+          <p:cNvPr id="4" name="Slide Number Placeholder 3"/>
+          <p:cNvSpPr>
+            <a:spLocks noGrp="1"/>
+          </p:cNvSpPr>
+          <p:nvPr>
+            <p:ph type="sldNum" sz="quarter" idx="10"/>
+          </p:nvPr>
+        </p:nvSpPr>
+        <p:spPr/>
+        <p:txBody>
+          <a:bodyPr/>
+          <a:lstStyle/>
+          <a:p>
+            <a:fld id="{F7021451-1387-4CA6-816F-3879F97B5CBC}" type="slidenum">
+              <a:rPr lang="en-US"/>
+              <a:t>11</a:t>
+            </a:fld>
+            <a:endParaRPr lang="en-US"/>
+          </a:p>
+        </p:txBody>
+      </p:sp>
+    </p:spTree>
+    <p:extLst>
+      <p:ext uri="{BB962C8B-B14F-4D97-AF65-F5344CB8AC3E}">
+        <p14:creationId xmlns:p14="http://schemas.microsoft.com/office/powerpoint/2010/main" val="1024086991"/>
+      </p:ext>
+    </p:extLst>
+  </p:cSld>
+  <p:clrMapOvr>
+    <a:masterClrMapping/>
+  </p:clrMapOvr>
+</p:notes>
+</file>
+
+<file path=ppt/notesSlides/notesSlide12.xml><?xml version="1.0" encoding="utf-8"?>
+<p:notes xmlns:a="http://schemas.openxmlformats.org/drawingml/2006/main" xmlns:r="http://schemas.openxmlformats.org/officeDocument/2006/relationships" xmlns:p="http://schemas.openxmlformats.org/presentationml/2006/main">
+  <p:cSld>
+    <p:spTree>
+      <p:nvGrpSpPr>
+        <p:cNvPr id="1" name=""/>
+        <p:cNvGrpSpPr/>
+        <p:nvPr/>
+      </p:nvGrpSpPr>
+      <p:grpSpPr>
+        <a:xfrm>
+          <a:off x="0" y="0"/>
+          <a:ext cx="0" cy="0"/>
+          <a:chOff x="0" y="0"/>
+          <a:chExt cx="0" cy="0"/>
+        </a:xfrm>
+      </p:grpSpPr>
+      <p:sp>
+        <p:nvSpPr>
+          <p:cNvPr id="2" name="Slide Image Placeholder 1"/>
+          <p:cNvSpPr>
+            <a:spLocks noGrp="1" noRot="1" noChangeAspect="1"/>
+          </p:cNvSpPr>
+          <p:nvPr>
+            <p:ph type="sldImg"/>
+          </p:nvPr>
+        </p:nvSpPr>
+        <p:spPr/>
+      </p:sp>
+      <p:sp>
+        <p:nvSpPr>
+          <p:cNvPr id="3" name="Notes Placeholder 2"/>
+          <p:cNvSpPr>
+            <a:spLocks noGrp="1"/>
+          </p:cNvSpPr>
+          <p:nvPr>
+            <p:ph type="body" idx="1"/>
+          </p:nvPr>
+        </p:nvSpPr>
+        <p:spPr/>
+        <p:txBody>
+          <a:bodyPr/>
+          <a:lstStyle/>
+          <a:p>
+            <a:r>
+              <a:rPr lang="en-US" dirty="0"/>
+              <a:t>Gebruik deze tabel als retrieval-oefening: dek een kolom af en laat leerlingen reconstrueren. Let op de spiegel-structuur — dat maakt het beter te onthouden.</a:t>
+            </a:r>
+            <a:endParaRPr lang="en-US" dirty="0"/>
+          </a:p>
+        </p:txBody>
+      </p:sp>
+      <p:sp>
+        <p:nvSpPr>
+          <p:cNvPr id="4" name="Slide Number Placeholder 3"/>
+          <p:cNvSpPr>
+            <a:spLocks noGrp="1"/>
+          </p:cNvSpPr>
+          <p:nvPr>
+            <p:ph type="sldNum" sz="quarter" idx="10"/>
+          </p:nvPr>
+        </p:nvSpPr>
+        <p:spPr/>
+        <p:txBody>
+          <a:bodyPr/>
+          <a:lstStyle/>
+          <a:p>
+            <a:fld id="{F7021451-1387-4CA6-816F-3879F97B5CBC}" type="slidenum">
+              <a:rPr lang="en-US"/>
+              <a:t>12</a:t>
+            </a:fld>
+            <a:endParaRPr lang="en-US"/>
+          </a:p>
+        </p:txBody>
+      </p:sp>
+    </p:spTree>
+    <p:extLst>
+      <p:ext uri="{BB962C8B-B14F-4D97-AF65-F5344CB8AC3E}">
+        <p14:creationId xmlns:p14="http://schemas.microsoft.com/office/powerpoint/2010/main" val="1024086991"/>
+      </p:ext>
+    </p:extLst>
+  </p:cSld>
+  <p:clrMapOvr>
+    <a:masterClrMapping/>
+  </p:clrMapOvr>
+</p:notes>
+</file>
+
+<file path=ppt/notesSlides/notesSlide13.xml><?xml version="1.0" encoding="utf-8"?>
+<p:notes xmlns:a="http://schemas.openxmlformats.org/drawingml/2006/main" xmlns:r="http://schemas.openxmlformats.org/officeDocument/2006/relationships" xmlns:p="http://schemas.openxmlformats.org/presentationml/2006/main">
+  <p:cSld>
+    <p:spTree>
+      <p:nvGrpSpPr>
+        <p:cNvPr id="1" name=""/>
+        <p:cNvGrpSpPr/>
+        <p:nvPr/>
+      </p:nvGrpSpPr>
+      <p:grpSpPr>
+        <a:xfrm>
+          <a:off x="0" y="0"/>
+          <a:ext cx="0" cy="0"/>
+          <a:chOff x="0" y="0"/>
+          <a:chExt cx="0" cy="0"/>
+        </a:xfrm>
+      </p:grpSpPr>
+      <p:sp>
+        <p:nvSpPr>
+          <p:cNvPr id="2" name="Slide Image Placeholder 1"/>
+          <p:cNvSpPr>
+            <a:spLocks noGrp="1" noRot="1" noChangeAspect="1"/>
+          </p:cNvSpPr>
+          <p:nvPr>
+            <p:ph type="sldImg"/>
+          </p:nvPr>
+        </p:nvSpPr>
+        <p:spPr/>
+      </p:sp>
+      <p:sp>
+        <p:nvSpPr>
+          <p:cNvPr id="3" name="Notes Placeholder 2"/>
+          <p:cNvSpPr>
+            <a:spLocks noGrp="1"/>
+          </p:cNvSpPr>
+          <p:nvPr>
+            <p:ph type="body" idx="1"/>
+          </p:nvPr>
+        </p:nvSpPr>
+        <p:spPr/>
+        <p:txBody>
+          <a:bodyPr/>
+          <a:lstStyle/>
+          <a:p>
+            <a:r>
+              <a:rPr lang="en-US" dirty="0"/>
+              <a:t>Internaliseren = de externe kosten of baten in de prijs verwerken. De volgende dia laat zien hoe dat er in een vraag-aanbodgrafiek uitziet.</a:t>
+            </a:r>
+            <a:endParaRPr lang="en-US" dirty="0"/>
+          </a:p>
+        </p:txBody>
+      </p:sp>
+      <p:sp>
+        <p:nvSpPr>
+          <p:cNvPr id="4" name="Slide Number Placeholder 3"/>
+          <p:cNvSpPr>
+            <a:spLocks noGrp="1"/>
+          </p:cNvSpPr>
+          <p:nvPr>
+            <p:ph type="sldNum" sz="quarter" idx="10"/>
+          </p:nvPr>
+        </p:nvSpPr>
+        <p:spPr/>
+        <p:txBody>
+          <a:bodyPr/>
+          <a:lstStyle/>
+          <a:p>
+            <a:fld id="{F7021451-1387-4CA6-816F-3879F97B5CBC}" type="slidenum">
+              <a:rPr lang="en-US"/>
+              <a:t>13</a:t>
+            </a:fld>
+            <a:endParaRPr lang="en-US"/>
+          </a:p>
+        </p:txBody>
+      </p:sp>
+    </p:spTree>
+    <p:extLst>
+      <p:ext uri="{BB962C8B-B14F-4D97-AF65-F5344CB8AC3E}">
+        <p14:creationId xmlns:p14="http://schemas.microsoft.com/office/powerpoint/2010/main" val="1024086991"/>
+      </p:ext>
+    </p:extLst>
+  </p:cSld>
+  <p:clrMapOvr>
+    <a:masterClrMapping/>
+  </p:clrMapOvr>
+</p:notes>
+</file>
+
+<file path=ppt/notesSlides/notesSlide14.xml><?xml version="1.0" encoding="utf-8"?>
+<p:notes xmlns:a="http://schemas.openxmlformats.org/drawingml/2006/main" xmlns:r="http://schemas.openxmlformats.org/officeDocument/2006/relationships" xmlns:p="http://schemas.openxmlformats.org/presentationml/2006/main">
+  <p:cSld>
+    <p:spTree>
+      <p:nvGrpSpPr>
+        <p:cNvPr id="1" name=""/>
+        <p:cNvGrpSpPr/>
+        <p:nvPr/>
+      </p:nvGrpSpPr>
+      <p:grpSpPr>
+        <a:xfrm>
+          <a:off x="0" y="0"/>
+          <a:ext cx="0" cy="0"/>
+          <a:chOff x="0" y="0"/>
+          <a:chExt cx="0" cy="0"/>
+        </a:xfrm>
+      </p:grpSpPr>
+      <p:sp>
+        <p:nvSpPr>
+          <p:cNvPr id="2" name="Slide Image Placeholder 1"/>
+          <p:cNvSpPr>
+            <a:spLocks noGrp="1" noRot="1" noChangeAspect="1"/>
+          </p:cNvSpPr>
+          <p:nvPr>
+            <p:ph type="sldImg"/>
+          </p:nvPr>
+        </p:nvSpPr>
+        <p:spPr/>
+      </p:sp>
+      <p:sp>
+        <p:nvSpPr>
+          <p:cNvPr id="3" name="Notes Placeholder 2"/>
+          <p:cNvSpPr>
+            <a:spLocks noGrp="1"/>
+          </p:cNvSpPr>
+          <p:nvPr>
+            <p:ph type="body" idx="1"/>
+          </p:nvPr>
+        </p:nvSpPr>
+        <p:spPr/>
+        <p:txBody>
+          <a:bodyPr/>
+          <a:lstStyle/>
+          <a:p>
+            <a:r>
+              <a:rPr lang="en-US" dirty="0"/>
+              <a:t>Voorbeeld: vliegtaks van €10 per ticket. Het aanbod verschuift omhoog met de belasting. Consument betaalt €30 (was €25). Aanbieder ontvangt €30-€10=€20. Hoeveelheid daalt van 15 naar 10 vluchten. De gele rechthoek = belastingopbrengst.</a:t>
+            </a:r>
+            <a:endParaRPr lang="en-US" dirty="0"/>
+          </a:p>
+        </p:txBody>
+      </p:sp>
+      <p:sp>
+        <p:nvSpPr>
+          <p:cNvPr id="4" name="Slide Number Placeholder 3"/>
+          <p:cNvSpPr>
+            <a:spLocks noGrp="1"/>
+          </p:cNvSpPr>
+          <p:nvPr>
+            <p:ph type="sldNum" sz="quarter" idx="10"/>
+          </p:nvPr>
+        </p:nvSpPr>
+        <p:spPr/>
+        <p:txBody>
+          <a:bodyPr/>
+          <a:lstStyle/>
+          <a:p>
+            <a:fld id="{F7021451-1387-4CA6-816F-3879F97B5CBC}" type="slidenum">
+              <a:rPr lang="en-US"/>
+              <a:t>14</a:t>
+            </a:fld>
+            <a:endParaRPr lang="en-US"/>
+          </a:p>
+        </p:txBody>
+      </p:sp>
+    </p:spTree>
+    <p:extLst>
+      <p:ext uri="{BB962C8B-B14F-4D97-AF65-F5344CB8AC3E}">
+        <p14:creationId xmlns:p14="http://schemas.microsoft.com/office/powerpoint/2010/main" val="1024086991"/>
+      </p:ext>
+    </p:extLst>
+  </p:cSld>
+  <p:clrMapOvr>
+    <a:masterClrMapping/>
+  </p:clrMapOvr>
+</p:notes>
+</file>
+
+<file path=ppt/notesSlides/notesSlide15.xml><?xml version="1.0" encoding="utf-8"?>
+<p:notes xmlns:a="http://schemas.openxmlformats.org/drawingml/2006/main" xmlns:r="http://schemas.openxmlformats.org/officeDocument/2006/relationships" xmlns:p="http://schemas.openxmlformats.org/presentationml/2006/main">
+  <p:cSld>
+    <p:spTree>
+      <p:nvGrpSpPr>
+        <p:cNvPr id="1" name=""/>
+        <p:cNvGrpSpPr/>
+        <p:nvPr/>
+      </p:nvGrpSpPr>
+      <p:grpSpPr>
+        <a:xfrm>
+          <a:off x="0" y="0"/>
+          <a:ext cx="0" cy="0"/>
+          <a:chOff x="0" y="0"/>
+          <a:chExt cx="0" cy="0"/>
+        </a:xfrm>
+      </p:grpSpPr>
+      <p:sp>
+        <p:nvSpPr>
+          <p:cNvPr id="2" name="Slide Image Placeholder 1"/>
+          <p:cNvSpPr>
+            <a:spLocks noGrp="1" noRot="1" noChangeAspect="1"/>
+          </p:cNvSpPr>
+          <p:nvPr>
+            <p:ph type="sldImg"/>
+          </p:nvPr>
+        </p:nvSpPr>
+        <p:spPr/>
+      </p:sp>
+      <p:sp>
+        <p:nvSpPr>
+          <p:cNvPr id="3" name="Notes Placeholder 2"/>
+          <p:cNvSpPr>
+            <a:spLocks noGrp="1"/>
+          </p:cNvSpPr>
+          <p:nvPr>
+            <p:ph type="body" idx="1"/>
+          </p:nvPr>
+        </p:nvSpPr>
+        <p:spPr/>
+        <p:txBody>
+          <a:bodyPr/>
+          <a:lstStyle/>
+          <a:p>
+            <a:r>
+              <a:rPr lang="en-US" dirty="0"/>
+              <a:t>Deze matrix vat alles samen: welk probleem krijgt welk instrument? Gebruik hem als retrieval: noem een voorbeeld (rookverbod, kinderopvangtoeslag, ACM-boete) en laat de klas de rij invullen.</a:t>
+            </a:r>
+            <a:endParaRPr lang="en-US" dirty="0"/>
+          </a:p>
+        </p:txBody>
+      </p:sp>
+      <p:sp>
+        <p:nvSpPr>
+          <p:cNvPr id="4" name="Slide Number Placeholder 3"/>
+          <p:cNvSpPr>
+            <a:spLocks noGrp="1"/>
+          </p:cNvSpPr>
+          <p:nvPr>
+            <p:ph type="sldNum" sz="quarter" idx="10"/>
+          </p:nvPr>
+        </p:nvSpPr>
+        <p:spPr/>
+        <p:txBody>
+          <a:bodyPr/>
+          <a:lstStyle/>
+          <a:p>
+            <a:fld id="{F7021451-1387-4CA6-816F-3879F97B5CBC}" type="slidenum">
+              <a:rPr lang="en-US"/>
+              <a:t>15</a:t>
+            </a:fld>
+            <a:endParaRPr lang="en-US"/>
+          </a:p>
+        </p:txBody>
+      </p:sp>
+    </p:spTree>
+    <p:extLst>
+      <p:ext uri="{BB962C8B-B14F-4D97-AF65-F5344CB8AC3E}">
+        <p14:creationId xmlns:p14="http://schemas.microsoft.com/office/powerpoint/2010/main" val="1024086991"/>
+      </p:ext>
+    </p:extLst>
+  </p:cSld>
+  <p:clrMapOvr>
+    <a:masterClrMapping/>
+  </p:clrMapOvr>
+</p:notes>
+</file>
+
+<file path=ppt/notesSlides/notesSlide16.xml><?xml version="1.0" encoding="utf-8"?>
+<p:notes xmlns:a="http://schemas.openxmlformats.org/drawingml/2006/main" xmlns:r="http://schemas.openxmlformats.org/officeDocument/2006/relationships" xmlns:p="http://schemas.openxmlformats.org/presentationml/2006/main">
+  <p:cSld>
+    <p:spTree>
+      <p:nvGrpSpPr>
+        <p:cNvPr id="1" name=""/>
+        <p:cNvGrpSpPr/>
+        <p:nvPr/>
+      </p:nvGrpSpPr>
+      <p:grpSpPr>
+        <a:xfrm>
+          <a:off x="0" y="0"/>
+          <a:ext cx="0" cy="0"/>
+          <a:chOff x="0" y="0"/>
+          <a:chExt cx="0" cy="0"/>
+        </a:xfrm>
+      </p:grpSpPr>
+      <p:sp>
+        <p:nvSpPr>
+          <p:cNvPr id="2" name="Slide Image Placeholder 1"/>
+          <p:cNvSpPr>
+            <a:spLocks noGrp="1" noRot="1" noChangeAspect="1"/>
+          </p:cNvSpPr>
+          <p:nvPr>
+            <p:ph type="sldImg"/>
+          </p:nvPr>
+        </p:nvSpPr>
+        <p:spPr/>
+      </p:sp>
+      <p:sp>
+        <p:nvSpPr>
+          <p:cNvPr id="3" name="Notes Placeholder 2"/>
+          <p:cNvSpPr>
+            <a:spLocks noGrp="1"/>
+          </p:cNvSpPr>
+          <p:nvPr>
+            <p:ph type="body" idx="1"/>
+          </p:nvPr>
+        </p:nvSpPr>
+        <p:spPr/>
+        <p:txBody>
+          <a:bodyPr/>
+          <a:lstStyle/>
+          <a:p>
+            <a:r>
+              <a:rPr lang="en-US" dirty="0"/>
+              <a:t>Laat de drie valkuilen expliciet zien. Vraag bij elk: welke leerling is hier gisteren nog ingetrapt? Dit zijn de klassieke denk­fouten bij toetsen.</a:t>
+            </a:r>
+            <a:endParaRPr lang="en-US" dirty="0"/>
+          </a:p>
+        </p:txBody>
+      </p:sp>
+      <p:sp>
+        <p:nvSpPr>
+          <p:cNvPr id="4" name="Slide Number Placeholder 3"/>
+          <p:cNvSpPr>
+            <a:spLocks noGrp="1"/>
+          </p:cNvSpPr>
+          <p:nvPr>
+            <p:ph type="sldNum" sz="quarter" idx="10"/>
+          </p:nvPr>
+        </p:nvSpPr>
+        <p:spPr/>
+        <p:txBody>
+          <a:bodyPr/>
+          <a:lstStyle/>
+          <a:p>
+            <a:fld id="{F7021451-1387-4CA6-816F-3879F97B5CBC}" type="slidenum">
+              <a:rPr lang="en-US"/>
+              <a:t>16</a:t>
+            </a:fld>
+            <a:endParaRPr lang="en-US"/>
+          </a:p>
+        </p:txBody>
+      </p:sp>
+    </p:spTree>
+    <p:extLst>
+      <p:ext uri="{BB962C8B-B14F-4D97-AF65-F5344CB8AC3E}">
+        <p14:creationId xmlns:p14="http://schemas.microsoft.com/office/powerpoint/2010/main" val="1024086991"/>
+      </p:ext>
+    </p:extLst>
+  </p:cSld>
+  <p:clrMapOvr>
+    <a:masterClrMapping/>
+  </p:clrMapOvr>
+</p:notes>
+</file>
+
+<file path=ppt/notesSlides/notesSlide17.xml><?xml version="1.0" encoding="utf-8"?>
+<p:notes xmlns:a="http://schemas.openxmlformats.org/drawingml/2006/main" xmlns:r="http://schemas.openxmlformats.org/officeDocument/2006/relationships" xmlns:p="http://schemas.openxmlformats.org/presentationml/2006/main">
+  <p:cSld>
+    <p:spTree>
+      <p:nvGrpSpPr>
+        <p:cNvPr id="1" name=""/>
+        <p:cNvGrpSpPr/>
+        <p:nvPr/>
+      </p:nvGrpSpPr>
+      <p:grpSpPr>
+        <a:xfrm>
+          <a:off x="0" y="0"/>
+          <a:ext cx="0" cy="0"/>
+          <a:chOff x="0" y="0"/>
+          <a:chExt cx="0" cy="0"/>
+        </a:xfrm>
+      </p:grpSpPr>
+      <p:sp>
+        <p:nvSpPr>
+          <p:cNvPr id="2" name="Slide Image Placeholder 1"/>
+          <p:cNvSpPr>
+            <a:spLocks noGrp="1" noRot="1" noChangeAspect="1"/>
+          </p:cNvSpPr>
+          <p:nvPr>
+            <p:ph type="sldImg"/>
+          </p:nvPr>
+        </p:nvSpPr>
+        <p:spPr/>
+      </p:sp>
+      <p:sp>
+        <p:nvSpPr>
+          <p:cNvPr id="3" name="Notes Placeholder 2"/>
+          <p:cNvSpPr>
+            <a:spLocks noGrp="1"/>
+          </p:cNvSpPr>
+          <p:nvPr>
+            <p:ph type="body" idx="1"/>
+          </p:nvPr>
+        </p:nvSpPr>
+        <p:spPr/>
+        <p:txBody>
+          <a:bodyPr/>
+          <a:lstStyle/>
+          <a:p>
+            <a:r>
+              <a:rPr lang="en-US" dirty="0"/>
+              <a:t>Sluit af met een ‘pair &amp; share’: leerlingen leggen in duo's de zes punten aan elkaar uit zonder dia. Wie struikelt waar? Die paragraaf nog even terug.</a:t>
+            </a:r>
+            <a:endParaRPr lang="en-US" dirty="0"/>
+          </a:p>
+        </p:txBody>
+      </p:sp>
+      <p:sp>
+        <p:nvSpPr>
+          <p:cNvPr id="4" name="Slide Number Placeholder 3"/>
+          <p:cNvSpPr>
+            <a:spLocks noGrp="1"/>
+          </p:cNvSpPr>
+          <p:nvPr>
+            <p:ph type="sldNum" sz="quarter" idx="10"/>
+          </p:nvPr>
+        </p:nvSpPr>
+        <p:spPr/>
+        <p:txBody>
+          <a:bodyPr/>
+          <a:lstStyle/>
+          <a:p>
+            <a:fld id="{F7021451-1387-4CA6-816F-3879F97B5CBC}" type="slidenum">
+              <a:rPr lang="en-US"/>
+              <a:t>17</a:t>
             </a:fld>
             <a:endParaRPr lang="en-US"/>
           </a:p>
@@ -687,7 +1310,7 @@
           <a:p>
             <a:r>
               <a:rPr lang="en-US" dirty="0"/>
-              <a:t>Dit zijn de vijf leerdoelen voor deze les. We beginnen bij marktfalen en werken toe naar de instrumenten van de overheid.</a:t>
+              <a:t>Kondig de zes leerdoelen aan. Benadruk dat de leerlingen aan het eind ook een grafiek voor externe effecten moeten kunnen lezen.</a:t>
             </a:r>
             <a:endParaRPr lang="en-US" dirty="0"/>
           </a:p>
@@ -775,7 +1398,7 @@
           <a:p>
             <a:r>
               <a:rPr lang="en-US" dirty="0"/>
-              <a:t>Marktfalen: situaties waarin de vrije markt niet tot een efficiënt resultaat leidt. Drie vormen: marktmacht, externe effecten, en collectieve goederen.</a:t>
+              <a:t>Deze dia is de kapstok van de hele les. Links staan de drie oorzaken van marktfalen, rechts de drie instrumenten waarmee de overheid ingrijpt. Elke volgende dia werkt één rij uit.</a:t>
             </a:r>
             <a:endParaRPr lang="en-US" dirty="0"/>
           </a:p>
@@ -863,7 +1486,7 @@
           <a:p>
             <a:r>
               <a:rPr lang="en-US" dirty="0"/>
-              <a:t>Natuurlijk monopolie: als één aanbieder goedkoper kan produceren dan meerdere. De overheid reguleert om misbruik te voorkomen.</a:t>
+              <a:t>Stel het contrast expliciet: wanneer levert de markt wél een optimum, en wanneer niet? Herinner de leerlingen aan hoofdstuk 1 (vraag en aanbod).</a:t>
             </a:r>
             <a:endParaRPr lang="en-US" dirty="0"/>
           </a:p>
@@ -951,7 +1574,7 @@
           <a:p>
             <a:r>
               <a:rPr lang="en-US" dirty="0"/>
-              <a:t>Negatieve externe effecten: kosten die niet in de prijs zitten. Voorbeeld: vervuiling door vliegverkeer.</a:t>
+              <a:t>Leg uit dat ‘natuurlijk’ slaat op de kostenstructuur: bij hoge vaste en lage variabele kosten is één aanbieder technisch efficiënter. De overheid reguleert dan de prijs (bv. via ACM).</a:t>
             </a:r>
             <a:endParaRPr lang="en-US" dirty="0"/>
           </a:p>
@@ -1039,7 +1662,7 @@
           <a:p>
             <a:r>
               <a:rPr lang="en-US" dirty="0"/>
-              <a:t>Positieve externe effecten: baten die niet in de prijs zitten. Voorbeeld: vaccinatie. De markt produceert te weinig van dit goed.</a:t>
+              <a:t>Laat de GTK-curve zien en wijs beide punten aan. Eén aanbieder op Q=100: GTK=€4. Twee aanbieders elk op Q=50: GTK=€6. Dalende GTK is dé signatuur van een natuurlijk monopolie.</a:t>
             </a:r>
             <a:endParaRPr lang="en-US" dirty="0"/>
           </a:p>
@@ -1127,7 +1750,7 @@
           <a:p>
             <a:r>
               <a:rPr lang="en-US" dirty="0"/>
-              <a:t>Internaliseren: externe effecten in de prijs verwerken. Negatief: belasting. Positief: subsidie.</a:t>
+              <a:t>De drempel van 35 % is het ankerpunt. Vraag klassikaal: wat is het marktaandeel van Albert Heijn? Van Booking? Is dat boven de drempel? Daarna de Google-casus als scherp voorbeeld.</a:t>
             </a:r>
             <a:endParaRPr lang="en-US" dirty="0"/>
           </a:p>
@@ -1215,7 +1838,7 @@
           <a:p>
             <a:r>
               <a:rPr lang="en-US" dirty="0"/>
-              <a:t>Vier instrumenten: mededingingsbeleid, belastingen, subsidies, en prijsbeleid.</a:t>
+              <a:t>Laat de keten stap voor stap oplopen. Vraag tussendoor: wie draagt de kosten eigenlijk? De gouden lijn: 'de prijs liegt' — hij vertelt niet de maatschappelijke kosten.</a:t>
             </a:r>
             <a:endParaRPr lang="en-US" dirty="0"/>
           </a:p>
@@ -1303,7 +1926,7 @@
           <a:p>
             <a:r>
               <a:rPr lang="en-US" dirty="0"/>
-              <a:t>Drie veelgemaakte fouten. Bespreek klassikaal.</a:t>
+              <a:t>Lees de grafiek samen. V = vraag. MPK = private marginale kosten (wat het bedrijf ziet). MMK = maatschappelijke marginale kosten (inclusief vervuiling). Markt kiest Qm=25, maar optimum is Qs=20. Het rode driehoekje = welvaartsverlies.</a:t>
             </a:r>
             <a:endParaRPr lang="en-US" dirty="0"/>
           </a:p>
@@ -1945,8 +2568,8 @@
         </p:nvSpPr>
         <p:spPr>
           <a:xfrm>
-            <a:off x="640080" y="457200"/>
-            <a:ext cx="7863840" cy="640080"/>
+            <a:off x="457200" y="0"/>
+            <a:ext cx="8229600" cy="685800"/>
           </a:xfrm>
           <a:prstGeom prst="rect">
             <a:avLst/>
@@ -1962,7 +2585,7 @@
               <a:buNone/>
             </a:pPr>
             <a:r>
-              <a:rPr lang="en-US" sz="2800" b="1" dirty="0">
+              <a:rPr lang="en-US" sz="2400" b="1" dirty="0">
                 <a:solidFill>
                   <a:srgbClr val="FFFFFF"/>
                 </a:solidFill>
@@ -1970,22 +2593,51 @@
                 <a:ea typeface="Arial" pitchFamily="34" charset="-122"/>
                 <a:cs typeface="Arial" pitchFamily="34" charset="-120"/>
               </a:rPr>
-              <a:t>Samenvatting</a:t>
-            </a:r>
-            <a:endParaRPr lang="en-US" sz="2800" dirty="0"/>
-          </a:p>
-        </p:txBody>
-      </p:sp>
-      <p:sp>
-        <p:nvSpPr>
-          <p:cNvPr id="3" name="Text 1"/>
-          <p:cNvSpPr/>
-          <p:nvPr/>
-        </p:nvSpPr>
-        <p:spPr>
-          <a:xfrm>
-            <a:off x="640080" y="1051560"/>
-            <a:ext cx="7863840" cy="365760"/>
+              <a:t>Positief extern effect — wat gebeurt er?</a:t>
+            </a:r>
+            <a:endParaRPr lang="en-US" sz="2400" dirty="0"/>
+          </a:p>
+        </p:txBody>
+      </p:sp>
+      <p:sp>
+        <p:nvSpPr>
+          <p:cNvPr id="3" name="Shape 1"/>
+          <p:cNvSpPr/>
+          <p:nvPr/>
+        </p:nvSpPr>
+        <p:spPr>
+          <a:xfrm>
+            <a:off x="1371600" y="1005840"/>
+            <a:ext cx="6400800" cy="548640"/>
+          </a:xfrm>
+          <a:prstGeom prst="rect">
+            <a:avLst>
+              <a:gd name="adj" fmla="val 6667"/>
+            </a:avLst>
+          </a:prstGeom>
+          <a:solidFill>
+            <a:srgbClr val="F9F6F1"/>
+          </a:solidFill>
+          <a:ln/>
+          <a:effectLst>
+            <a:outerShdw sx="100000" sy="100000" kx="0" ky="0" algn="bl" rotWithShape="0" blurRad="76200" dist="25400" dir="8100000">
+              <a:srgbClr val="000000">
+                <a:alpha val="10000"/>
+              </a:srgbClr>
+            </a:outerShdw>
+          </a:effectLst>
+        </p:spPr>
+      </p:sp>
+      <p:sp>
+        <p:nvSpPr>
+          <p:cNvPr id="4" name="Text 2"/>
+          <p:cNvSpPr/>
+          <p:nvPr/>
+        </p:nvSpPr>
+        <p:spPr>
+          <a:xfrm>
+            <a:off x="1554480" y="1005840"/>
+            <a:ext cx="6126480" cy="548640"/>
           </a:xfrm>
           <a:prstGeom prst="rect">
             <a:avLst/>
@@ -1994,13 +2646,3340 @@
           <a:ln/>
         </p:spPr>
         <p:txBody>
-          <a:bodyPr wrap="square" rtlCol="0" anchor="ctr"/>
+          <a:bodyPr wrap="square" lIns="0" tIns="0" rIns="0" bIns="0" rtlCol="0" anchor="ctr"/>
           <a:lstStyle/>
           <a:p>
             <a:pPr indent="0" marL="0">
               <a:buNone/>
             </a:pPr>
             <a:r>
+              <a:rPr lang="en-US" sz="1500" dirty="0">
+                <a:solidFill>
+                  <a:srgbClr val="2D3748"/>
+                </a:solidFill>
+                <a:latin typeface="Arial" pitchFamily="34" charset="0"/>
+                <a:ea typeface="Arial" pitchFamily="34" charset="-122"/>
+                <a:cs typeface="Arial" pitchFamily="34" charset="-120"/>
+              </a:rPr>
+              <a:t>Iemand koopt / consumeert</a:t>
+            </a:r>
+            <a:endParaRPr lang="en-US" sz="1500" dirty="0"/>
+          </a:p>
+        </p:txBody>
+      </p:sp>
+      <p:sp>
+        <p:nvSpPr>
+          <p:cNvPr id="5" name="Shape 3"/>
+          <p:cNvSpPr/>
+          <p:nvPr/>
+        </p:nvSpPr>
+        <p:spPr>
+          <a:xfrm>
+            <a:off x="1371600" y="1664208"/>
+            <a:ext cx="6400800" cy="548640"/>
+          </a:xfrm>
+          <a:prstGeom prst="rect">
+            <a:avLst>
+              <a:gd name="adj" fmla="val 6667"/>
+            </a:avLst>
+          </a:prstGeom>
+          <a:solidFill>
+            <a:srgbClr val="F9F6F1"/>
+          </a:solidFill>
+          <a:ln/>
+          <a:effectLst>
+            <a:outerShdw sx="100000" sy="100000" kx="0" ky="0" algn="bl" rotWithShape="0" blurRad="76200" dist="25400" dir="8100000">
+              <a:srgbClr val="000000">
+                <a:alpha val="10000"/>
+              </a:srgbClr>
+            </a:outerShdw>
+          </a:effectLst>
+        </p:spPr>
+      </p:sp>
+      <p:sp>
+        <p:nvSpPr>
+          <p:cNvPr id="6" name="Text 4"/>
+          <p:cNvSpPr/>
+          <p:nvPr/>
+        </p:nvSpPr>
+        <p:spPr>
+          <a:xfrm>
+            <a:off x="1554480" y="1664208"/>
+            <a:ext cx="6126480" cy="548640"/>
+          </a:xfrm>
+          <a:prstGeom prst="rect">
+            <a:avLst/>
+          </a:prstGeom>
+          <a:noFill/>
+          <a:ln/>
+        </p:spPr>
+        <p:txBody>
+          <a:bodyPr wrap="square" lIns="0" tIns="0" rIns="0" bIns="0" rtlCol="0" anchor="ctr"/>
+          <a:lstStyle/>
+          <a:p>
+            <a:pPr indent="0" marL="0">
+              <a:buNone/>
+            </a:pPr>
+            <a:r>
+              <a:rPr lang="en-US" sz="1500" dirty="0">
+                <a:solidFill>
+                  <a:srgbClr val="2D3748"/>
+                </a:solidFill>
+                <a:latin typeface="Arial" pitchFamily="34" charset="0"/>
+                <a:ea typeface="Arial" pitchFamily="34" charset="-122"/>
+                <a:cs typeface="Arial" pitchFamily="34" charset="-120"/>
+              </a:rPr>
+              <a:t>↓  Derden profiteren mee (meelifter)</a:t>
+            </a:r>
+            <a:endParaRPr lang="en-US" sz="1500" dirty="0"/>
+          </a:p>
+        </p:txBody>
+      </p:sp>
+      <p:sp>
+        <p:nvSpPr>
+          <p:cNvPr id="7" name="Shape 5"/>
+          <p:cNvSpPr/>
+          <p:nvPr/>
+        </p:nvSpPr>
+        <p:spPr>
+          <a:xfrm>
+            <a:off x="1371600" y="2322576"/>
+            <a:ext cx="6400800" cy="548640"/>
+          </a:xfrm>
+          <a:prstGeom prst="rect">
+            <a:avLst>
+              <a:gd name="adj" fmla="val 6667"/>
+            </a:avLst>
+          </a:prstGeom>
+          <a:solidFill>
+            <a:srgbClr val="1A5276"/>
+          </a:solidFill>
+          <a:ln/>
+          <a:effectLst>
+            <a:outerShdw sx="100000" sy="100000" kx="0" ky="0" algn="bl" rotWithShape="0" blurRad="76200" dist="25400" dir="8100000">
+              <a:srgbClr val="000000">
+                <a:alpha val="10000"/>
+              </a:srgbClr>
+            </a:outerShdw>
+          </a:effectLst>
+        </p:spPr>
+      </p:sp>
+      <p:sp>
+        <p:nvSpPr>
+          <p:cNvPr id="8" name="Text 6"/>
+          <p:cNvSpPr/>
+          <p:nvPr/>
+        </p:nvSpPr>
+        <p:spPr>
+          <a:xfrm>
+            <a:off x="1554480" y="2322576"/>
+            <a:ext cx="6126480" cy="548640"/>
+          </a:xfrm>
+          <a:prstGeom prst="rect">
+            <a:avLst/>
+          </a:prstGeom>
+          <a:noFill/>
+          <a:ln/>
+        </p:spPr>
+        <p:txBody>
+          <a:bodyPr wrap="square" lIns="0" tIns="0" rIns="0" bIns="0" rtlCol="0" anchor="ctr"/>
+          <a:lstStyle/>
+          <a:p>
+            <a:pPr indent="0" marL="0">
+              <a:buNone/>
+            </a:pPr>
+            <a:r>
+              <a:rPr lang="en-US" sz="1500" b="1" dirty="0">
+                <a:solidFill>
+                  <a:srgbClr val="FFFFFF"/>
+                </a:solidFill>
+                <a:latin typeface="Arial" pitchFamily="34" charset="0"/>
+                <a:ea typeface="Arial" pitchFamily="34" charset="-122"/>
+                <a:cs typeface="Arial" pitchFamily="34" charset="-120"/>
+              </a:rPr>
+              <a:t>↓  Baten zitten niet in de prijs</a:t>
+            </a:r>
+            <a:endParaRPr lang="en-US" sz="1500" dirty="0"/>
+          </a:p>
+        </p:txBody>
+      </p:sp>
+      <p:sp>
+        <p:nvSpPr>
+          <p:cNvPr id="9" name="Shape 7"/>
+          <p:cNvSpPr/>
+          <p:nvPr/>
+        </p:nvSpPr>
+        <p:spPr>
+          <a:xfrm>
+            <a:off x="1371600" y="2980944"/>
+            <a:ext cx="6400800" cy="548640"/>
+          </a:xfrm>
+          <a:prstGeom prst="rect">
+            <a:avLst>
+              <a:gd name="adj" fmla="val 6667"/>
+            </a:avLst>
+          </a:prstGeom>
+          <a:solidFill>
+            <a:srgbClr val="F9F6F1"/>
+          </a:solidFill>
+          <a:ln/>
+          <a:effectLst>
+            <a:outerShdw sx="100000" sy="100000" kx="0" ky="0" algn="bl" rotWithShape="0" blurRad="76200" dist="25400" dir="8100000">
+              <a:srgbClr val="000000">
+                <a:alpha val="10000"/>
+              </a:srgbClr>
+            </a:outerShdw>
+          </a:effectLst>
+        </p:spPr>
+      </p:sp>
+      <p:sp>
+        <p:nvSpPr>
+          <p:cNvPr id="10" name="Text 8"/>
+          <p:cNvSpPr/>
+          <p:nvPr/>
+        </p:nvSpPr>
+        <p:spPr>
+          <a:xfrm>
+            <a:off x="1554480" y="2980944"/>
+            <a:ext cx="6126480" cy="548640"/>
+          </a:xfrm>
+          <a:prstGeom prst="rect">
+            <a:avLst/>
+          </a:prstGeom>
+          <a:noFill/>
+          <a:ln/>
+        </p:spPr>
+        <p:txBody>
+          <a:bodyPr wrap="square" lIns="0" tIns="0" rIns="0" bIns="0" rtlCol="0" anchor="ctr"/>
+          <a:lstStyle/>
+          <a:p>
+            <a:pPr indent="0" marL="0">
+              <a:buNone/>
+            </a:pPr>
+            <a:r>
+              <a:rPr lang="en-US" sz="1500" dirty="0">
+                <a:solidFill>
+                  <a:srgbClr val="2D3748"/>
+                </a:solidFill>
+                <a:latin typeface="Arial" pitchFamily="34" charset="0"/>
+                <a:ea typeface="Arial" pitchFamily="34" charset="-122"/>
+                <a:cs typeface="Arial" pitchFamily="34" charset="-120"/>
+              </a:rPr>
+              <a:t>↓  Prijs te hoog → te weinig consumptie</a:t>
+            </a:r>
+            <a:endParaRPr lang="en-US" sz="1500" dirty="0"/>
+          </a:p>
+        </p:txBody>
+      </p:sp>
+      <p:sp>
+        <p:nvSpPr>
+          <p:cNvPr id="11" name="Shape 9"/>
+          <p:cNvSpPr/>
+          <p:nvPr/>
+        </p:nvSpPr>
+        <p:spPr>
+          <a:xfrm>
+            <a:off x="1371600" y="3639312"/>
+            <a:ext cx="6400800" cy="548640"/>
+          </a:xfrm>
+          <a:prstGeom prst="rect">
+            <a:avLst>
+              <a:gd name="adj" fmla="val 6667"/>
+            </a:avLst>
+          </a:prstGeom>
+          <a:solidFill>
+            <a:srgbClr val="1A5276"/>
+          </a:solidFill>
+          <a:ln/>
+          <a:effectLst>
+            <a:outerShdw sx="100000" sy="100000" kx="0" ky="0" algn="bl" rotWithShape="0" blurRad="76200" dist="25400" dir="8100000">
+              <a:srgbClr val="000000">
+                <a:alpha val="10000"/>
+              </a:srgbClr>
+            </a:outerShdw>
+          </a:effectLst>
+        </p:spPr>
+      </p:sp>
+      <p:sp>
+        <p:nvSpPr>
+          <p:cNvPr id="12" name="Text 10"/>
+          <p:cNvSpPr/>
+          <p:nvPr/>
+        </p:nvSpPr>
+        <p:spPr>
+          <a:xfrm>
+            <a:off x="1554480" y="3639312"/>
+            <a:ext cx="6126480" cy="548640"/>
+          </a:xfrm>
+          <a:prstGeom prst="rect">
+            <a:avLst/>
+          </a:prstGeom>
+          <a:noFill/>
+          <a:ln/>
+        </p:spPr>
+        <p:txBody>
+          <a:bodyPr wrap="square" lIns="0" tIns="0" rIns="0" bIns="0" rtlCol="0" anchor="ctr"/>
+          <a:lstStyle/>
+          <a:p>
+            <a:pPr indent="0" marL="0">
+              <a:buNone/>
+            </a:pPr>
+            <a:r>
+              <a:rPr lang="en-US" sz="1500" b="1" dirty="0">
+                <a:solidFill>
+                  <a:srgbClr val="FFFFFF"/>
+                </a:solidFill>
+                <a:latin typeface="Arial" pitchFamily="34" charset="0"/>
+                <a:ea typeface="Arial" pitchFamily="34" charset="-122"/>
+                <a:cs typeface="Arial" pitchFamily="34" charset="-120"/>
+              </a:rPr>
+              <a:t>↓  Welvaartsverlies voor de samenleving</a:t>
+            </a:r>
+            <a:endParaRPr lang="en-US" sz="1500" dirty="0"/>
+          </a:p>
+        </p:txBody>
+      </p:sp>
+    </p:spTree>
+  </p:cSld>
+  <p:clrMapOvr>
+    <a:masterClrMapping/>
+  </p:clrMapOvr>
+</p:sld>
+</file>
+
+<file path=ppt/slides/slide11.xml><?xml version="1.0" encoding="utf-8"?>
+<p:sld xmlns:a="http://schemas.openxmlformats.org/drawingml/2006/main" xmlns:r="http://schemas.openxmlformats.org/officeDocument/2006/relationships" xmlns:p="http://schemas.openxmlformats.org/presentationml/2006/main">
+  <p:cSld name="Slide 11">
+    <p:spTree>
+      <p:nvGrpSpPr>
+        <p:cNvPr id="1" name=""/>
+        <p:cNvGrpSpPr/>
+        <p:nvPr/>
+      </p:nvGrpSpPr>
+      <p:grpSpPr>
+        <a:xfrm>
+          <a:off x="0" y="0"/>
+          <a:ext cx="0" cy="0"/>
+          <a:chOff x="0" y="0"/>
+          <a:chExt cx="0" cy="0"/>
+        </a:xfrm>
+      </p:grpSpPr>
+      <p:sp>
+        <p:nvSpPr>
+          <p:cNvPr id="2" name="Text 0"/>
+          <p:cNvSpPr/>
+          <p:nvPr/>
+        </p:nvSpPr>
+        <p:spPr>
+          <a:xfrm>
+            <a:off x="457200" y="0"/>
+            <a:ext cx="8229600" cy="685800"/>
+          </a:xfrm>
+          <a:prstGeom prst="rect">
+            <a:avLst/>
+          </a:prstGeom>
+          <a:noFill/>
+          <a:ln/>
+        </p:spPr>
+        <p:txBody>
+          <a:bodyPr wrap="square" rtlCol="0" anchor="ctr"/>
+          <a:lstStyle/>
+          <a:p>
+            <a:pPr indent="0" marL="0">
+              <a:buNone/>
+            </a:pPr>
+            <a:r>
+              <a:rPr lang="en-US" sz="2400" b="1" dirty="0">
+                <a:solidFill>
+                  <a:srgbClr val="FFFFFF"/>
+                </a:solidFill>
+                <a:latin typeface="Arial" pitchFamily="34" charset="0"/>
+                <a:ea typeface="Arial" pitchFamily="34" charset="-122"/>
+                <a:cs typeface="Arial" pitchFamily="34" charset="-120"/>
+              </a:rPr>
+              <a:t>Positief extern effect in de grafiek</a:t>
+            </a:r>
+            <a:endParaRPr lang="en-US" sz="2400" dirty="0"/>
+          </a:p>
+        </p:txBody>
+      </p:sp>
+      <p:pic>
+        <p:nvPicPr>
+          <p:cNvPr id="3" name="Image 0" descr="preencoded.png">    </p:cNvPr>
+          <p:cNvPicPr>
+            <a:picLocks noChangeAspect="1"/>
+          </p:cNvPicPr>
+          <p:nvPr/>
+        </p:nvPicPr>
+        <p:blipFill>
+          <a:blip r:embed="rId1"/>
+          <a:stretch>
+            <a:fillRect/>
+          </a:stretch>
+        </p:blipFill>
+        <p:spPr>
+          <a:xfrm>
+            <a:off x="914400" y="749808"/>
+            <a:ext cx="7315200" cy="3657600"/>
+          </a:xfrm>
+          <a:prstGeom prst="rect">
+            <a:avLst/>
+          </a:prstGeom>
+        </p:spPr>
+      </p:pic>
+      <p:sp>
+        <p:nvSpPr>
+          <p:cNvPr id="4" name="Shape 1"/>
+          <p:cNvSpPr/>
+          <p:nvPr/>
+        </p:nvSpPr>
+        <p:spPr>
+          <a:xfrm>
+            <a:off x="457200" y="4480560"/>
+            <a:ext cx="8229600" cy="566928"/>
+          </a:xfrm>
+          <a:prstGeom prst="rect">
+            <a:avLst/>
+          </a:prstGeom>
+          <a:solidFill>
+            <a:srgbClr val="F7F8FA"/>
+          </a:solidFill>
+          <a:ln w="6350">
+            <a:solidFill>
+              <a:srgbClr val="CBD5E0"/>
+            </a:solidFill>
+            <a:prstDash val="solid"/>
+          </a:ln>
+        </p:spPr>
+      </p:sp>
+      <p:sp>
+        <p:nvSpPr>
+          <p:cNvPr id="5" name="Shape 2"/>
+          <p:cNvSpPr/>
+          <p:nvPr/>
+        </p:nvSpPr>
+        <p:spPr>
+          <a:xfrm>
+            <a:off x="566928" y="4636008"/>
+            <a:ext cx="201168" cy="201168"/>
+          </a:xfrm>
+          <a:prstGeom prst="rect">
+            <a:avLst/>
+          </a:prstGeom>
+          <a:solidFill>
+            <a:srgbClr val="1E8449"/>
+          </a:solidFill>
+          <a:ln/>
+        </p:spPr>
+      </p:sp>
+      <p:sp>
+        <p:nvSpPr>
+          <p:cNvPr id="6" name="Text 3"/>
+          <p:cNvSpPr/>
+          <p:nvPr/>
+        </p:nvSpPr>
+        <p:spPr>
+          <a:xfrm>
+            <a:off x="841248" y="4553712"/>
+            <a:ext cx="1600200" cy="420624"/>
+          </a:xfrm>
+          <a:prstGeom prst="rect">
+            <a:avLst/>
+          </a:prstGeom>
+          <a:noFill/>
+          <a:ln/>
+        </p:spPr>
+        <p:txBody>
+          <a:bodyPr wrap="square" lIns="0" tIns="0" rIns="0" bIns="0" rtlCol="0" anchor="ctr"/>
+          <a:lstStyle/>
+          <a:p>
+            <a:pPr indent="0" marL="0">
+              <a:lnSpc>
+                <a:spcPct val="110000"/>
+              </a:lnSpc>
+              <a:buNone/>
+            </a:pPr>
+            <a:r>
+              <a:rPr lang="en-US" sz="1100" b="1" dirty="0">
+                <a:solidFill>
+                  <a:srgbClr val="1E8449"/>
+                </a:solidFill>
+                <a:latin typeface="Arial" pitchFamily="34" charset="0"/>
+                <a:ea typeface="Arial" pitchFamily="34" charset="-122"/>
+                <a:cs typeface="Arial" pitchFamily="34" charset="-120"/>
+              </a:rPr>
+              <a:t>A</a:t>
+            </a:r>
+            <a:pPr indent="0" marL="0">
+              <a:lnSpc>
+                <a:spcPct val="110000"/>
+              </a:lnSpc>
+              <a:buNone/>
+            </a:pPr>
+            <a:r>
+              <a:rPr lang="en-US" sz="1100" dirty="0">
+                <a:solidFill>
+                  <a:srgbClr val="2D3748"/>
+                </a:solidFill>
+                <a:latin typeface="Arial" pitchFamily="34" charset="0"/>
+                <a:ea typeface="Arial" pitchFamily="34" charset="-122"/>
+                <a:cs typeface="Arial" pitchFamily="34" charset="-120"/>
+              </a:rPr>
+              <a:t>  aanbod</a:t>
+            </a:r>
+            <a:endParaRPr lang="en-US" sz="1100" dirty="0"/>
+          </a:p>
+        </p:txBody>
+      </p:sp>
+      <p:sp>
+        <p:nvSpPr>
+          <p:cNvPr id="7" name="Shape 4"/>
+          <p:cNvSpPr/>
+          <p:nvPr/>
+        </p:nvSpPr>
+        <p:spPr>
+          <a:xfrm>
+            <a:off x="2624328" y="4636008"/>
+            <a:ext cx="201168" cy="201168"/>
+          </a:xfrm>
+          <a:prstGeom prst="rect">
+            <a:avLst/>
+          </a:prstGeom>
+          <a:solidFill>
+            <a:srgbClr val="1A5276"/>
+          </a:solidFill>
+          <a:ln/>
+        </p:spPr>
+      </p:sp>
+      <p:sp>
+        <p:nvSpPr>
+          <p:cNvPr id="8" name="Text 5"/>
+          <p:cNvSpPr/>
+          <p:nvPr/>
+        </p:nvSpPr>
+        <p:spPr>
+          <a:xfrm>
+            <a:off x="2898648" y="4553712"/>
+            <a:ext cx="1600200" cy="420624"/>
+          </a:xfrm>
+          <a:prstGeom prst="rect">
+            <a:avLst/>
+          </a:prstGeom>
+          <a:noFill/>
+          <a:ln/>
+        </p:spPr>
+        <p:txBody>
+          <a:bodyPr wrap="square" lIns="0" tIns="0" rIns="0" bIns="0" rtlCol="0" anchor="ctr"/>
+          <a:lstStyle/>
+          <a:p>
+            <a:pPr indent="0" marL="0">
+              <a:lnSpc>
+                <a:spcPct val="110000"/>
+              </a:lnSpc>
+              <a:buNone/>
+            </a:pPr>
+            <a:r>
+              <a:rPr lang="en-US" sz="1100" b="1" dirty="0">
+                <a:solidFill>
+                  <a:srgbClr val="1A5276"/>
+                </a:solidFill>
+                <a:latin typeface="Arial" pitchFamily="34" charset="0"/>
+                <a:ea typeface="Arial" pitchFamily="34" charset="-122"/>
+                <a:cs typeface="Arial" pitchFamily="34" charset="-120"/>
+              </a:rPr>
+              <a:t>MPB</a:t>
+            </a:r>
+            <a:pPr indent="0" marL="0">
+              <a:lnSpc>
+                <a:spcPct val="110000"/>
+              </a:lnSpc>
+              <a:buNone/>
+            </a:pPr>
+            <a:r>
+              <a:rPr lang="en-US" sz="1100" dirty="0">
+                <a:solidFill>
+                  <a:srgbClr val="2D3748"/>
+                </a:solidFill>
+                <a:latin typeface="Arial" pitchFamily="34" charset="0"/>
+                <a:ea typeface="Arial" pitchFamily="34" charset="-122"/>
+                <a:cs typeface="Arial" pitchFamily="34" charset="-120"/>
+              </a:rPr>
+              <a:t>  private baten</a:t>
+            </a:r>
+            <a:endParaRPr lang="en-US" sz="1100" dirty="0"/>
+          </a:p>
+        </p:txBody>
+      </p:sp>
+      <p:sp>
+        <p:nvSpPr>
+          <p:cNvPr id="9" name="Shape 6"/>
+          <p:cNvSpPr/>
+          <p:nvPr/>
+        </p:nvSpPr>
+        <p:spPr>
+          <a:xfrm>
+            <a:off x="4681728" y="4636008"/>
+            <a:ext cx="201168" cy="201168"/>
+          </a:xfrm>
+          <a:prstGeom prst="rect">
+            <a:avLst/>
+          </a:prstGeom>
+          <a:solidFill>
+            <a:srgbClr val="E67E22"/>
+          </a:solidFill>
+          <a:ln/>
+        </p:spPr>
+      </p:sp>
+      <p:sp>
+        <p:nvSpPr>
+          <p:cNvPr id="10" name="Text 7"/>
+          <p:cNvSpPr/>
+          <p:nvPr/>
+        </p:nvSpPr>
+        <p:spPr>
+          <a:xfrm>
+            <a:off x="4956048" y="4553712"/>
+            <a:ext cx="1600200" cy="420624"/>
+          </a:xfrm>
+          <a:prstGeom prst="rect">
+            <a:avLst/>
+          </a:prstGeom>
+          <a:noFill/>
+          <a:ln/>
+        </p:spPr>
+        <p:txBody>
+          <a:bodyPr wrap="square" lIns="0" tIns="0" rIns="0" bIns="0" rtlCol="0" anchor="ctr"/>
+          <a:lstStyle/>
+          <a:p>
+            <a:pPr indent="0" marL="0">
+              <a:lnSpc>
+                <a:spcPct val="110000"/>
+              </a:lnSpc>
+              <a:buNone/>
+            </a:pPr>
+            <a:r>
+              <a:rPr lang="en-US" sz="1100" b="1" dirty="0">
+                <a:solidFill>
+                  <a:srgbClr val="E67E22"/>
+                </a:solidFill>
+                <a:latin typeface="Arial" pitchFamily="34" charset="0"/>
+                <a:ea typeface="Arial" pitchFamily="34" charset="-122"/>
+                <a:cs typeface="Arial" pitchFamily="34" charset="-120"/>
+              </a:rPr>
+              <a:t>MMB</a:t>
+            </a:r>
+            <a:pPr indent="0" marL="0">
+              <a:lnSpc>
+                <a:spcPct val="110000"/>
+              </a:lnSpc>
+              <a:buNone/>
+            </a:pPr>
+            <a:r>
+              <a:rPr lang="en-US" sz="1100" dirty="0">
+                <a:solidFill>
+                  <a:srgbClr val="2D3748"/>
+                </a:solidFill>
+                <a:latin typeface="Arial" pitchFamily="34" charset="0"/>
+                <a:ea typeface="Arial" pitchFamily="34" charset="-122"/>
+                <a:cs typeface="Arial" pitchFamily="34" charset="-120"/>
+              </a:rPr>
+              <a:t>  MPB + externe baten</a:t>
+            </a:r>
+            <a:endParaRPr lang="en-US" sz="1100" dirty="0"/>
+          </a:p>
+        </p:txBody>
+      </p:sp>
+      <p:sp>
+        <p:nvSpPr>
+          <p:cNvPr id="11" name="Shape 8"/>
+          <p:cNvSpPr/>
+          <p:nvPr/>
+        </p:nvSpPr>
+        <p:spPr>
+          <a:xfrm>
+            <a:off x="6739128" y="4636008"/>
+            <a:ext cx="201168" cy="201168"/>
+          </a:xfrm>
+          <a:prstGeom prst="rect">
+            <a:avLst/>
+          </a:prstGeom>
+          <a:solidFill>
+            <a:srgbClr val="D9534F"/>
+          </a:solidFill>
+          <a:ln/>
+        </p:spPr>
+      </p:sp>
+      <p:sp>
+        <p:nvSpPr>
+          <p:cNvPr id="12" name="Text 9"/>
+          <p:cNvSpPr/>
+          <p:nvPr/>
+        </p:nvSpPr>
+        <p:spPr>
+          <a:xfrm>
+            <a:off x="7013448" y="4553712"/>
+            <a:ext cx="1600200" cy="420624"/>
+          </a:xfrm>
+          <a:prstGeom prst="rect">
+            <a:avLst/>
+          </a:prstGeom>
+          <a:noFill/>
+          <a:ln/>
+        </p:spPr>
+        <p:txBody>
+          <a:bodyPr wrap="square" lIns="0" tIns="0" rIns="0" bIns="0" rtlCol="0" anchor="ctr"/>
+          <a:lstStyle/>
+          <a:p>
+            <a:pPr indent="0" marL="0">
+              <a:lnSpc>
+                <a:spcPct val="110000"/>
+              </a:lnSpc>
+              <a:buNone/>
+            </a:pPr>
+            <a:r>
+              <a:rPr lang="en-US" sz="1100" b="1" dirty="0">
+                <a:solidFill>
+                  <a:srgbClr val="D9534F"/>
+                </a:solidFill>
+                <a:latin typeface="Arial" pitchFamily="34" charset="0"/>
+                <a:ea typeface="Arial" pitchFamily="34" charset="-122"/>
+                <a:cs typeface="Arial" pitchFamily="34" charset="-120"/>
+              </a:rPr>
+              <a:t>▲</a:t>
+            </a:r>
+            <a:pPr indent="0" marL="0">
+              <a:lnSpc>
+                <a:spcPct val="110000"/>
+              </a:lnSpc>
+              <a:buNone/>
+            </a:pPr>
+            <a:r>
+              <a:rPr lang="en-US" sz="1100" dirty="0">
+                <a:solidFill>
+                  <a:srgbClr val="2D3748"/>
+                </a:solidFill>
+                <a:latin typeface="Arial" pitchFamily="34" charset="0"/>
+                <a:ea typeface="Arial" pitchFamily="34" charset="-122"/>
+                <a:cs typeface="Arial" pitchFamily="34" charset="-120"/>
+              </a:rPr>
+              <a:t>  welvaartsverlies</a:t>
+            </a:r>
+            <a:endParaRPr lang="en-US" sz="1100" dirty="0"/>
+          </a:p>
+        </p:txBody>
+      </p:sp>
+    </p:spTree>
+  </p:cSld>
+  <p:clrMapOvr>
+    <a:masterClrMapping/>
+  </p:clrMapOvr>
+</p:sld>
+</file>
+
+<file path=ppt/slides/slide12.xml><?xml version="1.0" encoding="utf-8"?>
+<p:sld xmlns:a="http://schemas.openxmlformats.org/drawingml/2006/main" xmlns:r="http://schemas.openxmlformats.org/officeDocument/2006/relationships" xmlns:p="http://schemas.openxmlformats.org/presentationml/2006/main">
+  <p:cSld name="Slide 12">
+    <p:spTree>
+      <p:nvGrpSpPr>
+        <p:cNvPr id="1" name=""/>
+        <p:cNvGrpSpPr/>
+        <p:nvPr/>
+      </p:nvGrpSpPr>
+      <p:grpSpPr>
+        <a:xfrm>
+          <a:off x="0" y="0"/>
+          <a:ext cx="0" cy="0"/>
+          <a:chOff x="0" y="0"/>
+          <a:chExt cx="0" cy="0"/>
+        </a:xfrm>
+      </p:grpSpPr>
+      <p:sp>
+        <p:nvSpPr>
+          <p:cNvPr id="2" name="Text 0"/>
+          <p:cNvSpPr/>
+          <p:nvPr/>
+        </p:nvSpPr>
+        <p:spPr>
+          <a:xfrm>
+            <a:off x="457200" y="0"/>
+            <a:ext cx="8229600" cy="685800"/>
+          </a:xfrm>
+          <a:prstGeom prst="rect">
+            <a:avLst/>
+          </a:prstGeom>
+          <a:noFill/>
+          <a:ln/>
+        </p:spPr>
+        <p:txBody>
+          <a:bodyPr wrap="square" rtlCol="0" anchor="ctr"/>
+          <a:lstStyle/>
+          <a:p>
+            <a:pPr indent="0" marL="0">
+              <a:buNone/>
+            </a:pPr>
+            <a:r>
+              <a:rPr lang="en-US" sz="2400" b="1" dirty="0">
+                <a:solidFill>
+                  <a:srgbClr val="FFFFFF"/>
+                </a:solidFill>
+                <a:latin typeface="Arial" pitchFamily="34" charset="0"/>
+                <a:ea typeface="Arial" pitchFamily="34" charset="-122"/>
+                <a:cs typeface="Arial" pitchFamily="34" charset="-120"/>
+              </a:rPr>
+              <a:t>Negatief vs. positief extern effect</a:t>
+            </a:r>
+            <a:endParaRPr lang="en-US" sz="2400" dirty="0"/>
+          </a:p>
+        </p:txBody>
+      </p:sp>
+      <p:graphicFrame>
+        <p:nvGraphicFramePr>
+          <p:cNvPr id="13" name="Table 0"/>
+          <p:cNvGraphicFramePr>
+            <a:graphicFrameLocks noGrp="1"/>
+          </p:cNvGraphicFramePr>
+          <p:nvPr>
+            <p:extLst>
+              <p:ext uri="{D42A27DB-BD31-4B8C-83A1-F6EECF244321}">
+                <p14:modId xmlns:p14="http://schemas.microsoft.com/office/powerpoint/2010/main" val="1579011935"/>
+              </p:ext>
+            </p:extLst>
+          </p:nvPr>
+        </p:nvGraphicFramePr>
+        <p:xfrm>
+          <a:off x="457200" y="960120"/>
+          <a:ext cx="8229600" cy="914400"/>
+        </p:xfrm>
+        <a:graphic>
+          <a:graphicData uri="http://schemas.openxmlformats.org/drawingml/2006/table">
+            <a:tbl>
+              <a:tblPr/>
+              <a:tblGrid>
+                <a:gridCol w="2560320"/>
+                <a:gridCol w="2834640"/>
+                <a:gridCol w="2834640"/>
+              </a:tblGrid>
+              <a:tr h="0">
+                <a:tc>
+                  <a:txBody>
+                    <a:bodyPr/>
+                    <a:lstStyle/>
+                    <a:p>
+                      <a:pPr indent="0" marL="0">
+                        <a:buNone/>
+                      </a:pPr>
+                      <a:r>
+                        <a:rPr lang="en-US" sz="1300" b="1" dirty="0">
+                          <a:solidFill>
+                            <a:srgbClr val="FFFFFF"/>
+                          </a:solidFill>
+                          <a:latin typeface="Arial" pitchFamily="34" charset="0"/>
+                          <a:ea typeface="Arial" pitchFamily="34" charset="-122"/>
+                          <a:cs typeface="Arial" pitchFamily="34" charset="-120"/>
+                        </a:rPr>
+                        <a:t>Kenmerk</a:t>
+                      </a:r>
+                      <a:endParaRPr lang="en-US" sz="1300" dirty="0">
+                        <a:latin typeface="Arial" charset="0"/>
+                        <a:ea typeface="Arial" charset="0"/>
+                        <a:cs typeface="Arial" charset="0"/>
+                      </a:endParaRPr>
+                    </a:p>
+                  </a:txBody>
+                  <a:tcPr marL="91440" marR="91440" marT="45720" marB="45720">
+                    <a:lnL w="6350" cap="flat" cmpd="sng" algn="ctr">
+                      <a:solidFill>
+                        <a:srgbClr val="CBD5E0"/>
+                      </a:solidFill>
+                      <a:prstDash val="solid"/>
+                      <a:round/>
+                      <a:headEnd type="none" w="med" len="med"/>
+                      <a:tailEnd type="none" w="med" len="med"/>
+                    </a:lnL>
+                    <a:lnR w="6350" cap="flat" cmpd="sng" algn="ctr">
+                      <a:solidFill>
+                        <a:srgbClr val="CBD5E0"/>
+                      </a:solidFill>
+                      <a:prstDash val="solid"/>
+                      <a:round/>
+                      <a:headEnd type="none" w="med" len="med"/>
+                      <a:tailEnd type="none" w="med" len="med"/>
+                    </a:lnR>
+                    <a:lnT w="6350" cap="flat" cmpd="sng" algn="ctr">
+                      <a:solidFill>
+                        <a:srgbClr val="CBD5E0"/>
+                      </a:solidFill>
+                      <a:prstDash val="solid"/>
+                      <a:round/>
+                      <a:headEnd type="none" w="med" len="med"/>
+                      <a:tailEnd type="none" w="med" len="med"/>
+                    </a:lnT>
+                    <a:lnB w="6350" cap="flat" cmpd="sng" algn="ctr">
+                      <a:solidFill>
+                        <a:srgbClr val="CBD5E0"/>
+                      </a:solidFill>
+                      <a:prstDash val="solid"/>
+                      <a:round/>
+                      <a:headEnd type="none" w="med" len="med"/>
+                      <a:tailEnd type="none" w="med" len="med"/>
+                    </a:lnB>
+                    <a:solidFill>
+                      <a:srgbClr val="1E2761"/>
+                    </a:solidFill>
+                  </a:tcPr>
+                </a:tc>
+                <a:tc>
+                  <a:txBody>
+                    <a:bodyPr/>
+                    <a:lstStyle/>
+                    <a:p>
+                      <a:pPr indent="0" marL="0">
+                        <a:buNone/>
+                      </a:pPr>
+                      <a:r>
+                        <a:rPr lang="en-US" sz="1300" b="1" dirty="0">
+                          <a:solidFill>
+                            <a:srgbClr val="FFFFFF"/>
+                          </a:solidFill>
+                          <a:latin typeface="Arial" pitchFamily="34" charset="0"/>
+                          <a:ea typeface="Arial" pitchFamily="34" charset="-122"/>
+                          <a:cs typeface="Arial" pitchFamily="34" charset="-120"/>
+                        </a:rPr>
+                        <a:t>Negatief</a:t>
+                      </a:r>
+                      <a:endParaRPr lang="en-US" sz="1300" dirty="0">
+                        <a:latin typeface="Arial" charset="0"/>
+                        <a:ea typeface="Arial" charset="0"/>
+                        <a:cs typeface="Arial" charset="0"/>
+                      </a:endParaRPr>
+                    </a:p>
+                  </a:txBody>
+                  <a:tcPr marL="91440" marR="91440" marT="45720" marB="45720">
+                    <a:lnL w="6350" cap="flat" cmpd="sng" algn="ctr">
+                      <a:solidFill>
+                        <a:srgbClr val="CBD5E0"/>
+                      </a:solidFill>
+                      <a:prstDash val="solid"/>
+                      <a:round/>
+                      <a:headEnd type="none" w="med" len="med"/>
+                      <a:tailEnd type="none" w="med" len="med"/>
+                    </a:lnL>
+                    <a:lnR w="6350" cap="flat" cmpd="sng" algn="ctr">
+                      <a:solidFill>
+                        <a:srgbClr val="CBD5E0"/>
+                      </a:solidFill>
+                      <a:prstDash val="solid"/>
+                      <a:round/>
+                      <a:headEnd type="none" w="med" len="med"/>
+                      <a:tailEnd type="none" w="med" len="med"/>
+                    </a:lnR>
+                    <a:lnT w="6350" cap="flat" cmpd="sng" algn="ctr">
+                      <a:solidFill>
+                        <a:srgbClr val="CBD5E0"/>
+                      </a:solidFill>
+                      <a:prstDash val="solid"/>
+                      <a:round/>
+                      <a:headEnd type="none" w="med" len="med"/>
+                      <a:tailEnd type="none" w="med" len="med"/>
+                    </a:lnT>
+                    <a:lnB w="6350" cap="flat" cmpd="sng" algn="ctr">
+                      <a:solidFill>
+                        <a:srgbClr val="CBD5E0"/>
+                      </a:solidFill>
+                      <a:prstDash val="solid"/>
+                      <a:round/>
+                      <a:headEnd type="none" w="med" len="med"/>
+                      <a:tailEnd type="none" w="med" len="med"/>
+                    </a:lnB>
+                    <a:solidFill>
+                      <a:srgbClr val="1E2761"/>
+                    </a:solidFill>
+                  </a:tcPr>
+                </a:tc>
+                <a:tc>
+                  <a:txBody>
+                    <a:bodyPr/>
+                    <a:lstStyle/>
+                    <a:p>
+                      <a:pPr indent="0" marL="0">
+                        <a:buNone/>
+                      </a:pPr>
+                      <a:r>
+                        <a:rPr lang="en-US" sz="1300" b="1" dirty="0">
+                          <a:solidFill>
+                            <a:srgbClr val="FFFFFF"/>
+                          </a:solidFill>
+                          <a:latin typeface="Arial" pitchFamily="34" charset="0"/>
+                          <a:ea typeface="Arial" pitchFamily="34" charset="-122"/>
+                          <a:cs typeface="Arial" pitchFamily="34" charset="-120"/>
+                        </a:rPr>
+                        <a:t>Positief</a:t>
+                      </a:r>
+                      <a:endParaRPr lang="en-US" sz="1300" dirty="0">
+                        <a:latin typeface="Arial" charset="0"/>
+                        <a:ea typeface="Arial" charset="0"/>
+                        <a:cs typeface="Arial" charset="0"/>
+                      </a:endParaRPr>
+                    </a:p>
+                  </a:txBody>
+                  <a:tcPr marL="91440" marR="91440" marT="45720" marB="45720">
+                    <a:lnL w="6350" cap="flat" cmpd="sng" algn="ctr">
+                      <a:solidFill>
+                        <a:srgbClr val="CBD5E0"/>
+                      </a:solidFill>
+                      <a:prstDash val="solid"/>
+                      <a:round/>
+                      <a:headEnd type="none" w="med" len="med"/>
+                      <a:tailEnd type="none" w="med" len="med"/>
+                    </a:lnL>
+                    <a:lnR w="6350" cap="flat" cmpd="sng" algn="ctr">
+                      <a:solidFill>
+                        <a:srgbClr val="CBD5E0"/>
+                      </a:solidFill>
+                      <a:prstDash val="solid"/>
+                      <a:round/>
+                      <a:headEnd type="none" w="med" len="med"/>
+                      <a:tailEnd type="none" w="med" len="med"/>
+                    </a:lnR>
+                    <a:lnT w="6350" cap="flat" cmpd="sng" algn="ctr">
+                      <a:solidFill>
+                        <a:srgbClr val="CBD5E0"/>
+                      </a:solidFill>
+                      <a:prstDash val="solid"/>
+                      <a:round/>
+                      <a:headEnd type="none" w="med" len="med"/>
+                      <a:tailEnd type="none" w="med" len="med"/>
+                    </a:lnT>
+                    <a:lnB w="6350" cap="flat" cmpd="sng" algn="ctr">
+                      <a:solidFill>
+                        <a:srgbClr val="CBD5E0"/>
+                      </a:solidFill>
+                      <a:prstDash val="solid"/>
+                      <a:round/>
+                      <a:headEnd type="none" w="med" len="med"/>
+                      <a:tailEnd type="none" w="med" len="med"/>
+                    </a:lnB>
+                    <a:solidFill>
+                      <a:srgbClr val="1E2761"/>
+                    </a:solidFill>
+                  </a:tcPr>
+                </a:tc>
+              </a:tr>
+              <a:tr h="0">
+                <a:tc>
+                  <a:txBody>
+                    <a:bodyPr/>
+                    <a:lstStyle/>
+                    <a:p>
+                      <a:pPr indent="0" marL="0">
+                        <a:buNone/>
+                      </a:pPr>
+                      <a:r>
+                        <a:rPr lang="en-US" sz="1200" b="1" dirty="0">
+                          <a:solidFill>
+                            <a:srgbClr val="000000"/>
+                          </a:solidFill>
+                          <a:latin typeface="Arial" pitchFamily="34" charset="0"/>
+                          <a:ea typeface="Arial" pitchFamily="34" charset="-122"/>
+                          <a:cs typeface="Arial" pitchFamily="34" charset="-120"/>
+                        </a:rPr>
+                        <a:t>Wat zit buiten de prijs?</a:t>
+                      </a:r>
+                      <a:endParaRPr lang="en-US" sz="1200" dirty="0">
+                        <a:latin typeface="Arial" charset="0"/>
+                        <a:ea typeface="Arial" charset="0"/>
+                        <a:cs typeface="Arial" charset="0"/>
+                      </a:endParaRPr>
+                    </a:p>
+                  </a:txBody>
+                  <a:tcPr marL="91440" marR="91440" marT="45720" marB="45720">
+                    <a:lnL w="6350" cap="flat" cmpd="sng" algn="ctr">
+                      <a:solidFill>
+                        <a:srgbClr val="CBD5E0"/>
+                      </a:solidFill>
+                      <a:prstDash val="solid"/>
+                      <a:round/>
+                      <a:headEnd type="none" w="med" len="med"/>
+                      <a:tailEnd type="none" w="med" len="med"/>
+                    </a:lnL>
+                    <a:lnR w="6350" cap="flat" cmpd="sng" algn="ctr">
+                      <a:solidFill>
+                        <a:srgbClr val="CBD5E0"/>
+                      </a:solidFill>
+                      <a:prstDash val="solid"/>
+                      <a:round/>
+                      <a:headEnd type="none" w="med" len="med"/>
+                      <a:tailEnd type="none" w="med" len="med"/>
+                    </a:lnR>
+                    <a:lnT w="6350" cap="flat" cmpd="sng" algn="ctr">
+                      <a:solidFill>
+                        <a:srgbClr val="CBD5E0"/>
+                      </a:solidFill>
+                      <a:prstDash val="solid"/>
+                      <a:round/>
+                      <a:headEnd type="none" w="med" len="med"/>
+                      <a:tailEnd type="none" w="med" len="med"/>
+                    </a:lnT>
+                    <a:lnB w="6350" cap="flat" cmpd="sng" algn="ctr">
+                      <a:solidFill>
+                        <a:srgbClr val="CBD5E0"/>
+                      </a:solidFill>
+                      <a:prstDash val="solid"/>
+                      <a:round/>
+                      <a:headEnd type="none" w="med" len="med"/>
+                      <a:tailEnd type="none" w="med" len="med"/>
+                    </a:lnB>
+                    <a:solidFill>
+                      <a:srgbClr val="F7FAFC"/>
+                    </a:solidFill>
+                  </a:tcPr>
+                </a:tc>
+                <a:tc>
+                  <a:txBody>
+                    <a:bodyPr/>
+                    <a:lstStyle/>
+                    <a:p>
+                      <a:pPr indent="0" marL="0">
+                        <a:buNone/>
+                      </a:pPr>
+                      <a:r>
+                        <a:rPr lang="en-US" sz="1200" dirty="0">
+                          <a:solidFill>
+                            <a:srgbClr val="000000"/>
+                          </a:solidFill>
+                          <a:latin typeface="Arial" pitchFamily="34" charset="0"/>
+                          <a:ea typeface="Arial" pitchFamily="34" charset="-122"/>
+                          <a:cs typeface="Arial" pitchFamily="34" charset="-120"/>
+                        </a:rPr>
+                        <a:t>Kosten voor derden</a:t>
+                      </a:r>
+                      <a:endParaRPr lang="en-US" sz="1200" dirty="0">
+                        <a:latin typeface="Arial" charset="0"/>
+                        <a:ea typeface="Arial" charset="0"/>
+                        <a:cs typeface="Arial" charset="0"/>
+                      </a:endParaRPr>
+                    </a:p>
+                  </a:txBody>
+                  <a:tcPr marL="91440" marR="91440" marT="45720" marB="45720">
+                    <a:lnL w="6350" cap="flat" cmpd="sng" algn="ctr">
+                      <a:solidFill>
+                        <a:srgbClr val="CBD5E0"/>
+                      </a:solidFill>
+                      <a:prstDash val="solid"/>
+                      <a:round/>
+                      <a:headEnd type="none" w="med" len="med"/>
+                      <a:tailEnd type="none" w="med" len="med"/>
+                    </a:lnL>
+                    <a:lnR w="6350" cap="flat" cmpd="sng" algn="ctr">
+                      <a:solidFill>
+                        <a:srgbClr val="CBD5E0"/>
+                      </a:solidFill>
+                      <a:prstDash val="solid"/>
+                      <a:round/>
+                      <a:headEnd type="none" w="med" len="med"/>
+                      <a:tailEnd type="none" w="med" len="med"/>
+                    </a:lnR>
+                    <a:lnT w="6350" cap="flat" cmpd="sng" algn="ctr">
+                      <a:solidFill>
+                        <a:srgbClr val="CBD5E0"/>
+                      </a:solidFill>
+                      <a:prstDash val="solid"/>
+                      <a:round/>
+                      <a:headEnd type="none" w="med" len="med"/>
+                      <a:tailEnd type="none" w="med" len="med"/>
+                    </a:lnT>
+                    <a:lnB w="6350" cap="flat" cmpd="sng" algn="ctr">
+                      <a:solidFill>
+                        <a:srgbClr val="CBD5E0"/>
+                      </a:solidFill>
+                      <a:prstDash val="solid"/>
+                      <a:round/>
+                      <a:headEnd type="none" w="med" len="med"/>
+                      <a:tailEnd type="none" w="med" len="med"/>
+                    </a:lnB>
+                    <a:solidFill>
+                      <a:srgbClr val="F7FAFC"/>
+                    </a:solidFill>
+                  </a:tcPr>
+                </a:tc>
+                <a:tc>
+                  <a:txBody>
+                    <a:bodyPr/>
+                    <a:lstStyle/>
+                    <a:p>
+                      <a:pPr indent="0" marL="0">
+                        <a:buNone/>
+                      </a:pPr>
+                      <a:r>
+                        <a:rPr lang="en-US" sz="1200" dirty="0">
+                          <a:solidFill>
+                            <a:srgbClr val="000000"/>
+                          </a:solidFill>
+                          <a:latin typeface="Arial" pitchFamily="34" charset="0"/>
+                          <a:ea typeface="Arial" pitchFamily="34" charset="-122"/>
+                          <a:cs typeface="Arial" pitchFamily="34" charset="-120"/>
+                        </a:rPr>
+                        <a:t>Baten voor derden</a:t>
+                      </a:r>
+                      <a:endParaRPr lang="en-US" sz="1200" dirty="0">
+                        <a:latin typeface="Arial" charset="0"/>
+                        <a:ea typeface="Arial" charset="0"/>
+                        <a:cs typeface="Arial" charset="0"/>
+                      </a:endParaRPr>
+                    </a:p>
+                  </a:txBody>
+                  <a:tcPr marL="91440" marR="91440" marT="45720" marB="45720">
+                    <a:lnL w="6350" cap="flat" cmpd="sng" algn="ctr">
+                      <a:solidFill>
+                        <a:srgbClr val="CBD5E0"/>
+                      </a:solidFill>
+                      <a:prstDash val="solid"/>
+                      <a:round/>
+                      <a:headEnd type="none" w="med" len="med"/>
+                      <a:tailEnd type="none" w="med" len="med"/>
+                    </a:lnL>
+                    <a:lnR w="6350" cap="flat" cmpd="sng" algn="ctr">
+                      <a:solidFill>
+                        <a:srgbClr val="CBD5E0"/>
+                      </a:solidFill>
+                      <a:prstDash val="solid"/>
+                      <a:round/>
+                      <a:headEnd type="none" w="med" len="med"/>
+                      <a:tailEnd type="none" w="med" len="med"/>
+                    </a:lnR>
+                    <a:lnT w="6350" cap="flat" cmpd="sng" algn="ctr">
+                      <a:solidFill>
+                        <a:srgbClr val="CBD5E0"/>
+                      </a:solidFill>
+                      <a:prstDash val="solid"/>
+                      <a:round/>
+                      <a:headEnd type="none" w="med" len="med"/>
+                      <a:tailEnd type="none" w="med" len="med"/>
+                    </a:lnT>
+                    <a:lnB w="6350" cap="flat" cmpd="sng" algn="ctr">
+                      <a:solidFill>
+                        <a:srgbClr val="CBD5E0"/>
+                      </a:solidFill>
+                      <a:prstDash val="solid"/>
+                      <a:round/>
+                      <a:headEnd type="none" w="med" len="med"/>
+                      <a:tailEnd type="none" w="med" len="med"/>
+                    </a:lnB>
+                    <a:solidFill>
+                      <a:srgbClr val="F7FAFC"/>
+                    </a:solidFill>
+                  </a:tcPr>
+                </a:tc>
+              </a:tr>
+              <a:tr h="0">
+                <a:tc>
+                  <a:txBody>
+                    <a:bodyPr/>
+                    <a:lstStyle/>
+                    <a:p>
+                      <a:pPr indent="0" marL="0">
+                        <a:buNone/>
+                      </a:pPr>
+                      <a:r>
+                        <a:rPr lang="en-US" sz="1200" b="1" dirty="0">
+                          <a:solidFill>
+                            <a:srgbClr val="000000"/>
+                          </a:solidFill>
+                          <a:latin typeface="Arial" pitchFamily="34" charset="0"/>
+                          <a:ea typeface="Arial" pitchFamily="34" charset="-122"/>
+                          <a:cs typeface="Arial" pitchFamily="34" charset="-120"/>
+                        </a:rPr>
+                        <a:t>Effect op prijs</a:t>
+                      </a:r>
+                      <a:endParaRPr lang="en-US" sz="1200" dirty="0">
+                        <a:latin typeface="Arial" charset="0"/>
+                        <a:ea typeface="Arial" charset="0"/>
+                        <a:cs typeface="Arial" charset="0"/>
+                      </a:endParaRPr>
+                    </a:p>
+                  </a:txBody>
+                  <a:tcPr marL="91440" marR="91440" marT="45720" marB="45720">
+                    <a:lnL w="6350" cap="flat" cmpd="sng" algn="ctr">
+                      <a:solidFill>
+                        <a:srgbClr val="CBD5E0"/>
+                      </a:solidFill>
+                      <a:prstDash val="solid"/>
+                      <a:round/>
+                      <a:headEnd type="none" w="med" len="med"/>
+                      <a:tailEnd type="none" w="med" len="med"/>
+                    </a:lnL>
+                    <a:lnR w="6350" cap="flat" cmpd="sng" algn="ctr">
+                      <a:solidFill>
+                        <a:srgbClr val="CBD5E0"/>
+                      </a:solidFill>
+                      <a:prstDash val="solid"/>
+                      <a:round/>
+                      <a:headEnd type="none" w="med" len="med"/>
+                      <a:tailEnd type="none" w="med" len="med"/>
+                    </a:lnR>
+                    <a:lnT w="6350" cap="flat" cmpd="sng" algn="ctr">
+                      <a:solidFill>
+                        <a:srgbClr val="CBD5E0"/>
+                      </a:solidFill>
+                      <a:prstDash val="solid"/>
+                      <a:round/>
+                      <a:headEnd type="none" w="med" len="med"/>
+                      <a:tailEnd type="none" w="med" len="med"/>
+                    </a:lnT>
+                    <a:lnB w="6350" cap="flat" cmpd="sng" algn="ctr">
+                      <a:solidFill>
+                        <a:srgbClr val="CBD5E0"/>
+                      </a:solidFill>
+                      <a:prstDash val="solid"/>
+                      <a:round/>
+                      <a:headEnd type="none" w="med" len="med"/>
+                      <a:tailEnd type="none" w="med" len="med"/>
+                    </a:lnB>
+                  </a:tcPr>
+                </a:tc>
+                <a:tc>
+                  <a:txBody>
+                    <a:bodyPr/>
+                    <a:lstStyle/>
+                    <a:p>
+                      <a:pPr indent="0" marL="0">
+                        <a:buNone/>
+                      </a:pPr>
+                      <a:r>
+                        <a:rPr lang="en-US" sz="1200" dirty="0">
+                          <a:solidFill>
+                            <a:srgbClr val="000000"/>
+                          </a:solidFill>
+                          <a:latin typeface="Arial" pitchFamily="34" charset="0"/>
+                          <a:ea typeface="Arial" pitchFamily="34" charset="-122"/>
+                          <a:cs typeface="Arial" pitchFamily="34" charset="-120"/>
+                        </a:rPr>
+                        <a:t>Te laag</a:t>
+                      </a:r>
+                      <a:endParaRPr lang="en-US" sz="1200" dirty="0">
+                        <a:latin typeface="Arial" charset="0"/>
+                        <a:ea typeface="Arial" charset="0"/>
+                        <a:cs typeface="Arial" charset="0"/>
+                      </a:endParaRPr>
+                    </a:p>
+                  </a:txBody>
+                  <a:tcPr marL="91440" marR="91440" marT="45720" marB="45720">
+                    <a:lnL w="6350" cap="flat" cmpd="sng" algn="ctr">
+                      <a:solidFill>
+                        <a:srgbClr val="CBD5E0"/>
+                      </a:solidFill>
+                      <a:prstDash val="solid"/>
+                      <a:round/>
+                      <a:headEnd type="none" w="med" len="med"/>
+                      <a:tailEnd type="none" w="med" len="med"/>
+                    </a:lnL>
+                    <a:lnR w="6350" cap="flat" cmpd="sng" algn="ctr">
+                      <a:solidFill>
+                        <a:srgbClr val="CBD5E0"/>
+                      </a:solidFill>
+                      <a:prstDash val="solid"/>
+                      <a:round/>
+                      <a:headEnd type="none" w="med" len="med"/>
+                      <a:tailEnd type="none" w="med" len="med"/>
+                    </a:lnR>
+                    <a:lnT w="6350" cap="flat" cmpd="sng" algn="ctr">
+                      <a:solidFill>
+                        <a:srgbClr val="CBD5E0"/>
+                      </a:solidFill>
+                      <a:prstDash val="solid"/>
+                      <a:round/>
+                      <a:headEnd type="none" w="med" len="med"/>
+                      <a:tailEnd type="none" w="med" len="med"/>
+                    </a:lnT>
+                    <a:lnB w="6350" cap="flat" cmpd="sng" algn="ctr">
+                      <a:solidFill>
+                        <a:srgbClr val="CBD5E0"/>
+                      </a:solidFill>
+                      <a:prstDash val="solid"/>
+                      <a:round/>
+                      <a:headEnd type="none" w="med" len="med"/>
+                      <a:tailEnd type="none" w="med" len="med"/>
+                    </a:lnB>
+                  </a:tcPr>
+                </a:tc>
+                <a:tc>
+                  <a:txBody>
+                    <a:bodyPr/>
+                    <a:lstStyle/>
+                    <a:p>
+                      <a:pPr indent="0" marL="0">
+                        <a:buNone/>
+                      </a:pPr>
+                      <a:r>
+                        <a:rPr lang="en-US" sz="1200" dirty="0">
+                          <a:solidFill>
+                            <a:srgbClr val="000000"/>
+                          </a:solidFill>
+                          <a:latin typeface="Arial" pitchFamily="34" charset="0"/>
+                          <a:ea typeface="Arial" pitchFamily="34" charset="-122"/>
+                          <a:cs typeface="Arial" pitchFamily="34" charset="-120"/>
+                        </a:rPr>
+                        <a:t>Te hoog</a:t>
+                      </a:r>
+                      <a:endParaRPr lang="en-US" sz="1200" dirty="0">
+                        <a:latin typeface="Arial" charset="0"/>
+                        <a:ea typeface="Arial" charset="0"/>
+                        <a:cs typeface="Arial" charset="0"/>
+                      </a:endParaRPr>
+                    </a:p>
+                  </a:txBody>
+                  <a:tcPr marL="91440" marR="91440" marT="45720" marB="45720">
+                    <a:lnL w="6350" cap="flat" cmpd="sng" algn="ctr">
+                      <a:solidFill>
+                        <a:srgbClr val="CBD5E0"/>
+                      </a:solidFill>
+                      <a:prstDash val="solid"/>
+                      <a:round/>
+                      <a:headEnd type="none" w="med" len="med"/>
+                      <a:tailEnd type="none" w="med" len="med"/>
+                    </a:lnL>
+                    <a:lnR w="6350" cap="flat" cmpd="sng" algn="ctr">
+                      <a:solidFill>
+                        <a:srgbClr val="CBD5E0"/>
+                      </a:solidFill>
+                      <a:prstDash val="solid"/>
+                      <a:round/>
+                      <a:headEnd type="none" w="med" len="med"/>
+                      <a:tailEnd type="none" w="med" len="med"/>
+                    </a:lnR>
+                    <a:lnT w="6350" cap="flat" cmpd="sng" algn="ctr">
+                      <a:solidFill>
+                        <a:srgbClr val="CBD5E0"/>
+                      </a:solidFill>
+                      <a:prstDash val="solid"/>
+                      <a:round/>
+                      <a:headEnd type="none" w="med" len="med"/>
+                      <a:tailEnd type="none" w="med" len="med"/>
+                    </a:lnT>
+                    <a:lnB w="6350" cap="flat" cmpd="sng" algn="ctr">
+                      <a:solidFill>
+                        <a:srgbClr val="CBD5E0"/>
+                      </a:solidFill>
+                      <a:prstDash val="solid"/>
+                      <a:round/>
+                      <a:headEnd type="none" w="med" len="med"/>
+                      <a:tailEnd type="none" w="med" len="med"/>
+                    </a:lnB>
+                  </a:tcPr>
+                </a:tc>
+              </a:tr>
+              <a:tr h="0">
+                <a:tc>
+                  <a:txBody>
+                    <a:bodyPr/>
+                    <a:lstStyle/>
+                    <a:p>
+                      <a:pPr indent="0" marL="0">
+                        <a:buNone/>
+                      </a:pPr>
+                      <a:r>
+                        <a:rPr lang="en-US" sz="1200" b="1" dirty="0">
+                          <a:solidFill>
+                            <a:srgbClr val="000000"/>
+                          </a:solidFill>
+                          <a:latin typeface="Arial" pitchFamily="34" charset="0"/>
+                          <a:ea typeface="Arial" pitchFamily="34" charset="-122"/>
+                          <a:cs typeface="Arial" pitchFamily="34" charset="-120"/>
+                        </a:rPr>
+                        <a:t>Effect op hoeveelheid</a:t>
+                      </a:r>
+                      <a:endParaRPr lang="en-US" sz="1200" dirty="0">
+                        <a:latin typeface="Arial" charset="0"/>
+                        <a:ea typeface="Arial" charset="0"/>
+                        <a:cs typeface="Arial" charset="0"/>
+                      </a:endParaRPr>
+                    </a:p>
+                  </a:txBody>
+                  <a:tcPr marL="91440" marR="91440" marT="45720" marB="45720">
+                    <a:lnL w="6350" cap="flat" cmpd="sng" algn="ctr">
+                      <a:solidFill>
+                        <a:srgbClr val="CBD5E0"/>
+                      </a:solidFill>
+                      <a:prstDash val="solid"/>
+                      <a:round/>
+                      <a:headEnd type="none" w="med" len="med"/>
+                      <a:tailEnd type="none" w="med" len="med"/>
+                    </a:lnL>
+                    <a:lnR w="6350" cap="flat" cmpd="sng" algn="ctr">
+                      <a:solidFill>
+                        <a:srgbClr val="CBD5E0"/>
+                      </a:solidFill>
+                      <a:prstDash val="solid"/>
+                      <a:round/>
+                      <a:headEnd type="none" w="med" len="med"/>
+                      <a:tailEnd type="none" w="med" len="med"/>
+                    </a:lnR>
+                    <a:lnT w="6350" cap="flat" cmpd="sng" algn="ctr">
+                      <a:solidFill>
+                        <a:srgbClr val="CBD5E0"/>
+                      </a:solidFill>
+                      <a:prstDash val="solid"/>
+                      <a:round/>
+                      <a:headEnd type="none" w="med" len="med"/>
+                      <a:tailEnd type="none" w="med" len="med"/>
+                    </a:lnT>
+                    <a:lnB w="6350" cap="flat" cmpd="sng" algn="ctr">
+                      <a:solidFill>
+                        <a:srgbClr val="CBD5E0"/>
+                      </a:solidFill>
+                      <a:prstDash val="solid"/>
+                      <a:round/>
+                      <a:headEnd type="none" w="med" len="med"/>
+                      <a:tailEnd type="none" w="med" len="med"/>
+                    </a:lnB>
+                    <a:solidFill>
+                      <a:srgbClr val="F7FAFC"/>
+                    </a:solidFill>
+                  </a:tcPr>
+                </a:tc>
+                <a:tc>
+                  <a:txBody>
+                    <a:bodyPr/>
+                    <a:lstStyle/>
+                    <a:p>
+                      <a:pPr indent="0" marL="0">
+                        <a:buNone/>
+                      </a:pPr>
+                      <a:r>
+                        <a:rPr lang="en-US" sz="1200" dirty="0">
+                          <a:solidFill>
+                            <a:srgbClr val="000000"/>
+                          </a:solidFill>
+                          <a:latin typeface="Arial" pitchFamily="34" charset="0"/>
+                          <a:ea typeface="Arial" pitchFamily="34" charset="-122"/>
+                          <a:cs typeface="Arial" pitchFamily="34" charset="-120"/>
+                        </a:rPr>
+                        <a:t>Te veel productie</a:t>
+                      </a:r>
+                      <a:endParaRPr lang="en-US" sz="1200" dirty="0">
+                        <a:latin typeface="Arial" charset="0"/>
+                        <a:ea typeface="Arial" charset="0"/>
+                        <a:cs typeface="Arial" charset="0"/>
+                      </a:endParaRPr>
+                    </a:p>
+                  </a:txBody>
+                  <a:tcPr marL="91440" marR="91440" marT="45720" marB="45720">
+                    <a:lnL w="6350" cap="flat" cmpd="sng" algn="ctr">
+                      <a:solidFill>
+                        <a:srgbClr val="CBD5E0"/>
+                      </a:solidFill>
+                      <a:prstDash val="solid"/>
+                      <a:round/>
+                      <a:headEnd type="none" w="med" len="med"/>
+                      <a:tailEnd type="none" w="med" len="med"/>
+                    </a:lnL>
+                    <a:lnR w="6350" cap="flat" cmpd="sng" algn="ctr">
+                      <a:solidFill>
+                        <a:srgbClr val="CBD5E0"/>
+                      </a:solidFill>
+                      <a:prstDash val="solid"/>
+                      <a:round/>
+                      <a:headEnd type="none" w="med" len="med"/>
+                      <a:tailEnd type="none" w="med" len="med"/>
+                    </a:lnR>
+                    <a:lnT w="6350" cap="flat" cmpd="sng" algn="ctr">
+                      <a:solidFill>
+                        <a:srgbClr val="CBD5E0"/>
+                      </a:solidFill>
+                      <a:prstDash val="solid"/>
+                      <a:round/>
+                      <a:headEnd type="none" w="med" len="med"/>
+                      <a:tailEnd type="none" w="med" len="med"/>
+                    </a:lnT>
+                    <a:lnB w="6350" cap="flat" cmpd="sng" algn="ctr">
+                      <a:solidFill>
+                        <a:srgbClr val="CBD5E0"/>
+                      </a:solidFill>
+                      <a:prstDash val="solid"/>
+                      <a:round/>
+                      <a:headEnd type="none" w="med" len="med"/>
+                      <a:tailEnd type="none" w="med" len="med"/>
+                    </a:lnB>
+                    <a:solidFill>
+                      <a:srgbClr val="F7FAFC"/>
+                    </a:solidFill>
+                  </a:tcPr>
+                </a:tc>
+                <a:tc>
+                  <a:txBody>
+                    <a:bodyPr/>
+                    <a:lstStyle/>
+                    <a:p>
+                      <a:pPr indent="0" marL="0">
+                        <a:buNone/>
+                      </a:pPr>
+                      <a:r>
+                        <a:rPr lang="en-US" sz="1200" dirty="0">
+                          <a:solidFill>
+                            <a:srgbClr val="000000"/>
+                          </a:solidFill>
+                          <a:latin typeface="Arial" pitchFamily="34" charset="0"/>
+                          <a:ea typeface="Arial" pitchFamily="34" charset="-122"/>
+                          <a:cs typeface="Arial" pitchFamily="34" charset="-120"/>
+                        </a:rPr>
+                        <a:t>Te weinig consumptie</a:t>
+                      </a:r>
+                      <a:endParaRPr lang="en-US" sz="1200" dirty="0">
+                        <a:latin typeface="Arial" charset="0"/>
+                        <a:ea typeface="Arial" charset="0"/>
+                        <a:cs typeface="Arial" charset="0"/>
+                      </a:endParaRPr>
+                    </a:p>
+                  </a:txBody>
+                  <a:tcPr marL="91440" marR="91440" marT="45720" marB="45720">
+                    <a:lnL w="6350" cap="flat" cmpd="sng" algn="ctr">
+                      <a:solidFill>
+                        <a:srgbClr val="CBD5E0"/>
+                      </a:solidFill>
+                      <a:prstDash val="solid"/>
+                      <a:round/>
+                      <a:headEnd type="none" w="med" len="med"/>
+                      <a:tailEnd type="none" w="med" len="med"/>
+                    </a:lnL>
+                    <a:lnR w="6350" cap="flat" cmpd="sng" algn="ctr">
+                      <a:solidFill>
+                        <a:srgbClr val="CBD5E0"/>
+                      </a:solidFill>
+                      <a:prstDash val="solid"/>
+                      <a:round/>
+                      <a:headEnd type="none" w="med" len="med"/>
+                      <a:tailEnd type="none" w="med" len="med"/>
+                    </a:lnR>
+                    <a:lnT w="6350" cap="flat" cmpd="sng" algn="ctr">
+                      <a:solidFill>
+                        <a:srgbClr val="CBD5E0"/>
+                      </a:solidFill>
+                      <a:prstDash val="solid"/>
+                      <a:round/>
+                      <a:headEnd type="none" w="med" len="med"/>
+                      <a:tailEnd type="none" w="med" len="med"/>
+                    </a:lnT>
+                    <a:lnB w="6350" cap="flat" cmpd="sng" algn="ctr">
+                      <a:solidFill>
+                        <a:srgbClr val="CBD5E0"/>
+                      </a:solidFill>
+                      <a:prstDash val="solid"/>
+                      <a:round/>
+                      <a:headEnd type="none" w="med" len="med"/>
+                      <a:tailEnd type="none" w="med" len="med"/>
+                    </a:lnB>
+                    <a:solidFill>
+                      <a:srgbClr val="F7FAFC"/>
+                    </a:solidFill>
+                  </a:tcPr>
+                </a:tc>
+              </a:tr>
+              <a:tr h="0">
+                <a:tc>
+                  <a:txBody>
+                    <a:bodyPr/>
+                    <a:lstStyle/>
+                    <a:p>
+                      <a:pPr indent="0" marL="0">
+                        <a:buNone/>
+                      </a:pPr>
+                      <a:r>
+                        <a:rPr lang="en-US" sz="1200" b="1" dirty="0">
+                          <a:solidFill>
+                            <a:srgbClr val="000000"/>
+                          </a:solidFill>
+                          <a:latin typeface="Arial" pitchFamily="34" charset="0"/>
+                          <a:ea typeface="Arial" pitchFamily="34" charset="-122"/>
+                          <a:cs typeface="Arial" pitchFamily="34" charset="-120"/>
+                        </a:rPr>
+                        <a:t>Welke curve verschuift?</a:t>
+                      </a:r>
+                      <a:endParaRPr lang="en-US" sz="1200" dirty="0">
+                        <a:latin typeface="Arial" charset="0"/>
+                        <a:ea typeface="Arial" charset="0"/>
+                        <a:cs typeface="Arial" charset="0"/>
+                      </a:endParaRPr>
+                    </a:p>
+                  </a:txBody>
+                  <a:tcPr marL="91440" marR="91440" marT="45720" marB="45720">
+                    <a:lnL w="6350" cap="flat" cmpd="sng" algn="ctr">
+                      <a:solidFill>
+                        <a:srgbClr val="CBD5E0"/>
+                      </a:solidFill>
+                      <a:prstDash val="solid"/>
+                      <a:round/>
+                      <a:headEnd type="none" w="med" len="med"/>
+                      <a:tailEnd type="none" w="med" len="med"/>
+                    </a:lnL>
+                    <a:lnR w="6350" cap="flat" cmpd="sng" algn="ctr">
+                      <a:solidFill>
+                        <a:srgbClr val="CBD5E0"/>
+                      </a:solidFill>
+                      <a:prstDash val="solid"/>
+                      <a:round/>
+                      <a:headEnd type="none" w="med" len="med"/>
+                      <a:tailEnd type="none" w="med" len="med"/>
+                    </a:lnR>
+                    <a:lnT w="6350" cap="flat" cmpd="sng" algn="ctr">
+                      <a:solidFill>
+                        <a:srgbClr val="CBD5E0"/>
+                      </a:solidFill>
+                      <a:prstDash val="solid"/>
+                      <a:round/>
+                      <a:headEnd type="none" w="med" len="med"/>
+                      <a:tailEnd type="none" w="med" len="med"/>
+                    </a:lnT>
+                    <a:lnB w="6350" cap="flat" cmpd="sng" algn="ctr">
+                      <a:solidFill>
+                        <a:srgbClr val="CBD5E0"/>
+                      </a:solidFill>
+                      <a:prstDash val="solid"/>
+                      <a:round/>
+                      <a:headEnd type="none" w="med" len="med"/>
+                      <a:tailEnd type="none" w="med" len="med"/>
+                    </a:lnB>
+                  </a:tcPr>
+                </a:tc>
+                <a:tc>
+                  <a:txBody>
+                    <a:bodyPr/>
+                    <a:lstStyle/>
+                    <a:p>
+                      <a:pPr indent="0" marL="0">
+                        <a:buNone/>
+                      </a:pPr>
+                      <a:r>
+                        <a:rPr lang="en-US" sz="1200" dirty="0">
+                          <a:solidFill>
+                            <a:srgbClr val="000000"/>
+                          </a:solidFill>
+                          <a:latin typeface="Arial" pitchFamily="34" charset="0"/>
+                          <a:ea typeface="Arial" pitchFamily="34" charset="-122"/>
+                          <a:cs typeface="Arial" pitchFamily="34" charset="-120"/>
+                        </a:rPr>
+                        <a:t>A/MPK → MMK (omhoog)</a:t>
+                      </a:r>
+                      <a:endParaRPr lang="en-US" sz="1200" dirty="0">
+                        <a:latin typeface="Arial" charset="0"/>
+                        <a:ea typeface="Arial" charset="0"/>
+                        <a:cs typeface="Arial" charset="0"/>
+                      </a:endParaRPr>
+                    </a:p>
+                  </a:txBody>
+                  <a:tcPr marL="91440" marR="91440" marT="45720" marB="45720">
+                    <a:lnL w="6350" cap="flat" cmpd="sng" algn="ctr">
+                      <a:solidFill>
+                        <a:srgbClr val="CBD5E0"/>
+                      </a:solidFill>
+                      <a:prstDash val="solid"/>
+                      <a:round/>
+                      <a:headEnd type="none" w="med" len="med"/>
+                      <a:tailEnd type="none" w="med" len="med"/>
+                    </a:lnL>
+                    <a:lnR w="6350" cap="flat" cmpd="sng" algn="ctr">
+                      <a:solidFill>
+                        <a:srgbClr val="CBD5E0"/>
+                      </a:solidFill>
+                      <a:prstDash val="solid"/>
+                      <a:round/>
+                      <a:headEnd type="none" w="med" len="med"/>
+                      <a:tailEnd type="none" w="med" len="med"/>
+                    </a:lnR>
+                    <a:lnT w="6350" cap="flat" cmpd="sng" algn="ctr">
+                      <a:solidFill>
+                        <a:srgbClr val="CBD5E0"/>
+                      </a:solidFill>
+                      <a:prstDash val="solid"/>
+                      <a:round/>
+                      <a:headEnd type="none" w="med" len="med"/>
+                      <a:tailEnd type="none" w="med" len="med"/>
+                    </a:lnT>
+                    <a:lnB w="6350" cap="flat" cmpd="sng" algn="ctr">
+                      <a:solidFill>
+                        <a:srgbClr val="CBD5E0"/>
+                      </a:solidFill>
+                      <a:prstDash val="solid"/>
+                      <a:round/>
+                      <a:headEnd type="none" w="med" len="med"/>
+                      <a:tailEnd type="none" w="med" len="med"/>
+                    </a:lnB>
+                  </a:tcPr>
+                </a:tc>
+                <a:tc>
+                  <a:txBody>
+                    <a:bodyPr/>
+                    <a:lstStyle/>
+                    <a:p>
+                      <a:pPr indent="0" marL="0">
+                        <a:buNone/>
+                      </a:pPr>
+                      <a:r>
+                        <a:rPr lang="en-US" sz="1200" dirty="0">
+                          <a:solidFill>
+                            <a:srgbClr val="000000"/>
+                          </a:solidFill>
+                          <a:latin typeface="Arial" pitchFamily="34" charset="0"/>
+                          <a:ea typeface="Arial" pitchFamily="34" charset="-122"/>
+                          <a:cs typeface="Arial" pitchFamily="34" charset="-120"/>
+                        </a:rPr>
+                        <a:t>V/MPB → MMB (naar rechts)</a:t>
+                      </a:r>
+                      <a:endParaRPr lang="en-US" sz="1200" dirty="0">
+                        <a:latin typeface="Arial" charset="0"/>
+                        <a:ea typeface="Arial" charset="0"/>
+                        <a:cs typeface="Arial" charset="0"/>
+                      </a:endParaRPr>
+                    </a:p>
+                  </a:txBody>
+                  <a:tcPr marL="91440" marR="91440" marT="45720" marB="45720">
+                    <a:lnL w="6350" cap="flat" cmpd="sng" algn="ctr">
+                      <a:solidFill>
+                        <a:srgbClr val="CBD5E0"/>
+                      </a:solidFill>
+                      <a:prstDash val="solid"/>
+                      <a:round/>
+                      <a:headEnd type="none" w="med" len="med"/>
+                      <a:tailEnd type="none" w="med" len="med"/>
+                    </a:lnL>
+                    <a:lnR w="6350" cap="flat" cmpd="sng" algn="ctr">
+                      <a:solidFill>
+                        <a:srgbClr val="CBD5E0"/>
+                      </a:solidFill>
+                      <a:prstDash val="solid"/>
+                      <a:round/>
+                      <a:headEnd type="none" w="med" len="med"/>
+                      <a:tailEnd type="none" w="med" len="med"/>
+                    </a:lnR>
+                    <a:lnT w="6350" cap="flat" cmpd="sng" algn="ctr">
+                      <a:solidFill>
+                        <a:srgbClr val="CBD5E0"/>
+                      </a:solidFill>
+                      <a:prstDash val="solid"/>
+                      <a:round/>
+                      <a:headEnd type="none" w="med" len="med"/>
+                      <a:tailEnd type="none" w="med" len="med"/>
+                    </a:lnT>
+                    <a:lnB w="6350" cap="flat" cmpd="sng" algn="ctr">
+                      <a:solidFill>
+                        <a:srgbClr val="CBD5E0"/>
+                      </a:solidFill>
+                      <a:prstDash val="solid"/>
+                      <a:round/>
+                      <a:headEnd type="none" w="med" len="med"/>
+                      <a:tailEnd type="none" w="med" len="med"/>
+                    </a:lnB>
+                  </a:tcPr>
+                </a:tc>
+              </a:tr>
+              <a:tr h="0">
+                <a:tc>
+                  <a:txBody>
+                    <a:bodyPr/>
+                    <a:lstStyle/>
+                    <a:p>
+                      <a:pPr indent="0" marL="0">
+                        <a:buNone/>
+                      </a:pPr>
+                      <a:r>
+                        <a:rPr lang="en-US" sz="1200" b="1" dirty="0">
+                          <a:solidFill>
+                            <a:srgbClr val="000000"/>
+                          </a:solidFill>
+                          <a:latin typeface="Arial" pitchFamily="34" charset="0"/>
+                          <a:ea typeface="Arial" pitchFamily="34" charset="-122"/>
+                          <a:cs typeface="Arial" pitchFamily="34" charset="-120"/>
+                        </a:rPr>
+                        <a:t>Voorbeelden</a:t>
+                      </a:r>
+                      <a:endParaRPr lang="en-US" sz="1200" dirty="0">
+                        <a:latin typeface="Arial" charset="0"/>
+                        <a:ea typeface="Arial" charset="0"/>
+                        <a:cs typeface="Arial" charset="0"/>
+                      </a:endParaRPr>
+                    </a:p>
+                  </a:txBody>
+                  <a:tcPr marL="91440" marR="91440" marT="45720" marB="45720">
+                    <a:lnL w="6350" cap="flat" cmpd="sng" algn="ctr">
+                      <a:solidFill>
+                        <a:srgbClr val="CBD5E0"/>
+                      </a:solidFill>
+                      <a:prstDash val="solid"/>
+                      <a:round/>
+                      <a:headEnd type="none" w="med" len="med"/>
+                      <a:tailEnd type="none" w="med" len="med"/>
+                    </a:lnL>
+                    <a:lnR w="6350" cap="flat" cmpd="sng" algn="ctr">
+                      <a:solidFill>
+                        <a:srgbClr val="CBD5E0"/>
+                      </a:solidFill>
+                      <a:prstDash val="solid"/>
+                      <a:round/>
+                      <a:headEnd type="none" w="med" len="med"/>
+                      <a:tailEnd type="none" w="med" len="med"/>
+                    </a:lnR>
+                    <a:lnT w="6350" cap="flat" cmpd="sng" algn="ctr">
+                      <a:solidFill>
+                        <a:srgbClr val="CBD5E0"/>
+                      </a:solidFill>
+                      <a:prstDash val="solid"/>
+                      <a:round/>
+                      <a:headEnd type="none" w="med" len="med"/>
+                      <a:tailEnd type="none" w="med" len="med"/>
+                    </a:lnT>
+                    <a:lnB w="6350" cap="flat" cmpd="sng" algn="ctr">
+                      <a:solidFill>
+                        <a:srgbClr val="CBD5E0"/>
+                      </a:solidFill>
+                      <a:prstDash val="solid"/>
+                      <a:round/>
+                      <a:headEnd type="none" w="med" len="med"/>
+                      <a:tailEnd type="none" w="med" len="med"/>
+                    </a:lnB>
+                    <a:solidFill>
+                      <a:srgbClr val="F7FAFC"/>
+                    </a:solidFill>
+                  </a:tcPr>
+                </a:tc>
+                <a:tc>
+                  <a:txBody>
+                    <a:bodyPr/>
+                    <a:lstStyle/>
+                    <a:p>
+                      <a:pPr indent="0" marL="0">
+                        <a:buNone/>
+                      </a:pPr>
+                      <a:r>
+                        <a:rPr lang="en-US" sz="1200" dirty="0">
+                          <a:solidFill>
+                            <a:srgbClr val="000000"/>
+                          </a:solidFill>
+                          <a:latin typeface="Arial" pitchFamily="34" charset="0"/>
+                          <a:ea typeface="Arial" pitchFamily="34" charset="-122"/>
+                          <a:cs typeface="Arial" pitchFamily="34" charset="-120"/>
+                        </a:rPr>
+                        <a:t>Luchtvervuiling, geluidsoverlast</a:t>
+                      </a:r>
+                      <a:endParaRPr lang="en-US" sz="1200" dirty="0">
+                        <a:latin typeface="Arial" charset="0"/>
+                        <a:ea typeface="Arial" charset="0"/>
+                        <a:cs typeface="Arial" charset="0"/>
+                      </a:endParaRPr>
+                    </a:p>
+                  </a:txBody>
+                  <a:tcPr marL="91440" marR="91440" marT="45720" marB="45720">
+                    <a:lnL w="6350" cap="flat" cmpd="sng" algn="ctr">
+                      <a:solidFill>
+                        <a:srgbClr val="CBD5E0"/>
+                      </a:solidFill>
+                      <a:prstDash val="solid"/>
+                      <a:round/>
+                      <a:headEnd type="none" w="med" len="med"/>
+                      <a:tailEnd type="none" w="med" len="med"/>
+                    </a:lnL>
+                    <a:lnR w="6350" cap="flat" cmpd="sng" algn="ctr">
+                      <a:solidFill>
+                        <a:srgbClr val="CBD5E0"/>
+                      </a:solidFill>
+                      <a:prstDash val="solid"/>
+                      <a:round/>
+                      <a:headEnd type="none" w="med" len="med"/>
+                      <a:tailEnd type="none" w="med" len="med"/>
+                    </a:lnR>
+                    <a:lnT w="6350" cap="flat" cmpd="sng" algn="ctr">
+                      <a:solidFill>
+                        <a:srgbClr val="CBD5E0"/>
+                      </a:solidFill>
+                      <a:prstDash val="solid"/>
+                      <a:round/>
+                      <a:headEnd type="none" w="med" len="med"/>
+                      <a:tailEnd type="none" w="med" len="med"/>
+                    </a:lnT>
+                    <a:lnB w="6350" cap="flat" cmpd="sng" algn="ctr">
+                      <a:solidFill>
+                        <a:srgbClr val="CBD5E0"/>
+                      </a:solidFill>
+                      <a:prstDash val="solid"/>
+                      <a:round/>
+                      <a:headEnd type="none" w="med" len="med"/>
+                      <a:tailEnd type="none" w="med" len="med"/>
+                    </a:lnB>
+                    <a:solidFill>
+                      <a:srgbClr val="F7FAFC"/>
+                    </a:solidFill>
+                  </a:tcPr>
+                </a:tc>
+                <a:tc>
+                  <a:txBody>
+                    <a:bodyPr/>
+                    <a:lstStyle/>
+                    <a:p>
+                      <a:pPr indent="0" marL="0">
+                        <a:buNone/>
+                      </a:pPr>
+                      <a:r>
+                        <a:rPr lang="en-US" sz="1200" dirty="0">
+                          <a:solidFill>
+                            <a:srgbClr val="000000"/>
+                          </a:solidFill>
+                          <a:latin typeface="Arial" pitchFamily="34" charset="0"/>
+                          <a:ea typeface="Arial" pitchFamily="34" charset="-122"/>
+                          <a:cs typeface="Arial" pitchFamily="34" charset="-120"/>
+                        </a:rPr>
+                        <a:t>Vaccinatie, onderwijs</a:t>
+                      </a:r>
+                      <a:endParaRPr lang="en-US" sz="1200" dirty="0">
+                        <a:latin typeface="Arial" charset="0"/>
+                        <a:ea typeface="Arial" charset="0"/>
+                        <a:cs typeface="Arial" charset="0"/>
+                      </a:endParaRPr>
+                    </a:p>
+                  </a:txBody>
+                  <a:tcPr marL="91440" marR="91440" marT="45720" marB="45720">
+                    <a:lnL w="6350" cap="flat" cmpd="sng" algn="ctr">
+                      <a:solidFill>
+                        <a:srgbClr val="CBD5E0"/>
+                      </a:solidFill>
+                      <a:prstDash val="solid"/>
+                      <a:round/>
+                      <a:headEnd type="none" w="med" len="med"/>
+                      <a:tailEnd type="none" w="med" len="med"/>
+                    </a:lnL>
+                    <a:lnR w="6350" cap="flat" cmpd="sng" algn="ctr">
+                      <a:solidFill>
+                        <a:srgbClr val="CBD5E0"/>
+                      </a:solidFill>
+                      <a:prstDash val="solid"/>
+                      <a:round/>
+                      <a:headEnd type="none" w="med" len="med"/>
+                      <a:tailEnd type="none" w="med" len="med"/>
+                    </a:lnR>
+                    <a:lnT w="6350" cap="flat" cmpd="sng" algn="ctr">
+                      <a:solidFill>
+                        <a:srgbClr val="CBD5E0"/>
+                      </a:solidFill>
+                      <a:prstDash val="solid"/>
+                      <a:round/>
+                      <a:headEnd type="none" w="med" len="med"/>
+                      <a:tailEnd type="none" w="med" len="med"/>
+                    </a:lnT>
+                    <a:lnB w="6350" cap="flat" cmpd="sng" algn="ctr">
+                      <a:solidFill>
+                        <a:srgbClr val="CBD5E0"/>
+                      </a:solidFill>
+                      <a:prstDash val="solid"/>
+                      <a:round/>
+                      <a:headEnd type="none" w="med" len="med"/>
+                      <a:tailEnd type="none" w="med" len="med"/>
+                    </a:lnB>
+                    <a:solidFill>
+                      <a:srgbClr val="F7FAFC"/>
+                    </a:solidFill>
+                  </a:tcPr>
+                </a:tc>
+              </a:tr>
+              <a:tr h="0">
+                <a:tc>
+                  <a:txBody>
+                    <a:bodyPr/>
+                    <a:lstStyle/>
+                    <a:p>
+                      <a:pPr indent="0" marL="0">
+                        <a:buNone/>
+                      </a:pPr>
+                      <a:r>
+                        <a:rPr lang="en-US" sz="1200" b="1" dirty="0">
+                          <a:solidFill>
+                            <a:srgbClr val="000000"/>
+                          </a:solidFill>
+                          <a:latin typeface="Arial" pitchFamily="34" charset="0"/>
+                          <a:ea typeface="Arial" pitchFamily="34" charset="-122"/>
+                          <a:cs typeface="Arial" pitchFamily="34" charset="-120"/>
+                        </a:rPr>
+                        <a:t>Instrument overheid</a:t>
+                      </a:r>
+                      <a:endParaRPr lang="en-US" sz="1200" dirty="0">
+                        <a:latin typeface="Arial" charset="0"/>
+                        <a:ea typeface="Arial" charset="0"/>
+                        <a:cs typeface="Arial" charset="0"/>
+                      </a:endParaRPr>
+                    </a:p>
+                  </a:txBody>
+                  <a:tcPr marL="91440" marR="91440" marT="45720" marB="45720">
+                    <a:lnL w="6350" cap="flat" cmpd="sng" algn="ctr">
+                      <a:solidFill>
+                        <a:srgbClr val="CBD5E0"/>
+                      </a:solidFill>
+                      <a:prstDash val="solid"/>
+                      <a:round/>
+                      <a:headEnd type="none" w="med" len="med"/>
+                      <a:tailEnd type="none" w="med" len="med"/>
+                    </a:lnL>
+                    <a:lnR w="6350" cap="flat" cmpd="sng" algn="ctr">
+                      <a:solidFill>
+                        <a:srgbClr val="CBD5E0"/>
+                      </a:solidFill>
+                      <a:prstDash val="solid"/>
+                      <a:round/>
+                      <a:headEnd type="none" w="med" len="med"/>
+                      <a:tailEnd type="none" w="med" len="med"/>
+                    </a:lnR>
+                    <a:lnT w="6350" cap="flat" cmpd="sng" algn="ctr">
+                      <a:solidFill>
+                        <a:srgbClr val="CBD5E0"/>
+                      </a:solidFill>
+                      <a:prstDash val="solid"/>
+                      <a:round/>
+                      <a:headEnd type="none" w="med" len="med"/>
+                      <a:tailEnd type="none" w="med" len="med"/>
+                    </a:lnT>
+                    <a:lnB w="6350" cap="flat" cmpd="sng" algn="ctr">
+                      <a:solidFill>
+                        <a:srgbClr val="CBD5E0"/>
+                      </a:solidFill>
+                      <a:prstDash val="solid"/>
+                      <a:round/>
+                      <a:headEnd type="none" w="med" len="med"/>
+                      <a:tailEnd type="none" w="med" len="med"/>
+                    </a:lnB>
+                  </a:tcPr>
+                </a:tc>
+                <a:tc>
+                  <a:txBody>
+                    <a:bodyPr/>
+                    <a:lstStyle/>
+                    <a:p>
+                      <a:pPr indent="0" marL="0">
+                        <a:buNone/>
+                      </a:pPr>
+                      <a:r>
+                        <a:rPr lang="en-US" sz="1200" b="1" dirty="0">
+                          <a:solidFill>
+                            <a:srgbClr val="186A3B"/>
+                          </a:solidFill>
+                          <a:latin typeface="Arial" pitchFamily="34" charset="0"/>
+                          <a:ea typeface="Arial" pitchFamily="34" charset="-122"/>
+                          <a:cs typeface="Arial" pitchFamily="34" charset="-120"/>
+                        </a:rPr>
+                        <a:t>Belasting (prijs stijgt)</a:t>
+                      </a:r>
+                      <a:endParaRPr lang="en-US" sz="1200" dirty="0">
+                        <a:latin typeface="Arial" charset="0"/>
+                        <a:ea typeface="Arial" charset="0"/>
+                        <a:cs typeface="Arial" charset="0"/>
+                      </a:endParaRPr>
+                    </a:p>
+                  </a:txBody>
+                  <a:tcPr marL="91440" marR="91440" marT="45720" marB="45720">
+                    <a:lnL w="6350" cap="flat" cmpd="sng" algn="ctr">
+                      <a:solidFill>
+                        <a:srgbClr val="CBD5E0"/>
+                      </a:solidFill>
+                      <a:prstDash val="solid"/>
+                      <a:round/>
+                      <a:headEnd type="none" w="med" len="med"/>
+                      <a:tailEnd type="none" w="med" len="med"/>
+                    </a:lnL>
+                    <a:lnR w="6350" cap="flat" cmpd="sng" algn="ctr">
+                      <a:solidFill>
+                        <a:srgbClr val="CBD5E0"/>
+                      </a:solidFill>
+                      <a:prstDash val="solid"/>
+                      <a:round/>
+                      <a:headEnd type="none" w="med" len="med"/>
+                      <a:tailEnd type="none" w="med" len="med"/>
+                    </a:lnR>
+                    <a:lnT w="6350" cap="flat" cmpd="sng" algn="ctr">
+                      <a:solidFill>
+                        <a:srgbClr val="CBD5E0"/>
+                      </a:solidFill>
+                      <a:prstDash val="solid"/>
+                      <a:round/>
+                      <a:headEnd type="none" w="med" len="med"/>
+                      <a:tailEnd type="none" w="med" len="med"/>
+                    </a:lnT>
+                    <a:lnB w="6350" cap="flat" cmpd="sng" algn="ctr">
+                      <a:solidFill>
+                        <a:srgbClr val="CBD5E0"/>
+                      </a:solidFill>
+                      <a:prstDash val="solid"/>
+                      <a:round/>
+                      <a:headEnd type="none" w="med" len="med"/>
+                      <a:tailEnd type="none" w="med" len="med"/>
+                    </a:lnB>
+                  </a:tcPr>
+                </a:tc>
+                <a:tc>
+                  <a:txBody>
+                    <a:bodyPr/>
+                    <a:lstStyle/>
+                    <a:p>
+                      <a:pPr indent="0" marL="0">
+                        <a:buNone/>
+                      </a:pPr>
+                      <a:r>
+                        <a:rPr lang="en-US" sz="1200" b="1" dirty="0">
+                          <a:solidFill>
+                            <a:srgbClr val="186A3B"/>
+                          </a:solidFill>
+                          <a:latin typeface="Arial" pitchFamily="34" charset="0"/>
+                          <a:ea typeface="Arial" pitchFamily="34" charset="-122"/>
+                          <a:cs typeface="Arial" pitchFamily="34" charset="-120"/>
+                        </a:rPr>
+                        <a:t>Subsidie (prijs daalt)</a:t>
+                      </a:r>
+                      <a:endParaRPr lang="en-US" sz="1200" dirty="0">
+                        <a:latin typeface="Arial" charset="0"/>
+                        <a:ea typeface="Arial" charset="0"/>
+                        <a:cs typeface="Arial" charset="0"/>
+                      </a:endParaRPr>
+                    </a:p>
+                  </a:txBody>
+                  <a:tcPr marL="91440" marR="91440" marT="45720" marB="45720">
+                    <a:lnL w="6350" cap="flat" cmpd="sng" algn="ctr">
+                      <a:solidFill>
+                        <a:srgbClr val="CBD5E0"/>
+                      </a:solidFill>
+                      <a:prstDash val="solid"/>
+                      <a:round/>
+                      <a:headEnd type="none" w="med" len="med"/>
+                      <a:tailEnd type="none" w="med" len="med"/>
+                    </a:lnL>
+                    <a:lnR w="6350" cap="flat" cmpd="sng" algn="ctr">
+                      <a:solidFill>
+                        <a:srgbClr val="CBD5E0"/>
+                      </a:solidFill>
+                      <a:prstDash val="solid"/>
+                      <a:round/>
+                      <a:headEnd type="none" w="med" len="med"/>
+                      <a:tailEnd type="none" w="med" len="med"/>
+                    </a:lnR>
+                    <a:lnT w="6350" cap="flat" cmpd="sng" algn="ctr">
+                      <a:solidFill>
+                        <a:srgbClr val="CBD5E0"/>
+                      </a:solidFill>
+                      <a:prstDash val="solid"/>
+                      <a:round/>
+                      <a:headEnd type="none" w="med" len="med"/>
+                      <a:tailEnd type="none" w="med" len="med"/>
+                    </a:lnT>
+                    <a:lnB w="6350" cap="flat" cmpd="sng" algn="ctr">
+                      <a:solidFill>
+                        <a:srgbClr val="CBD5E0"/>
+                      </a:solidFill>
+                      <a:prstDash val="solid"/>
+                      <a:round/>
+                      <a:headEnd type="none" w="med" len="med"/>
+                      <a:tailEnd type="none" w="med" len="med"/>
+                    </a:lnB>
+                  </a:tcPr>
+                </a:tc>
+              </a:tr>
+            </a:tbl>
+          </a:graphicData>
+        </a:graphic>
+      </p:graphicFrame>
+    </p:spTree>
+  </p:cSld>
+  <p:clrMapOvr>
+    <a:masterClrMapping/>
+  </p:clrMapOvr>
+</p:sld>
+</file>
+
+<file path=ppt/slides/slide13.xml><?xml version="1.0" encoding="utf-8"?>
+<p:sld xmlns:a="http://schemas.openxmlformats.org/drawingml/2006/main" xmlns:r="http://schemas.openxmlformats.org/officeDocument/2006/relationships" xmlns:p="http://schemas.openxmlformats.org/presentationml/2006/main">
+  <p:cSld name="Slide 13">
+    <p:spTree>
+      <p:nvGrpSpPr>
+        <p:cNvPr id="1" name=""/>
+        <p:cNvGrpSpPr/>
+        <p:nvPr/>
+      </p:nvGrpSpPr>
+      <p:grpSpPr>
+        <a:xfrm>
+          <a:off x="0" y="0"/>
+          <a:ext cx="0" cy="0"/>
+          <a:chOff x="0" y="0"/>
+          <a:chExt cx="0" cy="0"/>
+        </a:xfrm>
+      </p:grpSpPr>
+      <p:sp>
+        <p:nvSpPr>
+          <p:cNvPr id="2" name="Text 0"/>
+          <p:cNvSpPr/>
+          <p:nvPr/>
+        </p:nvSpPr>
+        <p:spPr>
+          <a:xfrm>
+            <a:off x="457200" y="0"/>
+            <a:ext cx="8229600" cy="685800"/>
+          </a:xfrm>
+          <a:prstGeom prst="rect">
+            <a:avLst/>
+          </a:prstGeom>
+          <a:noFill/>
+          <a:ln/>
+        </p:spPr>
+        <p:txBody>
+          <a:bodyPr wrap="square" rtlCol="0" anchor="ctr"/>
+          <a:lstStyle/>
+          <a:p>
+            <a:pPr indent="0" marL="0">
+              <a:buNone/>
+            </a:pPr>
+            <a:r>
+              <a:rPr lang="en-US" sz="2400" b="1" dirty="0">
+                <a:solidFill>
+                  <a:srgbClr val="FFFFFF"/>
+                </a:solidFill>
+                <a:latin typeface="Arial" pitchFamily="34" charset="0"/>
+                <a:ea typeface="Arial" pitchFamily="34" charset="-122"/>
+                <a:cs typeface="Arial" pitchFamily="34" charset="-120"/>
+              </a:rPr>
+              <a:t>Internaliseren: extern effect in de prijs trekken</a:t>
+            </a:r>
+            <a:endParaRPr lang="en-US" sz="2400" dirty="0"/>
+          </a:p>
+        </p:txBody>
+      </p:sp>
+      <p:sp>
+        <p:nvSpPr>
+          <p:cNvPr id="3" name="Shape 1"/>
+          <p:cNvSpPr/>
+          <p:nvPr/>
+        </p:nvSpPr>
+        <p:spPr>
+          <a:xfrm>
+            <a:off x="1188720" y="960120"/>
+            <a:ext cx="6766560" cy="566928"/>
+          </a:xfrm>
+          <a:prstGeom prst="rect">
+            <a:avLst>
+              <a:gd name="adj" fmla="val 6452"/>
+            </a:avLst>
+          </a:prstGeom>
+          <a:solidFill>
+            <a:srgbClr val="F9F6F1"/>
+          </a:solidFill>
+          <a:ln/>
+          <a:effectLst>
+            <a:outerShdw sx="100000" sy="100000" kx="0" ky="0" algn="bl" rotWithShape="0" blurRad="76200" dist="25400" dir="8100000">
+              <a:srgbClr val="000000">
+                <a:alpha val="10000"/>
+              </a:srgbClr>
+            </a:outerShdw>
+          </a:effectLst>
+        </p:spPr>
+      </p:sp>
+      <p:sp>
+        <p:nvSpPr>
+          <p:cNvPr id="4" name="Text 2"/>
+          <p:cNvSpPr/>
+          <p:nvPr/>
+        </p:nvSpPr>
+        <p:spPr>
+          <a:xfrm>
+            <a:off x="1371600" y="960120"/>
+            <a:ext cx="6492240" cy="566928"/>
+          </a:xfrm>
+          <a:prstGeom prst="rect">
+            <a:avLst/>
+          </a:prstGeom>
+          <a:noFill/>
+          <a:ln/>
+        </p:spPr>
+        <p:txBody>
+          <a:bodyPr wrap="square" lIns="0" tIns="0" rIns="0" bIns="0" rtlCol="0" anchor="ctr"/>
+          <a:lstStyle/>
+          <a:p>
+            <a:pPr indent="0" marL="0">
+              <a:buNone/>
+            </a:pPr>
+            <a:r>
+              <a:rPr lang="en-US" sz="1400" dirty="0">
+                <a:solidFill>
+                  <a:srgbClr val="2D3748"/>
+                </a:solidFill>
+                <a:latin typeface="Arial" pitchFamily="34" charset="0"/>
+                <a:ea typeface="Arial" pitchFamily="34" charset="-122"/>
+                <a:cs typeface="Arial" pitchFamily="34" charset="-120"/>
+              </a:rPr>
+              <a:t>Extern effect signaleren (kosten of baten buiten de prijs)</a:t>
+            </a:r>
+            <a:endParaRPr lang="en-US" sz="1400" dirty="0"/>
+          </a:p>
+        </p:txBody>
+      </p:sp>
+      <p:sp>
+        <p:nvSpPr>
+          <p:cNvPr id="5" name="Shape 3"/>
+          <p:cNvSpPr/>
+          <p:nvPr/>
+        </p:nvSpPr>
+        <p:spPr>
+          <a:xfrm>
+            <a:off x="1188720" y="1636776"/>
+            <a:ext cx="6766560" cy="566928"/>
+          </a:xfrm>
+          <a:prstGeom prst="rect">
+            <a:avLst>
+              <a:gd name="adj" fmla="val 6452"/>
+            </a:avLst>
+          </a:prstGeom>
+          <a:solidFill>
+            <a:srgbClr val="1E8449"/>
+          </a:solidFill>
+          <a:ln/>
+          <a:effectLst>
+            <a:outerShdw sx="100000" sy="100000" kx="0" ky="0" algn="bl" rotWithShape="0" blurRad="76200" dist="25400" dir="8100000">
+              <a:srgbClr val="000000">
+                <a:alpha val="10000"/>
+              </a:srgbClr>
+            </a:outerShdw>
+          </a:effectLst>
+        </p:spPr>
+      </p:sp>
+      <p:sp>
+        <p:nvSpPr>
+          <p:cNvPr id="6" name="Text 4"/>
+          <p:cNvSpPr/>
+          <p:nvPr/>
+        </p:nvSpPr>
+        <p:spPr>
+          <a:xfrm>
+            <a:off x="1371600" y="1636776"/>
+            <a:ext cx="6492240" cy="566928"/>
+          </a:xfrm>
+          <a:prstGeom prst="rect">
+            <a:avLst/>
+          </a:prstGeom>
+          <a:noFill/>
+          <a:ln/>
+        </p:spPr>
+        <p:txBody>
+          <a:bodyPr wrap="square" lIns="0" tIns="0" rIns="0" bIns="0" rtlCol="0" anchor="ctr"/>
+          <a:lstStyle/>
+          <a:p>
+            <a:pPr indent="0" marL="0">
+              <a:buNone/>
+            </a:pPr>
+            <a:r>
+              <a:rPr lang="en-US" sz="1400" b="1" dirty="0">
+                <a:solidFill>
+                  <a:srgbClr val="FFFFFF"/>
+                </a:solidFill>
+                <a:latin typeface="Arial" pitchFamily="34" charset="0"/>
+                <a:ea typeface="Arial" pitchFamily="34" charset="-122"/>
+                <a:cs typeface="Arial" pitchFamily="34" charset="-120"/>
+              </a:rPr>
+              <a:t>↓  Negatief → belasting heffen  /  Positief → subsidie geven</a:t>
+            </a:r>
+            <a:endParaRPr lang="en-US" sz="1400" dirty="0"/>
+          </a:p>
+        </p:txBody>
+      </p:sp>
+      <p:sp>
+        <p:nvSpPr>
+          <p:cNvPr id="7" name="Shape 5"/>
+          <p:cNvSpPr/>
+          <p:nvPr/>
+        </p:nvSpPr>
+        <p:spPr>
+          <a:xfrm>
+            <a:off x="1188720" y="2313432"/>
+            <a:ext cx="6766560" cy="566928"/>
+          </a:xfrm>
+          <a:prstGeom prst="rect">
+            <a:avLst>
+              <a:gd name="adj" fmla="val 6452"/>
+            </a:avLst>
+          </a:prstGeom>
+          <a:solidFill>
+            <a:srgbClr val="F9F6F1"/>
+          </a:solidFill>
+          <a:ln/>
+          <a:effectLst>
+            <a:outerShdw sx="100000" sy="100000" kx="0" ky="0" algn="bl" rotWithShape="0" blurRad="76200" dist="25400" dir="8100000">
+              <a:srgbClr val="000000">
+                <a:alpha val="10000"/>
+              </a:srgbClr>
+            </a:outerShdw>
+          </a:effectLst>
+        </p:spPr>
+      </p:sp>
+      <p:sp>
+        <p:nvSpPr>
+          <p:cNvPr id="8" name="Text 6"/>
+          <p:cNvSpPr/>
+          <p:nvPr/>
+        </p:nvSpPr>
+        <p:spPr>
+          <a:xfrm>
+            <a:off x="1371600" y="2313432"/>
+            <a:ext cx="6492240" cy="566928"/>
+          </a:xfrm>
+          <a:prstGeom prst="rect">
+            <a:avLst/>
+          </a:prstGeom>
+          <a:noFill/>
+          <a:ln/>
+        </p:spPr>
+        <p:txBody>
+          <a:bodyPr wrap="square" lIns="0" tIns="0" rIns="0" bIns="0" rtlCol="0" anchor="ctr"/>
+          <a:lstStyle/>
+          <a:p>
+            <a:pPr indent="0" marL="0">
+              <a:buNone/>
+            </a:pPr>
+            <a:r>
+              <a:rPr lang="en-US" sz="1400" dirty="0">
+                <a:solidFill>
+                  <a:srgbClr val="2D3748"/>
+                </a:solidFill>
+                <a:latin typeface="Arial" pitchFamily="34" charset="0"/>
+                <a:ea typeface="Arial" pitchFamily="34" charset="-122"/>
+                <a:cs typeface="Arial" pitchFamily="34" charset="-120"/>
+              </a:rPr>
+              <a:t>↓  Prijs verandert: bij belasting omhoog, bij subsidie omlaag</a:t>
+            </a:r>
+            <a:endParaRPr lang="en-US" sz="1400" dirty="0"/>
+          </a:p>
+        </p:txBody>
+      </p:sp>
+      <p:sp>
+        <p:nvSpPr>
+          <p:cNvPr id="9" name="Shape 7"/>
+          <p:cNvSpPr/>
+          <p:nvPr/>
+        </p:nvSpPr>
+        <p:spPr>
+          <a:xfrm>
+            <a:off x="1188720" y="2990088"/>
+            <a:ext cx="6766560" cy="566928"/>
+          </a:xfrm>
+          <a:prstGeom prst="rect">
+            <a:avLst>
+              <a:gd name="adj" fmla="val 6452"/>
+            </a:avLst>
+          </a:prstGeom>
+          <a:solidFill>
+            <a:srgbClr val="F9F6F1"/>
+          </a:solidFill>
+          <a:ln/>
+          <a:effectLst>
+            <a:outerShdw sx="100000" sy="100000" kx="0" ky="0" algn="bl" rotWithShape="0" blurRad="76200" dist="25400" dir="8100000">
+              <a:srgbClr val="000000">
+                <a:alpha val="10000"/>
+              </a:srgbClr>
+            </a:outerShdw>
+          </a:effectLst>
+        </p:spPr>
+      </p:sp>
+      <p:sp>
+        <p:nvSpPr>
+          <p:cNvPr id="10" name="Text 8"/>
+          <p:cNvSpPr/>
+          <p:nvPr/>
+        </p:nvSpPr>
+        <p:spPr>
+          <a:xfrm>
+            <a:off x="1371600" y="2990088"/>
+            <a:ext cx="6492240" cy="566928"/>
+          </a:xfrm>
+          <a:prstGeom prst="rect">
+            <a:avLst/>
+          </a:prstGeom>
+          <a:noFill/>
+          <a:ln/>
+        </p:spPr>
+        <p:txBody>
+          <a:bodyPr wrap="square" lIns="0" tIns="0" rIns="0" bIns="0" rtlCol="0" anchor="ctr"/>
+          <a:lstStyle/>
+          <a:p>
+            <a:pPr indent="0" marL="0">
+              <a:buNone/>
+            </a:pPr>
+            <a:r>
+              <a:rPr lang="en-US" sz="1400" dirty="0">
+                <a:solidFill>
+                  <a:srgbClr val="2D3748"/>
+                </a:solidFill>
+                <a:latin typeface="Arial" pitchFamily="34" charset="0"/>
+                <a:ea typeface="Arial" pitchFamily="34" charset="-122"/>
+                <a:cs typeface="Arial" pitchFamily="34" charset="-120"/>
+              </a:rPr>
+              <a:t>↓  Hoeveelheid verschuift richting het maatschappelijke optimum</a:t>
+            </a:r>
+            <a:endParaRPr lang="en-US" sz="1400" dirty="0"/>
+          </a:p>
+        </p:txBody>
+      </p:sp>
+      <p:sp>
+        <p:nvSpPr>
+          <p:cNvPr id="11" name="Shape 9"/>
+          <p:cNvSpPr/>
+          <p:nvPr/>
+        </p:nvSpPr>
+        <p:spPr>
+          <a:xfrm>
+            <a:off x="1188720" y="3666744"/>
+            <a:ext cx="6766560" cy="566928"/>
+          </a:xfrm>
+          <a:prstGeom prst="rect">
+            <a:avLst>
+              <a:gd name="adj" fmla="val 6452"/>
+            </a:avLst>
+          </a:prstGeom>
+          <a:solidFill>
+            <a:srgbClr val="1E8449"/>
+          </a:solidFill>
+          <a:ln/>
+          <a:effectLst>
+            <a:outerShdw sx="100000" sy="100000" kx="0" ky="0" algn="bl" rotWithShape="0" blurRad="76200" dist="25400" dir="8100000">
+              <a:srgbClr val="000000">
+                <a:alpha val="10000"/>
+              </a:srgbClr>
+            </a:outerShdw>
+          </a:effectLst>
+        </p:spPr>
+      </p:sp>
+      <p:sp>
+        <p:nvSpPr>
+          <p:cNvPr id="12" name="Text 10"/>
+          <p:cNvSpPr/>
+          <p:nvPr/>
+        </p:nvSpPr>
+        <p:spPr>
+          <a:xfrm>
+            <a:off x="1371600" y="3666744"/>
+            <a:ext cx="6492240" cy="566928"/>
+          </a:xfrm>
+          <a:prstGeom prst="rect">
+            <a:avLst/>
+          </a:prstGeom>
+          <a:noFill/>
+          <a:ln/>
+        </p:spPr>
+        <p:txBody>
+          <a:bodyPr wrap="square" lIns="0" tIns="0" rIns="0" bIns="0" rtlCol="0" anchor="ctr"/>
+          <a:lstStyle/>
+          <a:p>
+            <a:pPr indent="0" marL="0">
+              <a:buNone/>
+            </a:pPr>
+            <a:r>
+              <a:rPr lang="en-US" sz="1400" b="1" dirty="0">
+                <a:solidFill>
+                  <a:srgbClr val="FFFFFF"/>
+                </a:solidFill>
+                <a:latin typeface="Arial" pitchFamily="34" charset="0"/>
+                <a:ea typeface="Arial" pitchFamily="34" charset="-122"/>
+                <a:cs typeface="Arial" pitchFamily="34" charset="-120"/>
+              </a:rPr>
+              <a:t>↓  Externe effect is geïnternaliseerd</a:t>
+            </a:r>
+            <a:endParaRPr lang="en-US" sz="1400" dirty="0"/>
+          </a:p>
+        </p:txBody>
+      </p:sp>
+    </p:spTree>
+  </p:cSld>
+  <p:clrMapOvr>
+    <a:masterClrMapping/>
+  </p:clrMapOvr>
+</p:sld>
+</file>
+
+<file path=ppt/slides/slide14.xml><?xml version="1.0" encoding="utf-8"?>
+<p:sld xmlns:a="http://schemas.openxmlformats.org/drawingml/2006/main" xmlns:r="http://schemas.openxmlformats.org/officeDocument/2006/relationships" xmlns:p="http://schemas.openxmlformats.org/presentationml/2006/main">
+  <p:cSld name="Slide 14">
+    <p:spTree>
+      <p:nvGrpSpPr>
+        <p:cNvPr id="1" name=""/>
+        <p:cNvGrpSpPr/>
+        <p:nvPr/>
+      </p:nvGrpSpPr>
+      <p:grpSpPr>
+        <a:xfrm>
+          <a:off x="0" y="0"/>
+          <a:ext cx="0" cy="0"/>
+          <a:chOff x="0" y="0"/>
+          <a:chExt cx="0" cy="0"/>
+        </a:xfrm>
+      </p:grpSpPr>
+      <p:sp>
+        <p:nvSpPr>
+          <p:cNvPr id="2" name="Text 0"/>
+          <p:cNvSpPr/>
+          <p:nvPr/>
+        </p:nvSpPr>
+        <p:spPr>
+          <a:xfrm>
+            <a:off x="457200" y="0"/>
+            <a:ext cx="8229600" cy="685800"/>
+          </a:xfrm>
+          <a:prstGeom prst="rect">
+            <a:avLst/>
+          </a:prstGeom>
+          <a:noFill/>
+          <a:ln/>
+        </p:spPr>
+        <p:txBody>
+          <a:bodyPr wrap="square" rtlCol="0" anchor="ctr"/>
+          <a:lstStyle/>
+          <a:p>
+            <a:pPr indent="0" marL="0">
+              <a:buNone/>
+            </a:pPr>
+            <a:r>
+              <a:rPr lang="en-US" sz="2400" b="1" dirty="0">
+                <a:solidFill>
+                  <a:srgbClr val="FFFFFF"/>
+                </a:solidFill>
+                <a:latin typeface="Arial" pitchFamily="34" charset="0"/>
+                <a:ea typeface="Arial" pitchFamily="34" charset="-122"/>
+                <a:cs typeface="Arial" pitchFamily="34" charset="-120"/>
+              </a:rPr>
+              <a:t>Internaliseren in de grafiek</a:t>
+            </a:r>
+            <a:endParaRPr lang="en-US" sz="2400" dirty="0"/>
+          </a:p>
+        </p:txBody>
+      </p:sp>
+      <p:pic>
+        <p:nvPicPr>
+          <p:cNvPr id="3" name="Image 0" descr="preencoded.png">    </p:cNvPr>
+          <p:cNvPicPr>
+            <a:picLocks noChangeAspect="1"/>
+          </p:cNvPicPr>
+          <p:nvPr/>
+        </p:nvPicPr>
+        <p:blipFill>
+          <a:blip r:embed="rId1"/>
+          <a:stretch>
+            <a:fillRect/>
+          </a:stretch>
+        </p:blipFill>
+        <p:spPr>
+          <a:xfrm>
+            <a:off x="685800" y="868680"/>
+            <a:ext cx="7772400" cy="3886200"/>
+          </a:xfrm>
+          <a:prstGeom prst="rect">
+            <a:avLst/>
+          </a:prstGeom>
+        </p:spPr>
+      </p:pic>
+    </p:spTree>
+  </p:cSld>
+  <p:clrMapOvr>
+    <a:masterClrMapping/>
+  </p:clrMapOvr>
+</p:sld>
+</file>
+
+<file path=ppt/slides/slide15.xml><?xml version="1.0" encoding="utf-8"?>
+<p:sld xmlns:a="http://schemas.openxmlformats.org/drawingml/2006/main" xmlns:r="http://schemas.openxmlformats.org/officeDocument/2006/relationships" xmlns:p="http://schemas.openxmlformats.org/presentationml/2006/main">
+  <p:cSld name="Slide 15">
+    <p:spTree>
+      <p:nvGrpSpPr>
+        <p:cNvPr id="1" name=""/>
+        <p:cNvGrpSpPr/>
+        <p:nvPr/>
+      </p:nvGrpSpPr>
+      <p:grpSpPr>
+        <a:xfrm>
+          <a:off x="0" y="0"/>
+          <a:ext cx="0" cy="0"/>
+          <a:chOff x="0" y="0"/>
+          <a:chExt cx="0" cy="0"/>
+        </a:xfrm>
+      </p:grpSpPr>
+      <p:sp>
+        <p:nvSpPr>
+          <p:cNvPr id="2" name="Text 0"/>
+          <p:cNvSpPr/>
+          <p:nvPr/>
+        </p:nvSpPr>
+        <p:spPr>
+          <a:xfrm>
+            <a:off x="457200" y="0"/>
+            <a:ext cx="8229600" cy="685800"/>
+          </a:xfrm>
+          <a:prstGeom prst="rect">
+            <a:avLst/>
+          </a:prstGeom>
+          <a:noFill/>
+          <a:ln/>
+        </p:spPr>
+        <p:txBody>
+          <a:bodyPr wrap="square" rtlCol="0" anchor="ctr"/>
+          <a:lstStyle/>
+          <a:p>
+            <a:pPr indent="0" marL="0">
+              <a:buNone/>
+            </a:pPr>
+            <a:r>
+              <a:rPr lang="en-US" sz="2400" b="1" dirty="0">
+                <a:solidFill>
+                  <a:srgbClr val="FFFFFF"/>
+                </a:solidFill>
+                <a:latin typeface="Arial" pitchFamily="34" charset="0"/>
+                <a:ea typeface="Arial" pitchFamily="34" charset="-122"/>
+                <a:cs typeface="Arial" pitchFamily="34" charset="-120"/>
+              </a:rPr>
+              <a:t>Instrumenten van de overheid</a:t>
+            </a:r>
+            <a:endParaRPr lang="en-US" sz="2400" dirty="0"/>
+          </a:p>
+        </p:txBody>
+      </p:sp>
+      <p:pic>
+        <p:nvPicPr>
+          <p:cNvPr id="3" name="Image 0" descr="preencoded.png">    </p:cNvPr>
+          <p:cNvPicPr>
+            <a:picLocks noChangeAspect="1"/>
+          </p:cNvPicPr>
+          <p:nvPr/>
+        </p:nvPicPr>
+        <p:blipFill>
+          <a:blip r:embed="rId1"/>
+          <a:stretch>
+            <a:fillRect/>
+          </a:stretch>
+        </p:blipFill>
+        <p:spPr>
+          <a:xfrm>
+            <a:off x="685800" y="868680"/>
+            <a:ext cx="7772400" cy="3886200"/>
+          </a:xfrm>
+          <a:prstGeom prst="rect">
+            <a:avLst/>
+          </a:prstGeom>
+        </p:spPr>
+      </p:pic>
+    </p:spTree>
+  </p:cSld>
+  <p:clrMapOvr>
+    <a:masterClrMapping/>
+  </p:clrMapOvr>
+</p:sld>
+</file>
+
+<file path=ppt/slides/slide16.xml><?xml version="1.0" encoding="utf-8"?>
+<p:sld xmlns:a="http://schemas.openxmlformats.org/drawingml/2006/main" xmlns:r="http://schemas.openxmlformats.org/officeDocument/2006/relationships" xmlns:p="http://schemas.openxmlformats.org/presentationml/2006/main">
+  <p:cSld name="Slide 16">
+    <p:spTree>
+      <p:nvGrpSpPr>
+        <p:cNvPr id="1" name=""/>
+        <p:cNvGrpSpPr/>
+        <p:nvPr/>
+      </p:nvGrpSpPr>
+      <p:grpSpPr>
+        <a:xfrm>
+          <a:off x="0" y="0"/>
+          <a:ext cx="0" cy="0"/>
+          <a:chOff x="0" y="0"/>
+          <a:chExt cx="0" cy="0"/>
+        </a:xfrm>
+      </p:grpSpPr>
+      <p:sp>
+        <p:nvSpPr>
+          <p:cNvPr id="2" name="Text 0"/>
+          <p:cNvSpPr/>
+          <p:nvPr/>
+        </p:nvSpPr>
+        <p:spPr>
+          <a:xfrm>
+            <a:off x="457200" y="0"/>
+            <a:ext cx="8229600" cy="685800"/>
+          </a:xfrm>
+          <a:prstGeom prst="rect">
+            <a:avLst/>
+          </a:prstGeom>
+          <a:noFill/>
+          <a:ln/>
+        </p:spPr>
+        <p:txBody>
+          <a:bodyPr wrap="square" rtlCol="0" anchor="ctr"/>
+          <a:lstStyle/>
+          <a:p>
+            <a:pPr indent="0" marL="0">
+              <a:buNone/>
+            </a:pPr>
+            <a:r>
+              <a:rPr lang="en-US" sz="2400" b="1" dirty="0">
+                <a:solidFill>
+                  <a:srgbClr val="FFFFFF"/>
+                </a:solidFill>
+                <a:latin typeface="Arial" pitchFamily="34" charset="0"/>
+                <a:ea typeface="Arial" pitchFamily="34" charset="-122"/>
+                <a:cs typeface="Arial" pitchFamily="34" charset="-120"/>
+              </a:rPr>
+              <a:t>Valkuilen</a:t>
+            </a:r>
+            <a:endParaRPr lang="en-US" sz="2400" dirty="0"/>
+          </a:p>
+        </p:txBody>
+      </p:sp>
+      <p:sp>
+        <p:nvSpPr>
+          <p:cNvPr id="3" name="Shape 1"/>
+          <p:cNvSpPr/>
+          <p:nvPr/>
+        </p:nvSpPr>
+        <p:spPr>
+          <a:xfrm>
+            <a:off x="548640" y="960120"/>
+            <a:ext cx="8046720" cy="1069848"/>
+          </a:xfrm>
+          <a:prstGeom prst="rect">
+            <a:avLst>
+              <a:gd name="adj" fmla="val 3419"/>
+            </a:avLst>
+          </a:prstGeom>
+          <a:solidFill>
+            <a:srgbClr val="FDE8E8"/>
+          </a:solidFill>
+          <a:ln/>
+        </p:spPr>
+      </p:sp>
+      <p:sp>
+        <p:nvSpPr>
+          <p:cNvPr id="4" name="Shape 2"/>
+          <p:cNvSpPr/>
+          <p:nvPr/>
+        </p:nvSpPr>
+        <p:spPr>
+          <a:xfrm>
+            <a:off x="548640" y="960120"/>
+            <a:ext cx="54864" cy="1069848"/>
+          </a:xfrm>
+          <a:prstGeom prst="rect">
+            <a:avLst/>
+          </a:prstGeom>
+          <a:solidFill>
+            <a:srgbClr val="D9534F"/>
+          </a:solidFill>
+          <a:ln/>
+        </p:spPr>
+      </p:sp>
+      <p:sp>
+        <p:nvSpPr>
+          <p:cNvPr id="5" name="Text 3"/>
+          <p:cNvSpPr/>
+          <p:nvPr/>
+        </p:nvSpPr>
+        <p:spPr>
+          <a:xfrm>
+            <a:off x="777240" y="1051560"/>
+            <a:ext cx="7680960" cy="365760"/>
+          </a:xfrm>
+          <a:prstGeom prst="rect">
+            <a:avLst/>
+          </a:prstGeom>
+          <a:noFill/>
+          <a:ln/>
+        </p:spPr>
+        <p:txBody>
+          <a:bodyPr wrap="square" lIns="0" tIns="0" rIns="0" bIns="0" rtlCol="0" anchor="t"/>
+          <a:lstStyle/>
+          <a:p>
+            <a:pPr indent="0" marL="0">
+              <a:buNone/>
+            </a:pPr>
+            <a:r>
+              <a:rPr lang="en-US" sz="1600" b="1" dirty="0">
+                <a:solidFill>
+                  <a:srgbClr val="922B21"/>
+                </a:solidFill>
+                <a:latin typeface="Arial" pitchFamily="34" charset="0"/>
+                <a:ea typeface="Arial" pitchFamily="34" charset="-122"/>
+                <a:cs typeface="Arial" pitchFamily="34" charset="-120"/>
+              </a:rPr>
+              <a:t>“Marktfalen = een bedrijf gaat failliet”</a:t>
+            </a:r>
+            <a:endParaRPr lang="en-US" sz="1600" dirty="0"/>
+          </a:p>
+        </p:txBody>
+      </p:sp>
+      <p:sp>
+        <p:nvSpPr>
+          <p:cNvPr id="6" name="Text 4"/>
+          <p:cNvSpPr/>
+          <p:nvPr/>
+        </p:nvSpPr>
+        <p:spPr>
+          <a:xfrm>
+            <a:off x="777240" y="1399032"/>
+            <a:ext cx="7680960" cy="566928"/>
+          </a:xfrm>
+          <a:prstGeom prst="rect">
+            <a:avLst/>
+          </a:prstGeom>
+          <a:noFill/>
+          <a:ln/>
+        </p:spPr>
+        <p:txBody>
+          <a:bodyPr wrap="square" lIns="0" tIns="0" rIns="0" bIns="0" rtlCol="0" anchor="t"/>
+          <a:lstStyle/>
+          <a:p>
+            <a:pPr indent="0" marL="0">
+              <a:lnSpc>
+                <a:spcPct val="120000"/>
+              </a:lnSpc>
+              <a:buNone/>
+            </a:pPr>
+            <a:r>
+              <a:rPr lang="en-US" sz="1300" dirty="0">
+                <a:solidFill>
+                  <a:srgbClr val="2D3748"/>
+                </a:solidFill>
+                <a:latin typeface="Arial" pitchFamily="34" charset="0"/>
+                <a:ea typeface="Arial" pitchFamily="34" charset="-122"/>
+                <a:cs typeface="Arial" pitchFamily="34" charset="-120"/>
+              </a:rPr>
+              <a:t>Onjuist. Marktfalen betekent dat de markt als gehéél niet het optimum levert, niet dat één bedrijf omvalt.</a:t>
+            </a:r>
+            <a:endParaRPr lang="en-US" sz="1300" dirty="0"/>
+          </a:p>
+        </p:txBody>
+      </p:sp>
+      <p:sp>
+        <p:nvSpPr>
+          <p:cNvPr id="7" name="Shape 5"/>
+          <p:cNvSpPr/>
+          <p:nvPr/>
+        </p:nvSpPr>
+        <p:spPr>
+          <a:xfrm>
+            <a:off x="548640" y="2157984"/>
+            <a:ext cx="8046720" cy="1069848"/>
+          </a:xfrm>
+          <a:prstGeom prst="rect">
+            <a:avLst>
+              <a:gd name="adj" fmla="val 3419"/>
+            </a:avLst>
+          </a:prstGeom>
+          <a:solidFill>
+            <a:srgbClr val="FDE8E8"/>
+          </a:solidFill>
+          <a:ln/>
+        </p:spPr>
+      </p:sp>
+      <p:sp>
+        <p:nvSpPr>
+          <p:cNvPr id="8" name="Shape 6"/>
+          <p:cNvSpPr/>
+          <p:nvPr/>
+        </p:nvSpPr>
+        <p:spPr>
+          <a:xfrm>
+            <a:off x="548640" y="2157984"/>
+            <a:ext cx="54864" cy="1069848"/>
+          </a:xfrm>
+          <a:prstGeom prst="rect">
+            <a:avLst/>
+          </a:prstGeom>
+          <a:solidFill>
+            <a:srgbClr val="D9534F"/>
+          </a:solidFill>
+          <a:ln/>
+        </p:spPr>
+      </p:sp>
+      <p:sp>
+        <p:nvSpPr>
+          <p:cNvPr id="9" name="Text 7"/>
+          <p:cNvSpPr/>
+          <p:nvPr/>
+        </p:nvSpPr>
+        <p:spPr>
+          <a:xfrm>
+            <a:off x="777240" y="2249424"/>
+            <a:ext cx="7680960" cy="365760"/>
+          </a:xfrm>
+          <a:prstGeom prst="rect">
+            <a:avLst/>
+          </a:prstGeom>
+          <a:noFill/>
+          <a:ln/>
+        </p:spPr>
+        <p:txBody>
+          <a:bodyPr wrap="square" lIns="0" tIns="0" rIns="0" bIns="0" rtlCol="0" anchor="t"/>
+          <a:lstStyle/>
+          <a:p>
+            <a:pPr indent="0" marL="0">
+              <a:buNone/>
+            </a:pPr>
+            <a:r>
+              <a:rPr lang="en-US" sz="1600" b="1" dirty="0">
+                <a:solidFill>
+                  <a:srgbClr val="922B21"/>
+                </a:solidFill>
+                <a:latin typeface="Arial" pitchFamily="34" charset="0"/>
+                <a:ea typeface="Arial" pitchFamily="34" charset="-122"/>
+                <a:cs typeface="Arial" pitchFamily="34" charset="-120"/>
+              </a:rPr>
+              <a:t>“Externe effecten zijn altijd negatief”</a:t>
+            </a:r>
+            <a:endParaRPr lang="en-US" sz="1600" dirty="0"/>
+          </a:p>
+        </p:txBody>
+      </p:sp>
+      <p:sp>
+        <p:nvSpPr>
+          <p:cNvPr id="10" name="Text 8"/>
+          <p:cNvSpPr/>
+          <p:nvPr/>
+        </p:nvSpPr>
+        <p:spPr>
+          <a:xfrm>
+            <a:off x="777240" y="2596896"/>
+            <a:ext cx="7680960" cy="566928"/>
+          </a:xfrm>
+          <a:prstGeom prst="rect">
+            <a:avLst/>
+          </a:prstGeom>
+          <a:noFill/>
+          <a:ln/>
+        </p:spPr>
+        <p:txBody>
+          <a:bodyPr wrap="square" lIns="0" tIns="0" rIns="0" bIns="0" rtlCol="0" anchor="t"/>
+          <a:lstStyle/>
+          <a:p>
+            <a:pPr indent="0" marL="0">
+              <a:lnSpc>
+                <a:spcPct val="120000"/>
+              </a:lnSpc>
+              <a:buNone/>
+            </a:pPr>
+            <a:r>
+              <a:rPr lang="en-US" sz="1300" dirty="0">
+                <a:solidFill>
+                  <a:srgbClr val="2D3748"/>
+                </a:solidFill>
+                <a:latin typeface="Arial" pitchFamily="34" charset="0"/>
+                <a:ea typeface="Arial" pitchFamily="34" charset="-122"/>
+                <a:cs typeface="Arial" pitchFamily="34" charset="-120"/>
+              </a:rPr>
+              <a:t>Onjuist. Er zijn ook positieve externe effecten (vaccinatie, onderwijs). Die leiden juist tot te weinig consumptie.</a:t>
+            </a:r>
+            <a:endParaRPr lang="en-US" sz="1300" dirty="0"/>
+          </a:p>
+        </p:txBody>
+      </p:sp>
+      <p:sp>
+        <p:nvSpPr>
+          <p:cNvPr id="11" name="Shape 9"/>
+          <p:cNvSpPr/>
+          <p:nvPr/>
+        </p:nvSpPr>
+        <p:spPr>
+          <a:xfrm>
+            <a:off x="548640" y="3355848"/>
+            <a:ext cx="8046720" cy="1069848"/>
+          </a:xfrm>
+          <a:prstGeom prst="rect">
+            <a:avLst>
+              <a:gd name="adj" fmla="val 3419"/>
+            </a:avLst>
+          </a:prstGeom>
+          <a:solidFill>
+            <a:srgbClr val="FDE8E8"/>
+          </a:solidFill>
+          <a:ln/>
+        </p:spPr>
+      </p:sp>
+      <p:sp>
+        <p:nvSpPr>
+          <p:cNvPr id="12" name="Shape 10"/>
+          <p:cNvSpPr/>
+          <p:nvPr/>
+        </p:nvSpPr>
+        <p:spPr>
+          <a:xfrm>
+            <a:off x="548640" y="3355848"/>
+            <a:ext cx="54864" cy="1069848"/>
+          </a:xfrm>
+          <a:prstGeom prst="rect">
+            <a:avLst/>
+          </a:prstGeom>
+          <a:solidFill>
+            <a:srgbClr val="D9534F"/>
+          </a:solidFill>
+          <a:ln/>
+        </p:spPr>
+      </p:sp>
+      <p:sp>
+        <p:nvSpPr>
+          <p:cNvPr id="13" name="Text 11"/>
+          <p:cNvSpPr/>
+          <p:nvPr/>
+        </p:nvSpPr>
+        <p:spPr>
+          <a:xfrm>
+            <a:off x="777240" y="3447288"/>
+            <a:ext cx="7680960" cy="365760"/>
+          </a:xfrm>
+          <a:prstGeom prst="rect">
+            <a:avLst/>
+          </a:prstGeom>
+          <a:noFill/>
+          <a:ln/>
+        </p:spPr>
+        <p:txBody>
+          <a:bodyPr wrap="square" lIns="0" tIns="0" rIns="0" bIns="0" rtlCol="0" anchor="t"/>
+          <a:lstStyle/>
+          <a:p>
+            <a:pPr indent="0" marL="0">
+              <a:buNone/>
+            </a:pPr>
+            <a:r>
+              <a:rPr lang="en-US" sz="1600" b="1" dirty="0">
+                <a:solidFill>
+                  <a:srgbClr val="922B21"/>
+                </a:solidFill>
+                <a:latin typeface="Arial" pitchFamily="34" charset="0"/>
+                <a:ea typeface="Arial" pitchFamily="34" charset="-122"/>
+                <a:cs typeface="Arial" pitchFamily="34" charset="-120"/>
+              </a:rPr>
+              <a:t>“Internaliseren = verbieden”</a:t>
+            </a:r>
+            <a:endParaRPr lang="en-US" sz="1600" dirty="0"/>
+          </a:p>
+        </p:txBody>
+      </p:sp>
+      <p:sp>
+        <p:nvSpPr>
+          <p:cNvPr id="14" name="Text 12"/>
+          <p:cNvSpPr/>
+          <p:nvPr/>
+        </p:nvSpPr>
+        <p:spPr>
+          <a:xfrm>
+            <a:off x="777240" y="3794760"/>
+            <a:ext cx="7680960" cy="566928"/>
+          </a:xfrm>
+          <a:prstGeom prst="rect">
+            <a:avLst/>
+          </a:prstGeom>
+          <a:noFill/>
+          <a:ln/>
+        </p:spPr>
+        <p:txBody>
+          <a:bodyPr wrap="square" lIns="0" tIns="0" rIns="0" bIns="0" rtlCol="0" anchor="t"/>
+          <a:lstStyle/>
+          <a:p>
+            <a:pPr indent="0" marL="0">
+              <a:lnSpc>
+                <a:spcPct val="120000"/>
+              </a:lnSpc>
+              <a:buNone/>
+            </a:pPr>
+            <a:r>
+              <a:rPr lang="en-US" sz="1300" dirty="0">
+                <a:solidFill>
+                  <a:srgbClr val="2D3748"/>
+                </a:solidFill>
+                <a:latin typeface="Arial" pitchFamily="34" charset="0"/>
+                <a:ea typeface="Arial" pitchFamily="34" charset="-122"/>
+                <a:cs typeface="Arial" pitchFamily="34" charset="-120"/>
+              </a:rPr>
+              <a:t>Onjuist. Internaliseren = de externe kosten of baten in de prijs verwerken via belasting of subsidie. Het product wordt niet verboden.</a:t>
+            </a:r>
+            <a:endParaRPr lang="en-US" sz="1300" dirty="0"/>
+          </a:p>
+        </p:txBody>
+      </p:sp>
+    </p:spTree>
+  </p:cSld>
+  <p:clrMapOvr>
+    <a:masterClrMapping/>
+  </p:clrMapOvr>
+</p:sld>
+</file>
+
+<file path=ppt/slides/slide17.xml><?xml version="1.0" encoding="utf-8"?>
+<p:sld xmlns:a="http://schemas.openxmlformats.org/drawingml/2006/main" xmlns:r="http://schemas.openxmlformats.org/officeDocument/2006/relationships" xmlns:p="http://schemas.openxmlformats.org/presentationml/2006/main">
+  <p:cSld name="Slide 17">
+    <p:spTree>
+      <p:nvGrpSpPr>
+        <p:cNvPr id="1" name=""/>
+        <p:cNvGrpSpPr/>
+        <p:nvPr/>
+      </p:nvGrpSpPr>
+      <p:grpSpPr>
+        <a:xfrm>
+          <a:off x="0" y="0"/>
+          <a:ext cx="0" cy="0"/>
+          <a:chOff x="0" y="0"/>
+          <a:chExt cx="0" cy="0"/>
+        </a:xfrm>
+      </p:grpSpPr>
+      <p:sp>
+        <p:nvSpPr>
+          <p:cNvPr id="2" name="Text 0"/>
+          <p:cNvSpPr/>
+          <p:nvPr/>
+        </p:nvSpPr>
+        <p:spPr>
+          <a:xfrm>
+            <a:off x="640080" y="320040"/>
+            <a:ext cx="7863840" cy="548640"/>
+          </a:xfrm>
+          <a:prstGeom prst="rect">
+            <a:avLst/>
+          </a:prstGeom>
+          <a:noFill/>
+          <a:ln/>
+        </p:spPr>
+        <p:txBody>
+          <a:bodyPr wrap="square" rtlCol="0" anchor="ctr"/>
+          <a:lstStyle/>
+          <a:p>
+            <a:pPr indent="0" marL="0">
+              <a:buNone/>
+            </a:pPr>
+            <a:r>
+              <a:rPr lang="en-US" sz="3000" b="1" dirty="0">
+                <a:solidFill>
+                  <a:srgbClr val="FFFFFF"/>
+                </a:solidFill>
+                <a:latin typeface="Arial" pitchFamily="34" charset="0"/>
+                <a:ea typeface="Arial" pitchFamily="34" charset="-122"/>
+                <a:cs typeface="Arial" pitchFamily="34" charset="-120"/>
+              </a:rPr>
+              <a:t>Samenvatting</a:t>
+            </a:r>
+            <a:endParaRPr lang="en-US" sz="3000" dirty="0"/>
+          </a:p>
+        </p:txBody>
+      </p:sp>
+      <p:sp>
+        <p:nvSpPr>
+          <p:cNvPr id="3" name="Text 1"/>
+          <p:cNvSpPr/>
+          <p:nvPr/>
+        </p:nvSpPr>
+        <p:spPr>
+          <a:xfrm>
+            <a:off x="640080" y="868680"/>
+            <a:ext cx="7863840" cy="365760"/>
+          </a:xfrm>
+          <a:prstGeom prst="rect">
+            <a:avLst/>
+          </a:prstGeom>
+          <a:noFill/>
+          <a:ln/>
+        </p:spPr>
+        <p:txBody>
+          <a:bodyPr wrap="square" rtlCol="0" anchor="ctr"/>
+          <a:lstStyle/>
+          <a:p>
+            <a:pPr indent="0" marL="0">
+              <a:buNone/>
+            </a:pPr>
+            <a:r>
               <a:rPr lang="en-US" sz="1400" i="1" dirty="0">
                 <a:solidFill>
                   <a:srgbClr val="718096"/>
@@ -2009,7 +5988,7 @@
                 <a:ea typeface="Arial" pitchFamily="34" charset="-122"/>
                 <a:cs typeface="Arial" pitchFamily="34" charset="-120"/>
               </a:rPr>
-              <a:t>Beheers je dit voordat je gaat oefenen?</a:t>
+              <a:t>Check: beheers je dit voordat je gaat oefenen?</a:t>
             </a:r>
             <a:endParaRPr lang="en-US" sz="1400" dirty="0"/>
           </a:p>
@@ -2023,8 +6002,8 @@
         </p:nvSpPr>
         <p:spPr>
           <a:xfrm>
-            <a:off x="640080" y="1554480"/>
-            <a:ext cx="7863840" cy="2926080"/>
+            <a:off x="640080" y="1417320"/>
+            <a:ext cx="7863840" cy="3200400"/>
           </a:xfrm>
           <a:prstGeom prst="rect">
             <a:avLst/>
@@ -2033,18 +6012,18 @@
           <a:ln/>
         </p:spPr>
         <p:txBody>
-          <a:bodyPr wrap="square" rtlCol="0" anchor="t"/>
-          <a:lstStyle/>
-          <a:p>
-            <a:pPr algn="l" marL="342900" indent="-342900">
+          <a:bodyPr wrap="square" rtlCol="0" anchor="ctr"/>
+          <a:lstStyle/>
+          <a:p>
+            <a:pPr marL="342900" indent="-342900">
               <a:lnSpc>
-                <a:spcPct val="160000"/>
+                <a:spcPct val="125000"/>
               </a:lnSpc>
               <a:spcAft>
-                <a:spcPts val="600"/>
+                <a:spcPts val="800"/>
               </a:spcAft>
               <a:buSzPct val="100000"/>
-              <a:buChar char="•"/>
+              <a:buChar char="■"/>
             </a:pPr>
             <a:r>
               <a:rPr lang="en-US" sz="1500" dirty="0">
@@ -2055,19 +6034,20 @@
                 <a:ea typeface="Arial" pitchFamily="34" charset="-122"/>
                 <a:cs typeface="Arial" pitchFamily="34" charset="-120"/>
               </a:rPr>
-              <a:t>Marktfalen = de markt levert geen optimaal resultaat</a:t>
-            </a:r>
-          </a:p>
-          <a:p>
-            <a:pPr algn="l" marL="342900" indent="-342900">
+              <a:t>Marktfalen = de markt levert geen optimaal resultaat (monopolie / externe effecten / collectieve goederen)</a:t>
+            </a:r>
+            <a:endParaRPr lang="en-US" sz="1500" dirty="0"/>
+          </a:p>
+          <a:p>
+            <a:pPr marL="342900" indent="-342900">
               <a:lnSpc>
-                <a:spcPct val="160000"/>
+                <a:spcPct val="125000"/>
               </a:lnSpc>
               <a:spcAft>
-                <a:spcPts val="600"/>
+                <a:spcPts val="800"/>
               </a:spcAft>
               <a:buSzPct val="100000"/>
-              <a:buChar char="•"/>
+              <a:buChar char="■"/>
             </a:pPr>
             <a:r>
               <a:rPr lang="en-US" sz="1500" dirty="0">
@@ -2080,17 +6060,18 @@
               </a:rPr>
               <a:t>Natuurlijk monopolie: dalende GTK → één aanbieder efficiënter</a:t>
             </a:r>
-          </a:p>
-          <a:p>
-            <a:pPr algn="l" marL="342900" indent="-342900">
+            <a:endParaRPr lang="en-US" sz="1500" dirty="0"/>
+          </a:p>
+          <a:p>
+            <a:pPr marL="342900" indent="-342900">
               <a:lnSpc>
-                <a:spcPct val="160000"/>
+                <a:spcPct val="125000"/>
               </a:lnSpc>
               <a:spcAft>
-                <a:spcPts val="600"/>
+                <a:spcPts val="800"/>
               </a:spcAft>
               <a:buSzPct val="100000"/>
-              <a:buChar char="•"/>
+              <a:buChar char="■"/>
             </a:pPr>
             <a:r>
               <a:rPr lang="en-US" sz="1500" dirty="0">
@@ -2101,19 +6082,20 @@
                 <a:ea typeface="Arial" pitchFamily="34" charset="-122"/>
                 <a:cs typeface="Arial" pitchFamily="34" charset="-120"/>
               </a:rPr>
-              <a:t>Negatief extern effect: kosten buiten de prijs → te veel productie</a:t>
-            </a:r>
-          </a:p>
-          <a:p>
-            <a:pPr algn="l" marL="342900" indent="-342900">
+              <a:t>Machtspositie: marktaandeel ≥ 35 % → Mededingingswet, toezicht door ACM / EC</a:t>
+            </a:r>
+            <a:endParaRPr lang="en-US" sz="1500" dirty="0"/>
+          </a:p>
+          <a:p>
+            <a:pPr marL="342900" indent="-342900">
               <a:lnSpc>
-                <a:spcPct val="160000"/>
+                <a:spcPct val="125000"/>
               </a:lnSpc>
               <a:spcAft>
-                <a:spcPts val="600"/>
+                <a:spcPts val="800"/>
               </a:spcAft>
               <a:buSzPct val="100000"/>
-              <a:buChar char="•"/>
+              <a:buChar char="■"/>
             </a:pPr>
             <a:r>
               <a:rPr lang="en-US" sz="1500" dirty="0">
@@ -2124,19 +6106,20 @@
                 <a:ea typeface="Arial" pitchFamily="34" charset="-122"/>
                 <a:cs typeface="Arial" pitchFamily="34" charset="-120"/>
               </a:rPr>
-              <a:t>Positief extern effect: baten buiten de prijs → te weinig consumptie</a:t>
-            </a:r>
-          </a:p>
-          <a:p>
-            <a:pPr algn="l" marL="342900" indent="-342900">
+              <a:t>Negatief extern effect: kosten buiten de prijs → prijs te laag → te veel productie</a:t>
+            </a:r>
+            <a:endParaRPr lang="en-US" sz="1500" dirty="0"/>
+          </a:p>
+          <a:p>
+            <a:pPr marL="342900" indent="-342900">
               <a:lnSpc>
-                <a:spcPct val="160000"/>
+                <a:spcPct val="125000"/>
               </a:lnSpc>
               <a:spcAft>
-                <a:spcPts val="600"/>
+                <a:spcPts val="800"/>
               </a:spcAft>
               <a:buSzPct val="100000"/>
-              <a:buChar char="•"/>
+              <a:buChar char="■"/>
             </a:pPr>
             <a:r>
               <a:rPr lang="en-US" sz="1500" dirty="0">
@@ -2147,8 +6130,33 @@
                 <a:ea typeface="Arial" pitchFamily="34" charset="-122"/>
                 <a:cs typeface="Arial" pitchFamily="34" charset="-120"/>
               </a:rPr>
-              <a:t>Overheid corrigeert via belasting, subsidie, regulering of prijsbeleid</a:t>
-            </a:r>
+              <a:t>Positief extern effect: baten buiten de prijs → prijs te hoog → te weinig consumptie</a:t>
+            </a:r>
+            <a:endParaRPr lang="en-US" sz="1500" dirty="0"/>
+          </a:p>
+          <a:p>
+            <a:pPr marL="342900" indent="-342900">
+              <a:lnSpc>
+                <a:spcPct val="125000"/>
+              </a:lnSpc>
+              <a:spcAft>
+                <a:spcPts val="800"/>
+              </a:spcAft>
+              <a:buSzPct val="100000"/>
+              <a:buChar char="■"/>
+            </a:pPr>
+            <a:r>
+              <a:rPr lang="en-US" sz="1500" dirty="0">
+                <a:solidFill>
+                  <a:srgbClr val="FFFFFF"/>
+                </a:solidFill>
+                <a:latin typeface="Arial" pitchFamily="34" charset="0"/>
+                <a:ea typeface="Arial" pitchFamily="34" charset="-122"/>
+                <a:cs typeface="Arial" pitchFamily="34" charset="-120"/>
+              </a:rPr>
+              <a:t>Overheid internaliseert met belasting (negatief) of subsidie (positief)</a:t>
+            </a:r>
+            <a:endParaRPr lang="en-US" sz="1500" dirty="0"/>
           </a:p>
         </p:txBody>
       </p:sp>
@@ -2224,8 +6232,8 @@
         </p:nvSpPr>
         <p:spPr>
           <a:xfrm>
-            <a:off x="457200" y="914400"/>
-            <a:ext cx="8229600" cy="365760"/>
+            <a:off x="640080" y="1051560"/>
+            <a:ext cx="7863840" cy="3291840"/>
           </a:xfrm>
           <a:prstGeom prst="rect">
             <a:avLst/>
@@ -2237,57 +6245,18 @@
           <a:bodyPr wrap="square" rtlCol="0" anchor="ctr"/>
           <a:lstStyle/>
           <a:p>
-            <a:pPr indent="0" marL="0">
-              <a:buNone/>
-            </a:pPr>
-            <a:r>
-              <a:rPr lang="en-US" sz="2000" b="1" dirty="0">
-                <a:solidFill>
-                  <a:srgbClr val="1A5276"/>
-                </a:solidFill>
-                <a:latin typeface="Arial" pitchFamily="34" charset="0"/>
-                <a:ea typeface="Arial" pitchFamily="34" charset="-122"/>
-                <a:cs typeface="Arial" pitchFamily="34" charset="-120"/>
-              </a:rPr>
-              <a:t>Leerdoelen</a:t>
-            </a:r>
-            <a:endParaRPr lang="en-US" sz="2000" dirty="0"/>
-          </a:p>
-        </p:txBody>
-      </p:sp>
-      <p:sp>
-        <p:nvSpPr>
-          <p:cNvPr id="4" name="Text 2"/>
-          <p:cNvSpPr/>
-          <p:nvPr/>
-        </p:nvSpPr>
-        <p:spPr>
-          <a:xfrm>
-            <a:off x="640080" y="1371600"/>
-            <a:ext cx="7863840" cy="2926080"/>
-          </a:xfrm>
-          <a:prstGeom prst="rect">
-            <a:avLst/>
-          </a:prstGeom>
-          <a:noFill/>
-          <a:ln/>
-        </p:spPr>
-        <p:txBody>
-          <a:bodyPr wrap="square" rtlCol="0" anchor="t"/>
-          <a:lstStyle/>
-          <a:p>
-            <a:pPr algn="l" marL="342900" indent="-342900">
+            <a:pPr marL="342900" indent="-342900">
               <a:lnSpc>
-                <a:spcPct val="150000"/>
+                <a:spcPct val="125000"/>
               </a:lnSpc>
               <a:spcAft>
-                <a:spcPts val="800"/>
+                <a:spcPts val="1000"/>
               </a:spcAft>
               <a:buSzPct val="100000"/>
-              <a:buChar char="•"/>
-            </a:pPr>
-            <a:r>
-              <a:rPr lang="en-US" sz="1500" dirty="0">
+              <a:buChar char="■"/>
+            </a:pPr>
+            <a:r>
+              <a:rPr lang="en-US" sz="1700" dirty="0">
                 <a:solidFill>
                   <a:srgbClr val="2D3748"/>
                 </a:solidFill>
@@ -2295,22 +6264,23 @@
                 <a:ea typeface="Arial" pitchFamily="34" charset="-122"/>
                 <a:cs typeface="Arial" pitchFamily="34" charset="-120"/>
               </a:rPr>
-              <a:t>Uitleggen wanneer er sprake is van marktfalen</a:t>
-            </a:r>
-          </a:p>
-          <a:p>
-            <a:pPr algn="l" marL="342900" indent="-342900">
+              <a:t>Herkennen wanneer er sprake is van marktfalen</a:t>
+            </a:r>
+            <a:endParaRPr lang="en-US" sz="1700" dirty="0"/>
+          </a:p>
+          <a:p>
+            <a:pPr marL="342900" indent="-342900">
               <a:lnSpc>
-                <a:spcPct val="150000"/>
+                <a:spcPct val="125000"/>
               </a:lnSpc>
               <a:spcAft>
-                <a:spcPts val="800"/>
+                <a:spcPts val="1000"/>
               </a:spcAft>
               <a:buSzPct val="100000"/>
-              <a:buChar char="•"/>
-            </a:pPr>
-            <a:r>
-              <a:rPr lang="en-US" sz="1500" dirty="0">
+              <a:buChar char="■"/>
+            </a:pPr>
+            <a:r>
+              <a:rPr lang="en-US" sz="1700" dirty="0">
                 <a:solidFill>
                   <a:srgbClr val="2D3748"/>
                 </a:solidFill>
@@ -2318,22 +6288,23 @@
                 <a:ea typeface="Arial" pitchFamily="34" charset="-122"/>
                 <a:cs typeface="Arial" pitchFamily="34" charset="-120"/>
               </a:rPr>
-              <a:t>Herkennen van een natuurlijk monopolie</a:t>
-            </a:r>
-          </a:p>
-          <a:p>
-            <a:pPr algn="l" marL="342900" indent="-342900">
+              <a:t>Een natuurlijk monopolie uitleggen via dalende GTK</a:t>
+            </a:r>
+            <a:endParaRPr lang="en-US" sz="1700" dirty="0"/>
+          </a:p>
+          <a:p>
+            <a:pPr marL="342900" indent="-342900">
               <a:lnSpc>
-                <a:spcPct val="150000"/>
+                <a:spcPct val="125000"/>
               </a:lnSpc>
               <a:spcAft>
-                <a:spcPts val="800"/>
+                <a:spcPts val="1000"/>
               </a:spcAft>
               <a:buSzPct val="100000"/>
-              <a:buChar char="•"/>
-            </a:pPr>
-            <a:r>
-              <a:rPr lang="en-US" sz="1500" dirty="0">
+              <a:buChar char="■"/>
+            </a:pPr>
+            <a:r>
+              <a:rPr lang="en-US" sz="1700" dirty="0">
                 <a:solidFill>
                   <a:srgbClr val="2D3748"/>
                 </a:solidFill>
@@ -2341,22 +6312,23 @@
                 <a:ea typeface="Arial" pitchFamily="34" charset="-122"/>
                 <a:cs typeface="Arial" pitchFamily="34" charset="-120"/>
               </a:rPr>
-              <a:t>Uitleggen wat negatieve externe effecten zijn</a:t>
-            </a:r>
-          </a:p>
-          <a:p>
-            <a:pPr algn="l" marL="342900" indent="-342900">
+              <a:t>Een economische machtspositie bepalen (drempel 35 %)</a:t>
+            </a:r>
+            <a:endParaRPr lang="en-US" sz="1700" dirty="0"/>
+          </a:p>
+          <a:p>
+            <a:pPr marL="342900" indent="-342900">
               <a:lnSpc>
-                <a:spcPct val="150000"/>
+                <a:spcPct val="125000"/>
               </a:lnSpc>
               <a:spcAft>
-                <a:spcPts val="800"/>
+                <a:spcPts val="1000"/>
               </a:spcAft>
               <a:buSzPct val="100000"/>
-              <a:buChar char="•"/>
-            </a:pPr>
-            <a:r>
-              <a:rPr lang="en-US" sz="1500" dirty="0">
+              <a:buChar char="■"/>
+            </a:pPr>
+            <a:r>
+              <a:rPr lang="en-US" sz="1700" dirty="0">
                 <a:solidFill>
                   <a:srgbClr val="2D3748"/>
                 </a:solidFill>
@@ -2364,22 +6336,23 @@
                 <a:ea typeface="Arial" pitchFamily="34" charset="-122"/>
                 <a:cs typeface="Arial" pitchFamily="34" charset="-120"/>
               </a:rPr>
-              <a:t>Uitleggen wat positieve externe effecten zijn</a:t>
-            </a:r>
-          </a:p>
-          <a:p>
-            <a:pPr algn="l" marL="342900" indent="-342900">
+              <a:t>Negatieve externe effecten herkennen en in een grafiek aanwijzen</a:t>
+            </a:r>
+            <a:endParaRPr lang="en-US" sz="1700" dirty="0"/>
+          </a:p>
+          <a:p>
+            <a:pPr marL="342900" indent="-342900">
               <a:lnSpc>
-                <a:spcPct val="150000"/>
+                <a:spcPct val="125000"/>
               </a:lnSpc>
               <a:spcAft>
-                <a:spcPts val="800"/>
+                <a:spcPts val="1000"/>
               </a:spcAft>
               <a:buSzPct val="100000"/>
-              <a:buChar char="•"/>
-            </a:pPr>
-            <a:r>
-              <a:rPr lang="en-US" sz="1500" dirty="0">
+              <a:buChar char="■"/>
+            </a:pPr>
+            <a:r>
+              <a:rPr lang="en-US" sz="1700" dirty="0">
                 <a:solidFill>
                   <a:srgbClr val="2D3748"/>
                 </a:solidFill>
@@ -2387,8 +6360,33 @@
                 <a:ea typeface="Arial" pitchFamily="34" charset="-122"/>
                 <a:cs typeface="Arial" pitchFamily="34" charset="-120"/>
               </a:rPr>
-              <a:t>Beschrijven hoe de overheid kan ingrijpen</a:t>
-            </a:r>
+              <a:t>Positieve externe effecten herkennen en in een grafiek aanwijzen</a:t>
+            </a:r>
+            <a:endParaRPr lang="en-US" sz="1700" dirty="0"/>
+          </a:p>
+          <a:p>
+            <a:pPr marL="342900" indent="-342900">
+              <a:lnSpc>
+                <a:spcPct val="125000"/>
+              </a:lnSpc>
+              <a:spcAft>
+                <a:spcPts val="1000"/>
+              </a:spcAft>
+              <a:buSzPct val="100000"/>
+              <a:buChar char="■"/>
+            </a:pPr>
+            <a:r>
+              <a:rPr lang="en-US" sz="1700" dirty="0">
+                <a:solidFill>
+                  <a:srgbClr val="2D3748"/>
+                </a:solidFill>
+                <a:latin typeface="Arial" pitchFamily="34" charset="0"/>
+                <a:ea typeface="Arial" pitchFamily="34" charset="-122"/>
+                <a:cs typeface="Arial" pitchFamily="34" charset="-120"/>
+              </a:rPr>
+              <a:t>Internaliseren uitleggen: belasting of subsidie</a:t>
+            </a:r>
+            <a:endParaRPr lang="en-US" sz="1700" dirty="0"/>
           </a:p>
         </p:txBody>
       </p:sp>
@@ -2450,526 +6448,36 @@
                 <a:ea typeface="Arial" pitchFamily="34" charset="-122"/>
                 <a:cs typeface="Arial" pitchFamily="34" charset="-120"/>
               </a:rPr>
-              <a:t>Marktfalen</a:t>
+              <a:t>Overzicht: drie oorzaken, drie remedies</a:t>
             </a:r>
             <a:endParaRPr lang="en-US" sz="2400" dirty="0"/>
           </a:p>
         </p:txBody>
       </p:sp>
-      <p:sp>
-        <p:nvSpPr>
-          <p:cNvPr id="3" name="Shape 1"/>
-          <p:cNvSpPr/>
-          <p:nvPr/>
-        </p:nvSpPr>
-        <p:spPr>
-          <a:xfrm>
-            <a:off x="457200" y="1005840"/>
-            <a:ext cx="3931920" cy="3291840"/>
-          </a:xfrm>
-          <a:prstGeom prst="rect">
-            <a:avLst>
-              <a:gd name="adj" fmla="val 1389"/>
-            </a:avLst>
-          </a:prstGeom>
-          <a:solidFill>
-            <a:srgbClr val="F9F6F1"/>
-          </a:solidFill>
-          <a:ln/>
-          <a:effectLst>
-            <a:outerShdw sx="100000" sy="100000" kx="0" ky="0" algn="bl" rotWithShape="0" blurRad="76200" dist="25400" dir="8100000">
-              <a:srgbClr val="000000">
-                <a:alpha val="10000"/>
-              </a:srgbClr>
-            </a:outerShdw>
-          </a:effectLst>
-        </p:spPr>
-        <p:txBody>
-          <a:bodyPr/>
-          <a:p/>
-        </p:txBody>
-      </p:sp>
-      <p:sp>
-        <p:nvSpPr>
-          <p:cNvPr id="4" name="Shape 2"/>
-          <p:cNvSpPr/>
-          <p:nvPr/>
-        </p:nvSpPr>
-        <p:spPr>
-          <a:xfrm>
-            <a:off x="457200" y="1005840"/>
-            <a:ext cx="54864" cy="3291840"/>
-          </a:xfrm>
-          <a:prstGeom prst="rect">
-            <a:avLst/>
-          </a:prstGeom>
-          <a:solidFill>
-            <a:srgbClr val="1A5276"/>
-          </a:solidFill>
-          <a:ln/>
-        </p:spPr>
-        <p:txBody>
-          <a:bodyPr/>
-          <a:p/>
-        </p:txBody>
-      </p:sp>
-      <p:sp>
-        <p:nvSpPr>
-          <p:cNvPr id="5" name="Text 3"/>
-          <p:cNvSpPr/>
-          <p:nvPr/>
-        </p:nvSpPr>
-        <p:spPr>
-          <a:xfrm>
-            <a:off x="640080" y="1143000"/>
-            <a:ext cx="3611880" cy="365760"/>
-          </a:xfrm>
-          <a:prstGeom prst="rect">
-            <a:avLst/>
-          </a:prstGeom>
-          <a:noFill/>
-          <a:ln/>
-        </p:spPr>
-        <p:txBody>
-          <a:bodyPr wrap="square" rtlCol="0" anchor="t"/>
-          <a:lstStyle/>
-          <a:p>
-            <a:pPr indent="0" marL="0">
-              <a:buNone/>
-            </a:pPr>
-            <a:r>
-              <a:rPr lang="en-US" sz="2000" b="1" dirty="0">
-                <a:solidFill>
-                  <a:srgbClr val="1A5276"/>
-                </a:solidFill>
-                <a:latin typeface="Arial" pitchFamily="34" charset="0"/>
-                <a:ea typeface="Arial" pitchFamily="34" charset="-122"/>
-                <a:cs typeface="Arial" pitchFamily="34" charset="-120"/>
-              </a:rPr>
-              <a:t>Wat is marktfalen?</a:t>
-            </a:r>
-            <a:endParaRPr lang="en-US" sz="2000" dirty="0"/>
-          </a:p>
-        </p:txBody>
-      </p:sp>
-      <p:sp>
-        <p:nvSpPr>
-          <p:cNvPr id="6" name="Text 4"/>
-          <p:cNvSpPr/>
-          <p:nvPr/>
-        </p:nvSpPr>
-        <p:spPr>
-          <a:xfrm>
-            <a:off x="640080" y="1554480"/>
-            <a:ext cx="3611880" cy="2606040"/>
-          </a:xfrm>
-          <a:prstGeom prst="rect">
-            <a:avLst/>
-          </a:prstGeom>
-          <a:noFill/>
-          <a:ln/>
-        </p:spPr>
-        <p:txBody>
-          <a:bodyPr wrap="square" rtlCol="0" anchor="t"/>
-          <a:lstStyle/>
-          <a:p>
-            <a:pPr algn="l" indent="0" marL="0">
-              <a:lnSpc>
-                <a:spcPct val="115000"/>
-              </a:lnSpc>
-              <a:buNone/>
-            </a:pPr>
-            <a:r>
-              <a:rPr lang="en-US" sz="1400" dirty="0">
-                <a:solidFill>
-                  <a:srgbClr val="2D3748"/>
-                </a:solidFill>
-                <a:latin typeface="Arial" pitchFamily="34" charset="0"/>
-                <a:ea typeface="Arial" pitchFamily="34" charset="-122"/>
-                <a:cs typeface="Arial" pitchFamily="34" charset="-120"/>
-              </a:rPr>
-              <a:t>De markt zorgt niet altijd voor het beste resultaat. Drie vormen:
-</a:t>
-            </a:r>
-            <a:pPr algn="l" marL="342900" indent="-342900">
-              <a:lnSpc>
-                <a:spcPct val="115000"/>
-              </a:lnSpc>
-              <a:buSzPct val="100000"/>
-              <a:buChar char="•"/>
-            </a:pPr>
-            <a:r>
-              <a:rPr lang="en-US" sz="1400" b="1" dirty="0">
-                <a:solidFill>
-                  <a:srgbClr val="2D3748"/>
-                </a:solidFill>
-                <a:latin typeface="Arial" pitchFamily="34" charset="0"/>
-                <a:ea typeface="Arial" pitchFamily="34" charset="-122"/>
-                <a:cs typeface="Arial" pitchFamily="34" charset="-120"/>
-              </a:rPr>
-              <a:t>Te weinig concurrentie</a:t>
-            </a:r>
-            <a:pPr algn="l" indent="0" marL="0">
-              <a:lnSpc>
-                <a:spcPct val="115000"/>
-              </a:lnSpc>
-              <a:buNone/>
-            </a:pPr>
-            <a:r>
-              <a:rPr lang="en-US" sz="1300" dirty="0">
-                <a:solidFill>
-                  <a:srgbClr val="718096"/>
-                </a:solidFill>
-                <a:latin typeface="Arial" pitchFamily="34" charset="0"/>
-                <a:ea typeface="Arial" pitchFamily="34" charset="-122"/>
-                <a:cs typeface="Arial" pitchFamily="34" charset="-120"/>
-              </a:rPr>
-              <a:t>
-(monopolie)
-</a:t>
-            </a:r>
-            <a:pPr algn="l" marL="342900" indent="-342900">
-              <a:lnSpc>
-                <a:spcPct val="115000"/>
-              </a:lnSpc>
-              <a:buSzPct val="100000"/>
-              <a:buChar char="•"/>
-            </a:pPr>
-            <a:r>
-              <a:rPr lang="en-US" sz="1400" b="1" dirty="0">
-                <a:solidFill>
-                  <a:srgbClr val="2D3748"/>
-                </a:solidFill>
-                <a:latin typeface="Arial" pitchFamily="34" charset="0"/>
-                <a:ea typeface="Arial" pitchFamily="34" charset="-122"/>
-                <a:cs typeface="Arial" pitchFamily="34" charset="-120"/>
-              </a:rPr>
-              <a:t>Kosten/baten buiten de markt</a:t>
-            </a:r>
-            <a:pPr algn="l" indent="0" marL="0">
-              <a:lnSpc>
-                <a:spcPct val="115000"/>
-              </a:lnSpc>
-              <a:buNone/>
-            </a:pPr>
-            <a:r>
-              <a:rPr lang="en-US" sz="1300" dirty="0">
-                <a:solidFill>
-                  <a:srgbClr val="718096"/>
-                </a:solidFill>
-                <a:latin typeface="Arial" pitchFamily="34" charset="0"/>
-                <a:ea typeface="Arial" pitchFamily="34" charset="-122"/>
-                <a:cs typeface="Arial" pitchFamily="34" charset="-120"/>
-              </a:rPr>
-              <a:t>
-(externe effecten)
-</a:t>
-            </a:r>
-            <a:pPr algn="l" marL="342900" indent="-342900">
-              <a:lnSpc>
-                <a:spcPct val="115000"/>
-              </a:lnSpc>
-              <a:buSzPct val="100000"/>
-              <a:buChar char="•"/>
-            </a:pPr>
-            <a:r>
-              <a:rPr lang="en-US" sz="1400" b="1" dirty="0">
-                <a:solidFill>
-                  <a:srgbClr val="2D3748"/>
-                </a:solidFill>
-                <a:latin typeface="Arial" pitchFamily="34" charset="0"/>
-                <a:ea typeface="Arial" pitchFamily="34" charset="-122"/>
-                <a:cs typeface="Arial" pitchFamily="34" charset="-120"/>
-              </a:rPr>
-              <a:t>Goederen die de markt niet levert</a:t>
-            </a:r>
-            <a:pPr algn="l" indent="0" marL="0">
-              <a:lnSpc>
-                <a:spcPct val="115000"/>
-              </a:lnSpc>
-              <a:buNone/>
-            </a:pPr>
-            <a:endParaRPr lang="en-US" sz="1400" dirty="0"/>
-          </a:p>
-          <a:p>
-            <a:pPr algn="l" indent="0" marL="0">
-              <a:lnSpc>
-                <a:spcPct val="115000"/>
-              </a:lnSpc>
-              <a:buNone/>
-            </a:pPr>
-            <a:r>
-              <a:rPr lang="en-US" sz="1300" dirty="0">
-                <a:solidFill>
-                  <a:srgbClr val="718096"/>
-                </a:solidFill>
-                <a:latin typeface="Arial" pitchFamily="34" charset="0"/>
-                <a:ea typeface="Arial" pitchFamily="34" charset="-122"/>
-                <a:cs typeface="Arial" pitchFamily="34" charset="-120"/>
-              </a:rPr>
-              <a:t>(collectieve goederen)</a:t>
-            </a:r>
-            <a:endParaRPr lang="en-US" sz="1400" dirty="0"/>
-          </a:p>
-        </p:txBody>
-      </p:sp>
-      <p:sp>
-        <p:nvSpPr>
-          <p:cNvPr id="7" name="Shape 5"/>
-          <p:cNvSpPr/>
-          <p:nvPr/>
-        </p:nvSpPr>
-        <p:spPr>
-          <a:xfrm>
-            <a:off x="4754880" y="1005840"/>
-            <a:ext cx="3931920" cy="3291840"/>
-          </a:xfrm>
-          <a:prstGeom prst="rect">
-            <a:avLst>
-              <a:gd name="adj" fmla="val 1389"/>
-            </a:avLst>
-          </a:prstGeom>
-          <a:solidFill>
-            <a:srgbClr val="F9F6F1"/>
-          </a:solidFill>
-          <a:ln/>
-          <a:effectLst>
-            <a:outerShdw sx="100000" sy="100000" kx="0" ky="0" algn="bl" rotWithShape="0" blurRad="76200" dist="25400" dir="8100000">
-              <a:srgbClr val="000000">
-                <a:alpha val="10000"/>
-              </a:srgbClr>
-            </a:outerShdw>
-          </a:effectLst>
-        </p:spPr>
-        <p:txBody>
-          <a:bodyPr/>
-          <a:p/>
-        </p:txBody>
-      </p:sp>
-      <p:sp>
-        <p:nvSpPr>
-          <p:cNvPr id="8" name="Shape 6"/>
-          <p:cNvSpPr/>
-          <p:nvPr/>
-        </p:nvSpPr>
-        <p:spPr>
-          <a:xfrm>
-            <a:off x="4754880" y="1005840"/>
-            <a:ext cx="54864" cy="3291840"/>
-          </a:xfrm>
-          <a:prstGeom prst="rect">
-            <a:avLst/>
-          </a:prstGeom>
-          <a:solidFill>
-            <a:srgbClr val="1A5276"/>
-          </a:solidFill>
-          <a:ln/>
-        </p:spPr>
-        <p:txBody>
-          <a:bodyPr/>
-          <a:p/>
-        </p:txBody>
-      </p:sp>
-      <p:sp>
-        <p:nvSpPr>
-          <p:cNvPr id="9" name="Text 7"/>
-          <p:cNvSpPr/>
-          <p:nvPr/>
-        </p:nvSpPr>
-        <p:spPr>
-          <a:xfrm>
-            <a:off x="4937760" y="1143000"/>
-            <a:ext cx="3611880" cy="365760"/>
-          </a:xfrm>
-          <a:prstGeom prst="rect">
-            <a:avLst/>
-          </a:prstGeom>
-          <a:noFill/>
-          <a:ln/>
-        </p:spPr>
-        <p:txBody>
-          <a:bodyPr wrap="square" rtlCol="0" anchor="t"/>
-          <a:lstStyle/>
-          <a:p>
-            <a:pPr indent="0" marL="0">
-              <a:buNone/>
-            </a:pPr>
-            <a:r>
-              <a:rPr lang="en-US" sz="2000" b="1" dirty="0">
-                <a:solidFill>
-                  <a:srgbClr val="1A5276"/>
-                </a:solidFill>
-                <a:latin typeface="Arial" pitchFamily="34" charset="0"/>
-                <a:ea typeface="Arial" pitchFamily="34" charset="-122"/>
-                <a:cs typeface="Arial" pitchFamily="34" charset="-120"/>
-              </a:rPr>
-              <a:t>Rol van de overheid</a:t>
-            </a:r>
-            <a:endParaRPr lang="en-US" sz="2000" dirty="0"/>
-          </a:p>
-        </p:txBody>
-      </p:sp>
-      <p:sp>
-        <p:nvSpPr>
-          <p:cNvPr id="10" name="Text 8"/>
-          <p:cNvSpPr/>
-          <p:nvPr/>
-        </p:nvSpPr>
-        <p:spPr>
-          <a:xfrm>
-            <a:off x="4937760" y="1554480"/>
-            <a:ext cx="3611880" cy="2606040"/>
-          </a:xfrm>
-          <a:prstGeom prst="rect">
-            <a:avLst/>
-          </a:prstGeom>
-          <a:noFill/>
-          <a:ln/>
-        </p:spPr>
-        <p:txBody>
-          <a:bodyPr wrap="square" rtlCol="0" anchor="t"/>
-          <a:lstStyle/>
-          <a:p>
-            <a:pPr algn="l" indent="0" marL="0">
-              <a:lnSpc>
-                <a:spcPct val="115000"/>
-              </a:lnSpc>
-              <a:buNone/>
-            </a:pPr>
-            <a:r>
-              <a:rPr lang="en-US" sz="1400" dirty="0">
-                <a:solidFill>
-                  <a:srgbClr val="2D3748"/>
-                </a:solidFill>
-                <a:latin typeface="Arial" pitchFamily="34" charset="0"/>
-                <a:ea typeface="Arial" pitchFamily="34" charset="-122"/>
-                <a:cs typeface="Arial" pitchFamily="34" charset="-120"/>
-              </a:rPr>
-              <a:t>De overheid grijpt in als de markt faalt:
-</a:t>
-            </a:r>
-            <a:pPr algn="l" marL="342900" indent="-342900">
-              <a:lnSpc>
-                <a:spcPct val="115000"/>
-              </a:lnSpc>
-              <a:buSzPct val="100000"/>
-              <a:buChar char="•"/>
-            </a:pPr>
-            <a:r>
-              <a:rPr lang="en-US" sz="1400" b="1" dirty="0">
-                <a:solidFill>
-                  <a:srgbClr val="2D3748"/>
-                </a:solidFill>
-                <a:latin typeface="Arial" pitchFamily="34" charset="0"/>
-                <a:ea typeface="Arial" pitchFamily="34" charset="-122"/>
-                <a:cs typeface="Arial" pitchFamily="34" charset="-120"/>
-              </a:rPr>
-              <a:t>Mededingingsbeleid</a:t>
-            </a:r>
-            <a:pPr algn="l" indent="0" marL="0">
-              <a:lnSpc>
-                <a:spcPct val="115000"/>
-              </a:lnSpc>
-              <a:buNone/>
-            </a:pPr>
-            <a:r>
-              <a:rPr lang="en-US" sz="1300" dirty="0">
-                <a:solidFill>
-                  <a:srgbClr val="718096"/>
-                </a:solidFill>
-                <a:latin typeface="Arial" pitchFamily="34" charset="0"/>
-                <a:ea typeface="Arial" pitchFamily="34" charset="-122"/>
-                <a:cs typeface="Arial" pitchFamily="34" charset="-120"/>
-              </a:rPr>
-              <a:t>
-monopolie aanpakken
-</a:t>
-            </a:r>
-            <a:pPr algn="l" marL="342900" indent="-342900">
-              <a:lnSpc>
-                <a:spcPct val="115000"/>
-              </a:lnSpc>
-              <a:buSzPct val="100000"/>
-              <a:buChar char="•"/>
-            </a:pPr>
-            <a:r>
-              <a:rPr lang="en-US" sz="1400" b="1" dirty="0">
-                <a:solidFill>
-                  <a:srgbClr val="2D3748"/>
-                </a:solidFill>
-                <a:latin typeface="Arial" pitchFamily="34" charset="0"/>
-                <a:ea typeface="Arial" pitchFamily="34" charset="-122"/>
-                <a:cs typeface="Arial" pitchFamily="34" charset="-120"/>
-              </a:rPr>
-              <a:t>Belastingen / subsidies</a:t>
-            </a:r>
-            <a:pPr algn="l" indent="0" marL="0">
-              <a:lnSpc>
-                <a:spcPct val="115000"/>
-              </a:lnSpc>
-              <a:buNone/>
-            </a:pPr>
-            <a:r>
-              <a:rPr lang="en-US" sz="1300" dirty="0">
-                <a:solidFill>
-                  <a:srgbClr val="718096"/>
-                </a:solidFill>
-                <a:latin typeface="Arial" pitchFamily="34" charset="0"/>
-                <a:ea typeface="Arial" pitchFamily="34" charset="-122"/>
-                <a:cs typeface="Arial" pitchFamily="34" charset="-120"/>
-              </a:rPr>
-              <a:t>
-externe effecten corrigeren
-</a:t>
-            </a:r>
-            <a:pPr algn="l" marL="342900" indent="-342900">
-              <a:lnSpc>
-                <a:spcPct val="115000"/>
-              </a:lnSpc>
-              <a:buSzPct val="100000"/>
-              <a:buChar char="•"/>
-            </a:pPr>
-            <a:r>
-              <a:rPr lang="en-US" sz="1400" b="1" dirty="0">
-                <a:solidFill>
-                  <a:srgbClr val="2D3748"/>
-                </a:solidFill>
-                <a:latin typeface="Arial" pitchFamily="34" charset="0"/>
-                <a:ea typeface="Arial" pitchFamily="34" charset="-122"/>
-                <a:cs typeface="Arial" pitchFamily="34" charset="-120"/>
-              </a:rPr>
-              <a:t>Prijsbeleid</a:t>
-            </a:r>
-            <a:pPr algn="l" indent="0" marL="0">
-              <a:lnSpc>
-                <a:spcPct val="115000"/>
-              </a:lnSpc>
-              <a:buNone/>
-            </a:pPr>
-            <a:endParaRPr lang="en-US" sz="1400" dirty="0"/>
-          </a:p>
-          <a:p>
-            <a:pPr algn="l" indent="0" marL="0">
-              <a:lnSpc>
-                <a:spcPct val="115000"/>
-              </a:lnSpc>
-              <a:buNone/>
-            </a:pPr>
-            <a:r>
-              <a:rPr lang="en-US" sz="1300" dirty="0">
-                <a:solidFill>
-                  <a:srgbClr val="718096"/>
-                </a:solidFill>
-                <a:latin typeface="Arial" pitchFamily="34" charset="0"/>
-                <a:ea typeface="Arial" pitchFamily="34" charset="-122"/>
-                <a:cs typeface="Arial" pitchFamily="34" charset="-120"/>
-              </a:rPr>
-              <a:t>prijzen sturen</a:t>
-            </a:r>
-            <a:endParaRPr lang="en-US" sz="1400" dirty="0"/>
-          </a:p>
-        </p:txBody>
-      </p:sp>
+      <p:pic>
+        <p:nvPicPr>
+          <p:cNvPr id="3" name="Image 0" descr="preencoded.png">    </p:cNvPr>
+          <p:cNvPicPr>
+            <a:picLocks noChangeAspect="1"/>
+          </p:cNvPicPr>
+          <p:nvPr/>
+        </p:nvPicPr>
+        <p:blipFill>
+          <a:blip r:embed="rId1"/>
+          <a:stretch>
+            <a:fillRect/>
+          </a:stretch>
+        </p:blipFill>
+        <p:spPr>
+          <a:xfrm>
+            <a:off x="685800" y="868680"/>
+            <a:ext cx="7772400" cy="3886200"/>
+          </a:xfrm>
+          <a:prstGeom prst="rect">
+            <a:avLst/>
+          </a:prstGeom>
+        </p:spPr>
+      </p:pic>
     </p:spTree>
   </p:cSld>
   <p:clrMapOvr>
@@ -3028,7 +6536,7 @@
                 <a:ea typeface="Arial" pitchFamily="34" charset="-122"/>
                 <a:cs typeface="Arial" pitchFamily="34" charset="-120"/>
               </a:rPr>
-              <a:t>Natuurlijk monopolie</a:t>
+              <a:t>Wat is marktfalen?</a:t>
             </a:r>
             <a:endParaRPr lang="en-US" sz="2400" dirty="0"/>
           </a:p>
@@ -3036,57 +6544,18 @@
       </p:sp>
       <p:sp>
         <p:nvSpPr>
-          <p:cNvPr id="3" name="Text 1"/>
-          <p:cNvSpPr/>
-          <p:nvPr/>
-        </p:nvSpPr>
-        <p:spPr>
-          <a:xfrm>
-            <a:off x="457200" y="868680"/>
-            <a:ext cx="8229600" cy="411480"/>
-          </a:xfrm>
-          <a:prstGeom prst="rect">
-            <a:avLst/>
-          </a:prstGeom>
-          <a:noFill/>
-          <a:ln/>
-        </p:spPr>
-        <p:txBody>
-          <a:bodyPr wrap="square" rtlCol="0" anchor="ctr"/>
-          <a:lstStyle/>
-          <a:p>
-            <a:pPr algn="l" indent="0" marL="0">
-              <a:buNone/>
-            </a:pPr>
-            <a:r>
-              <a:rPr lang="en-US" sz="1400" i="1" dirty="0">
-                <a:solidFill>
-                  <a:srgbClr val="718096"/>
-                </a:solidFill>
-                <a:latin typeface="Arial" pitchFamily="34" charset="0"/>
-                <a:ea typeface="Arial" pitchFamily="34" charset="-122"/>
-                <a:cs typeface="Arial" pitchFamily="34" charset="-120"/>
-              </a:rPr>
-              <a:t>Eén aanbieder heeft lagere kosten → de markt wordt ‘natuurlijk’ door één bedrijf bediend.</a:t>
-            </a:r>
-            <a:endParaRPr lang="en-US" sz="1400" dirty="0"/>
-          </a:p>
-        </p:txBody>
-      </p:sp>
-      <p:sp>
-        <p:nvSpPr>
-          <p:cNvPr id="4" name="Shape 2"/>
-          <p:cNvSpPr/>
-          <p:nvPr/>
-        </p:nvSpPr>
-        <p:spPr>
-          <a:xfrm>
-            <a:off x="457200" y="1463040"/>
-            <a:ext cx="2560320" cy="2377440"/>
+          <p:cNvPr id="3" name="Shape 1"/>
+          <p:cNvSpPr/>
+          <p:nvPr/>
+        </p:nvSpPr>
+        <p:spPr>
+          <a:xfrm>
+            <a:off x="457200" y="960120"/>
+            <a:ext cx="3931920" cy="3566160"/>
           </a:xfrm>
           <a:prstGeom prst="rect">
             <a:avLst>
-              <a:gd name="adj" fmla="val 1923"/>
+              <a:gd name="adj" fmla="val 1282"/>
             </a:avLst>
           </a:prstGeom>
           <a:solidFill>
@@ -3101,21 +6570,17 @@
             </a:outerShdw>
           </a:effectLst>
         </p:spPr>
-        <p:txBody>
-          <a:bodyPr/>
-          <a:p/>
-        </p:txBody>
-      </p:sp>
-      <p:sp>
-        <p:nvSpPr>
-          <p:cNvPr id="5" name="Shape 3"/>
-          <p:cNvSpPr/>
-          <p:nvPr/>
-        </p:nvSpPr>
-        <p:spPr>
-          <a:xfrm>
-            <a:off x="457200" y="1463040"/>
-            <a:ext cx="54864" cy="2377440"/>
+      </p:sp>
+      <p:sp>
+        <p:nvSpPr>
+          <p:cNvPr id="4" name="Shape 2"/>
+          <p:cNvSpPr/>
+          <p:nvPr/>
+        </p:nvSpPr>
+        <p:spPr>
+          <a:xfrm>
+            <a:off x="457200" y="960120"/>
+            <a:ext cx="54864" cy="3566160"/>
           </a:xfrm>
           <a:prstGeom prst="rect">
             <a:avLst/>
@@ -3125,21 +6590,17 @@
           </a:solidFill>
           <a:ln/>
         </p:spPr>
-        <p:txBody>
-          <a:bodyPr/>
-          <a:p/>
-        </p:txBody>
-      </p:sp>
-      <p:sp>
-        <p:nvSpPr>
-          <p:cNvPr id="6" name="Text 4"/>
-          <p:cNvSpPr/>
-          <p:nvPr/>
-        </p:nvSpPr>
-        <p:spPr>
-          <a:xfrm>
-            <a:off x="640080" y="1600200"/>
-            <a:ext cx="2240280" cy="365760"/>
+      </p:sp>
+      <p:sp>
+        <p:nvSpPr>
+          <p:cNvPr id="5" name="Text 3"/>
+          <p:cNvSpPr/>
+          <p:nvPr/>
+        </p:nvSpPr>
+        <p:spPr>
+          <a:xfrm>
+            <a:off x="640080" y="1069848"/>
+            <a:ext cx="3611880" cy="365760"/>
           </a:xfrm>
           <a:prstGeom prst="rect">
             <a:avLst/>
@@ -3148,37 +6609,37 @@
           <a:ln/>
         </p:spPr>
         <p:txBody>
-          <a:bodyPr wrap="square" rtlCol="0" anchor="t"/>
+          <a:bodyPr wrap="square" lIns="0" tIns="0" rIns="0" bIns="0" rtlCol="0" anchor="t"/>
           <a:lstStyle/>
           <a:p>
             <a:pPr indent="0" marL="0">
               <a:buNone/>
             </a:pPr>
             <a:r>
-              <a:rPr lang="en-US" sz="2000" b="1" dirty="0">
-                <a:solidFill>
-                  <a:srgbClr val="1A5276"/>
-                </a:solidFill>
-                <a:latin typeface="Arial" pitchFamily="34" charset="0"/>
-                <a:ea typeface="Arial" pitchFamily="34" charset="-122"/>
-                <a:cs typeface="Arial" pitchFamily="34" charset="-120"/>
-              </a:rPr>
-              <a:t>Waterleidingnet</a:t>
-            </a:r>
-            <a:endParaRPr lang="en-US" sz="2000" dirty="0"/>
-          </a:p>
-        </p:txBody>
-      </p:sp>
-      <p:sp>
-        <p:nvSpPr>
-          <p:cNvPr id="7" name="Text 5"/>
-          <p:cNvSpPr/>
-          <p:nvPr/>
-        </p:nvSpPr>
-        <p:spPr>
-          <a:xfrm>
-            <a:off x="640080" y="2011680"/>
-            <a:ext cx="2240280" cy="1691640"/>
+              <a:rPr lang="en-US" sz="1800" b="1" dirty="0">
+                <a:solidFill>
+                  <a:srgbClr val="154360"/>
+                </a:solidFill>
+                <a:latin typeface="Arial" pitchFamily="34" charset="0"/>
+                <a:ea typeface="Arial" pitchFamily="34" charset="-122"/>
+                <a:cs typeface="Arial" pitchFamily="34" charset="-120"/>
+              </a:rPr>
+              <a:t>Markt werkt goed</a:t>
+            </a:r>
+            <a:endParaRPr lang="en-US" sz="1800" dirty="0"/>
+          </a:p>
+        </p:txBody>
+      </p:sp>
+      <p:sp>
+        <p:nvSpPr>
+          <p:cNvPr id="6" name="Text 4"/>
+          <p:cNvSpPr/>
+          <p:nvPr/>
+        </p:nvSpPr>
+        <p:spPr>
+          <a:xfrm>
+            <a:off x="640080" y="1463040"/>
+            <a:ext cx="3611880" cy="2926080"/>
           </a:xfrm>
           <a:prstGeom prst="rect">
             <a:avLst/>
@@ -3187,48 +6648,111 @@
           <a:ln/>
         </p:spPr>
         <p:txBody>
-          <a:bodyPr wrap="square" rtlCol="0" anchor="t"/>
-          <a:lstStyle/>
+          <a:bodyPr wrap="square" lIns="0" tIns="0" rIns="0" bIns="0" rtlCol="0" anchor="t"/>
+          <a:lstStyle/>
+          <a:p>
+            <a:pPr algn="l" marL="342900" indent="-342900">
+              <a:lnSpc>
+                <a:spcPct val="120000"/>
+              </a:lnSpc>
+              <a:buSzPct val="100000"/>
+              <a:buChar char="■"/>
+            </a:pPr>
+            <a:r>
+              <a:rPr lang="en-US" sz="1300" b="1" dirty="0">
+                <a:solidFill>
+                  <a:srgbClr val="154360"/>
+                </a:solidFill>
+                <a:latin typeface="Arial" pitchFamily="34" charset="0"/>
+                <a:ea typeface="Arial" pitchFamily="34" charset="-122"/>
+                <a:cs typeface="Arial" pitchFamily="34" charset="-120"/>
+              </a:rPr>
+              <a:t>Voldoende concurrentie</a:t>
+            </a:r>
+            <a:endParaRPr lang="en-US" sz="1300" dirty="0"/>
+          </a:p>
+          <a:p>
+            <a:pPr algn="l" marL="342900" indent="-342900">
+              <a:lnSpc>
+                <a:spcPct val="120000"/>
+              </a:lnSpc>
+              <a:buSzPct val="100000"/>
+              <a:buChar char="■"/>
+            </a:pPr>
+            <a:r>
+              <a:rPr lang="en-US" sz="1300" b="1" dirty="0">
+                <a:solidFill>
+                  <a:srgbClr val="154360"/>
+                </a:solidFill>
+                <a:latin typeface="Arial" pitchFamily="34" charset="0"/>
+                <a:ea typeface="Arial" pitchFamily="34" charset="-122"/>
+                <a:cs typeface="Arial" pitchFamily="34" charset="-120"/>
+              </a:rPr>
+              <a:t>Alle kosten/baten zitten in de prijs</a:t>
+            </a:r>
+            <a:endParaRPr lang="en-US" sz="1300" dirty="0"/>
+          </a:p>
+          <a:p>
+            <a:pPr algn="l" marL="342900" indent="-342900">
+              <a:lnSpc>
+                <a:spcPct val="120000"/>
+              </a:lnSpc>
+              <a:buSzPct val="100000"/>
+              <a:buChar char="■"/>
+            </a:pPr>
+            <a:r>
+              <a:rPr lang="en-US" sz="1300" b="1" dirty="0">
+                <a:solidFill>
+                  <a:srgbClr val="154360"/>
+                </a:solidFill>
+                <a:latin typeface="Arial" pitchFamily="34" charset="0"/>
+                <a:ea typeface="Arial" pitchFamily="34" charset="-122"/>
+                <a:cs typeface="Arial" pitchFamily="34" charset="-120"/>
+              </a:rPr>
+              <a:t>Goederen worden geleverd</a:t>
+            </a:r>
+            <a:endParaRPr lang="en-US" sz="1300" dirty="0"/>
+          </a:p>
           <a:p>
             <a:pPr algn="l" indent="0" marL="0">
               <a:lnSpc>
-                <a:spcPct val="115000"/>
+                <a:spcPct val="120000"/>
               </a:lnSpc>
               <a:buNone/>
             </a:pPr>
             <a:r>
-              <a:rPr lang="en-US" sz="1400" dirty="0">
-                <a:solidFill>
-                  <a:srgbClr val="2D3748"/>
-                </a:solidFill>
-                <a:latin typeface="Arial" pitchFamily="34" charset="0"/>
-                <a:ea typeface="Arial" pitchFamily="34" charset="-122"/>
-                <a:cs typeface="Arial" pitchFamily="34" charset="-120"/>
-              </a:rPr>
-              <a:t>Eén net is goedkoper dan twee</a:t>
-            </a:r>
-            <a:endParaRPr lang="en-US" sz="1400" dirty="0"/>
-          </a:p>
-        </p:txBody>
-      </p:sp>
-      <p:sp>
-        <p:nvSpPr>
-          <p:cNvPr id="8" name="Shape 6"/>
-          <p:cNvSpPr/>
-          <p:nvPr/>
-        </p:nvSpPr>
-        <p:spPr>
-          <a:xfrm>
-            <a:off x="3291840" y="1463040"/>
-            <a:ext cx="2560320" cy="2377440"/>
+              <a:rPr lang="en-US" sz="1200" i="1" dirty="0">
+                <a:solidFill>
+                  <a:srgbClr val="718096"/>
+                </a:solidFill>
+                <a:latin typeface="Arial" pitchFamily="34" charset="0"/>
+                <a:ea typeface="Arial" pitchFamily="34" charset="-122"/>
+                <a:cs typeface="Arial" pitchFamily="34" charset="-120"/>
+              </a:rPr>
+              <a:t>→ prijs bepaalt schaarse middelen efficiënt</a:t>
+            </a:r>
+            <a:endParaRPr lang="en-US" sz="1300" dirty="0"/>
+          </a:p>
+        </p:txBody>
+      </p:sp>
+      <p:sp>
+        <p:nvSpPr>
+          <p:cNvPr id="7" name="Shape 5"/>
+          <p:cNvSpPr/>
+          <p:nvPr/>
+        </p:nvSpPr>
+        <p:spPr>
+          <a:xfrm>
+            <a:off x="4754880" y="960120"/>
+            <a:ext cx="3931920" cy="3566160"/>
           </a:xfrm>
           <a:prstGeom prst="rect">
             <a:avLst>
-              <a:gd name="adj" fmla="val 1923"/>
+              <a:gd name="adj" fmla="val 1282"/>
             </a:avLst>
           </a:prstGeom>
           <a:solidFill>
-            <a:srgbClr val="F9F6F1"/>
+            <a:srgbClr val="FDE8E8"/>
           </a:solidFill>
           <a:ln/>
           <a:effectLst>
@@ -3239,45 +6763,37 @@
             </a:outerShdw>
           </a:effectLst>
         </p:spPr>
-        <p:txBody>
-          <a:bodyPr/>
-          <a:p/>
-        </p:txBody>
-      </p:sp>
-      <p:sp>
-        <p:nvSpPr>
-          <p:cNvPr id="9" name="Shape 7"/>
-          <p:cNvSpPr/>
-          <p:nvPr/>
-        </p:nvSpPr>
-        <p:spPr>
-          <a:xfrm>
-            <a:off x="3291840" y="1463040"/>
-            <a:ext cx="54864" cy="2377440"/>
+      </p:sp>
+      <p:sp>
+        <p:nvSpPr>
+          <p:cNvPr id="8" name="Shape 6"/>
+          <p:cNvSpPr/>
+          <p:nvPr/>
+        </p:nvSpPr>
+        <p:spPr>
+          <a:xfrm>
+            <a:off x="4754880" y="960120"/>
+            <a:ext cx="54864" cy="3566160"/>
           </a:xfrm>
           <a:prstGeom prst="rect">
             <a:avLst/>
           </a:prstGeom>
           <a:solidFill>
-            <a:srgbClr val="1A5276"/>
+            <a:srgbClr val="D9534F"/>
           </a:solidFill>
           <a:ln/>
         </p:spPr>
-        <p:txBody>
-          <a:bodyPr/>
-          <a:p/>
-        </p:txBody>
-      </p:sp>
-      <p:sp>
-        <p:nvSpPr>
-          <p:cNvPr id="10" name="Text 8"/>
-          <p:cNvSpPr/>
-          <p:nvPr/>
-        </p:nvSpPr>
-        <p:spPr>
-          <a:xfrm>
-            <a:off x="3474720" y="1600200"/>
-            <a:ext cx="2240280" cy="365760"/>
+      </p:sp>
+      <p:sp>
+        <p:nvSpPr>
+          <p:cNvPr id="9" name="Text 7"/>
+          <p:cNvSpPr/>
+          <p:nvPr/>
+        </p:nvSpPr>
+        <p:spPr>
+          <a:xfrm>
+            <a:off x="4937760" y="1069848"/>
+            <a:ext cx="3611880" cy="365760"/>
           </a:xfrm>
           <a:prstGeom prst="rect">
             <a:avLst/>
@@ -3286,37 +6802,37 @@
           <a:ln/>
         </p:spPr>
         <p:txBody>
-          <a:bodyPr wrap="square" rtlCol="0" anchor="t"/>
+          <a:bodyPr wrap="square" lIns="0" tIns="0" rIns="0" bIns="0" rtlCol="0" anchor="t"/>
           <a:lstStyle/>
           <a:p>
             <a:pPr indent="0" marL="0">
               <a:buNone/>
             </a:pPr>
             <a:r>
-              <a:rPr lang="en-US" sz="2000" b="1" dirty="0">
-                <a:solidFill>
-                  <a:srgbClr val="1A5276"/>
-                </a:solidFill>
-                <a:latin typeface="Arial" pitchFamily="34" charset="0"/>
-                <a:ea typeface="Arial" pitchFamily="34" charset="-122"/>
-                <a:cs typeface="Arial" pitchFamily="34" charset="-120"/>
-              </a:rPr>
-              <a:t>Spoorwegen</a:t>
-            </a:r>
-            <a:endParaRPr lang="en-US" sz="2000" dirty="0"/>
-          </a:p>
-        </p:txBody>
-      </p:sp>
-      <p:sp>
-        <p:nvSpPr>
-          <p:cNvPr id="11" name="Text 9"/>
-          <p:cNvSpPr/>
-          <p:nvPr/>
-        </p:nvSpPr>
-        <p:spPr>
-          <a:xfrm>
-            <a:off x="3474720" y="2011680"/>
-            <a:ext cx="2240280" cy="1691640"/>
+              <a:rPr lang="en-US" sz="1800" b="1" dirty="0">
+                <a:solidFill>
+                  <a:srgbClr val="922B21"/>
+                </a:solidFill>
+                <a:latin typeface="Arial" pitchFamily="34" charset="0"/>
+                <a:ea typeface="Arial" pitchFamily="34" charset="-122"/>
+                <a:cs typeface="Arial" pitchFamily="34" charset="-120"/>
+              </a:rPr>
+              <a:t>Markt faalt</a:t>
+            </a:r>
+            <a:endParaRPr lang="en-US" sz="1800" dirty="0"/>
+          </a:p>
+        </p:txBody>
+      </p:sp>
+      <p:sp>
+        <p:nvSpPr>
+          <p:cNvPr id="10" name="Text 8"/>
+          <p:cNvSpPr/>
+          <p:nvPr/>
+        </p:nvSpPr>
+        <p:spPr>
+          <a:xfrm>
+            <a:off x="4937760" y="1463040"/>
+            <a:ext cx="3611880" cy="2926080"/>
           </a:xfrm>
           <a:prstGeom prst="rect">
             <a:avLst/>
@@ -3325,165 +6841,90 @@
           <a:ln/>
         </p:spPr>
         <p:txBody>
-          <a:bodyPr wrap="square" rtlCol="0" anchor="t"/>
-          <a:lstStyle/>
+          <a:bodyPr wrap="square" lIns="0" tIns="0" rIns="0" bIns="0" rtlCol="0" anchor="t"/>
+          <a:lstStyle/>
+          <a:p>
+            <a:pPr algn="l" marL="342900" indent="-342900">
+              <a:lnSpc>
+                <a:spcPct val="120000"/>
+              </a:lnSpc>
+              <a:buSzPct val="100000"/>
+              <a:buChar char="■"/>
+            </a:pPr>
+            <a:r>
+              <a:rPr lang="en-US" sz="1300" b="1" dirty="0">
+                <a:solidFill>
+                  <a:srgbClr val="922B21"/>
+                </a:solidFill>
+                <a:latin typeface="Arial" pitchFamily="34" charset="0"/>
+                <a:ea typeface="Arial" pitchFamily="34" charset="-122"/>
+                <a:cs typeface="Arial" pitchFamily="34" charset="-120"/>
+              </a:rPr>
+              <a:t>Te weinig concurrentie (monopolie)</a:t>
+            </a:r>
+            <a:endParaRPr lang="en-US" sz="1300" dirty="0"/>
+          </a:p>
+          <a:p>
+            <a:pPr algn="l" marL="342900" indent="-342900">
+              <a:lnSpc>
+                <a:spcPct val="120000"/>
+              </a:lnSpc>
+              <a:buSzPct val="100000"/>
+              <a:buChar char="■"/>
+            </a:pPr>
+            <a:r>
+              <a:rPr lang="en-US" sz="1300" b="1" dirty="0">
+                <a:solidFill>
+                  <a:srgbClr val="922B21"/>
+                </a:solidFill>
+                <a:latin typeface="Arial" pitchFamily="34" charset="0"/>
+                <a:ea typeface="Arial" pitchFamily="34" charset="-122"/>
+                <a:cs typeface="Arial" pitchFamily="34" charset="-120"/>
+              </a:rPr>
+              <a:t>Kosten/baten buiten de markt (externe effecten)</a:t>
+            </a:r>
+            <a:endParaRPr lang="en-US" sz="1300" dirty="0"/>
+          </a:p>
+          <a:p>
+            <a:pPr algn="l" marL="342900" indent="-342900">
+              <a:lnSpc>
+                <a:spcPct val="120000"/>
+              </a:lnSpc>
+              <a:buSzPct val="100000"/>
+              <a:buChar char="■"/>
+            </a:pPr>
+            <a:r>
+              <a:rPr lang="en-US" sz="1300" b="1" dirty="0">
+                <a:solidFill>
+                  <a:srgbClr val="922B21"/>
+                </a:solidFill>
+                <a:latin typeface="Arial" pitchFamily="34" charset="0"/>
+                <a:ea typeface="Arial" pitchFamily="34" charset="-122"/>
+                <a:cs typeface="Arial" pitchFamily="34" charset="-120"/>
+              </a:rPr>
+              <a:t>Markt levert niet (collectieve goederen)</a:t>
+            </a:r>
+            <a:endParaRPr lang="en-US" sz="1300" dirty="0"/>
+          </a:p>
           <a:p>
             <a:pPr algn="l" indent="0" marL="0">
               <a:lnSpc>
-                <a:spcPct val="115000"/>
+                <a:spcPct val="120000"/>
               </a:lnSpc>
               <a:buNone/>
             </a:pPr>
             <a:r>
-              <a:rPr lang="en-US" sz="1400" dirty="0">
-                <a:solidFill>
-                  <a:srgbClr val="2D3748"/>
-                </a:solidFill>
-                <a:latin typeface="Arial" pitchFamily="34" charset="0"/>
-                <a:ea typeface="Arial" pitchFamily="34" charset="-122"/>
-                <a:cs typeface="Arial" pitchFamily="34" charset="-120"/>
-              </a:rPr>
-              <a:t>Dubbele rails zijn onnodig duur</a:t>
-            </a:r>
-            <a:endParaRPr lang="en-US" sz="1400" dirty="0"/>
-          </a:p>
-        </p:txBody>
-      </p:sp>
-      <p:sp>
-        <p:nvSpPr>
-          <p:cNvPr id="12" name="Shape 10"/>
-          <p:cNvSpPr/>
-          <p:nvPr/>
-        </p:nvSpPr>
-        <p:spPr>
-          <a:xfrm>
-            <a:off x="6126480" y="1463040"/>
-            <a:ext cx="2560320" cy="2377440"/>
-          </a:xfrm>
-          <a:prstGeom prst="rect">
-            <a:avLst>
-              <a:gd name="adj" fmla="val 1923"/>
-            </a:avLst>
-          </a:prstGeom>
-          <a:solidFill>
-            <a:srgbClr val="F9F6F1"/>
-          </a:solidFill>
-          <a:ln/>
-          <a:effectLst>
-            <a:outerShdw sx="100000" sy="100000" kx="0" ky="0" algn="bl" rotWithShape="0" blurRad="76200" dist="25400" dir="8100000">
-              <a:srgbClr val="000000">
-                <a:alpha val="10000"/>
-              </a:srgbClr>
-            </a:outerShdw>
-          </a:effectLst>
-        </p:spPr>
-        <p:txBody>
-          <a:bodyPr/>
-          <a:p/>
-        </p:txBody>
-      </p:sp>
-      <p:sp>
-        <p:nvSpPr>
-          <p:cNvPr id="13" name="Shape 11"/>
-          <p:cNvSpPr/>
-          <p:nvPr/>
-        </p:nvSpPr>
-        <p:spPr>
-          <a:xfrm>
-            <a:off x="6126480" y="1463040"/>
-            <a:ext cx="54864" cy="2377440"/>
-          </a:xfrm>
-          <a:prstGeom prst="rect">
-            <a:avLst/>
-          </a:prstGeom>
-          <a:solidFill>
-            <a:srgbClr val="1A5276"/>
-          </a:solidFill>
-          <a:ln/>
-        </p:spPr>
-        <p:txBody>
-          <a:bodyPr/>
-          <a:p/>
-        </p:txBody>
-      </p:sp>
-      <p:sp>
-        <p:nvSpPr>
-          <p:cNvPr id="14" name="Text 12"/>
-          <p:cNvSpPr/>
-          <p:nvPr/>
-        </p:nvSpPr>
-        <p:spPr>
-          <a:xfrm>
-            <a:off x="6309360" y="1600200"/>
-            <a:ext cx="2240280" cy="365760"/>
-          </a:xfrm>
-          <a:prstGeom prst="rect">
-            <a:avLst/>
-          </a:prstGeom>
-          <a:noFill/>
-          <a:ln/>
-        </p:spPr>
-        <p:txBody>
-          <a:bodyPr wrap="square" rtlCol="0" anchor="t"/>
-          <a:lstStyle/>
-          <a:p>
-            <a:pPr indent="0" marL="0">
-              <a:buNone/>
-            </a:pPr>
-            <a:r>
-              <a:rPr lang="en-US" sz="2000" b="1" dirty="0">
-                <a:solidFill>
-                  <a:srgbClr val="1A5276"/>
-                </a:solidFill>
-                <a:latin typeface="Arial" pitchFamily="34" charset="0"/>
-                <a:ea typeface="Arial" pitchFamily="34" charset="-122"/>
-                <a:cs typeface="Arial" pitchFamily="34" charset="-120"/>
-              </a:rPr>
-              <a:t>Elektriciteitsnet</a:t>
-            </a:r>
-            <a:endParaRPr lang="en-US" sz="2000" dirty="0"/>
-          </a:p>
-        </p:txBody>
-      </p:sp>
-      <p:sp>
-        <p:nvSpPr>
-          <p:cNvPr id="15" name="Text 13"/>
-          <p:cNvSpPr/>
-          <p:nvPr/>
-        </p:nvSpPr>
-        <p:spPr>
-          <a:xfrm>
-            <a:off x="6309360" y="2011680"/>
-            <a:ext cx="2240280" cy="1691640"/>
-          </a:xfrm>
-          <a:prstGeom prst="rect">
-            <a:avLst/>
-          </a:prstGeom>
-          <a:noFill/>
-          <a:ln/>
-        </p:spPr>
-        <p:txBody>
-          <a:bodyPr wrap="square" rtlCol="0" anchor="t"/>
-          <a:lstStyle/>
-          <a:p>
-            <a:pPr algn="l" indent="0" marL="0">
-              <a:lnSpc>
-                <a:spcPct val="115000"/>
-              </a:lnSpc>
-              <a:buNone/>
-            </a:pPr>
-            <a:r>
-              <a:rPr lang="en-US" sz="1400" dirty="0">
-                <a:solidFill>
-                  <a:srgbClr val="2D3748"/>
-                </a:solidFill>
-                <a:latin typeface="Arial" pitchFamily="34" charset="0"/>
-                <a:ea typeface="Arial" pitchFamily="34" charset="-122"/>
-                <a:cs typeface="Arial" pitchFamily="34" charset="-120"/>
-              </a:rPr>
-              <a:t>Natuurlijk monopolie op het netwerk</a:t>
-            </a:r>
-            <a:endParaRPr lang="en-US" sz="1400" dirty="0"/>
+              <a:rPr lang="en-US" sz="1200" i="1" dirty="0">
+                <a:solidFill>
+                  <a:srgbClr val="718096"/>
+                </a:solidFill>
+                <a:latin typeface="Arial" pitchFamily="34" charset="0"/>
+                <a:ea typeface="Arial" pitchFamily="34" charset="-122"/>
+                <a:cs typeface="Arial" pitchFamily="34" charset="-120"/>
+              </a:rPr>
+              <a:t>→ overheid grijpt in</a:t>
+            </a:r>
+            <a:endParaRPr lang="en-US" sz="1300" dirty="0"/>
           </a:p>
         </p:txBody>
       </p:sp>
@@ -3545,7 +6986,7 @@
                 <a:ea typeface="Arial" pitchFamily="34" charset="-122"/>
                 <a:cs typeface="Arial" pitchFamily="34" charset="-120"/>
               </a:rPr>
-              <a:t>Negatieve externe effecten</a:t>
+              <a:t>Natuurlijk monopolie</a:t>
             </a:r>
             <a:endParaRPr lang="en-US" sz="2400" dirty="0"/>
           </a:p>
@@ -3559,23 +7000,18 @@
         </p:nvSpPr>
         <p:spPr>
           <a:xfrm>
-            <a:off x="685800" y="1097280"/>
-            <a:ext cx="3474720" cy="457200"/>
+            <a:off x="457200" y="960120"/>
+            <a:ext cx="3931920" cy="3566160"/>
           </a:xfrm>
           <a:prstGeom prst="rect">
             <a:avLst>
-              <a:gd name="adj" fmla="val 10000"/>
+              <a:gd name="adj" fmla="val 1282"/>
             </a:avLst>
           </a:prstGeom>
           <a:solidFill>
             <a:srgbClr val="F9F6F1"/>
           </a:solidFill>
-          <a:ln w="12700">
-            <a:solidFill>
-              <a:srgbClr val="1A5276"/>
-            </a:solidFill>
-            <a:prstDash val="solid"/>
-          </a:ln>
+          <a:ln/>
           <a:effectLst>
             <a:outerShdw sx="100000" sy="100000" kx="0" ky="0" algn="bl" rotWithShape="0" blurRad="76200" dist="25400" dir="8100000">
               <a:srgbClr val="000000">
@@ -3584,21 +7020,37 @@
             </a:outerShdw>
           </a:effectLst>
         </p:spPr>
-        <p:txBody>
-          <a:bodyPr/>
-          <a:p/>
-        </p:txBody>
-      </p:sp>
-      <p:sp>
-        <p:nvSpPr>
-          <p:cNvPr id="4" name="Text 2"/>
-          <p:cNvSpPr/>
-          <p:nvPr/>
-        </p:nvSpPr>
-        <p:spPr>
-          <a:xfrm>
-            <a:off x="685800" y="1097280"/>
-            <a:ext cx="3474720" cy="457200"/>
+      </p:sp>
+      <p:sp>
+        <p:nvSpPr>
+          <p:cNvPr id="4" name="Shape 2"/>
+          <p:cNvSpPr/>
+          <p:nvPr/>
+        </p:nvSpPr>
+        <p:spPr>
+          <a:xfrm>
+            <a:off x="457200" y="960120"/>
+            <a:ext cx="54864" cy="3566160"/>
+          </a:xfrm>
+          <a:prstGeom prst="rect">
+            <a:avLst/>
+          </a:prstGeom>
+          <a:solidFill>
+            <a:srgbClr val="1A5276"/>
+          </a:solidFill>
+          <a:ln/>
+        </p:spPr>
+      </p:sp>
+      <p:sp>
+        <p:nvSpPr>
+          <p:cNvPr id="5" name="Text 3"/>
+          <p:cNvSpPr/>
+          <p:nvPr/>
+        </p:nvSpPr>
+        <p:spPr>
+          <a:xfrm>
+            <a:off x="640080" y="1069848"/>
+            <a:ext cx="3611880" cy="365760"/>
           </a:xfrm>
           <a:prstGeom prst="rect">
             <a:avLst/>
@@ -3607,14 +7059,57 @@
           <a:ln/>
         </p:spPr>
         <p:txBody>
-          <a:bodyPr wrap="square" rtlCol="0" anchor="ctr"/>
-          <a:lstStyle/>
-          <a:p>
-            <a:pPr algn="ctr" indent="0" marL="0">
+          <a:bodyPr wrap="square" lIns="0" tIns="0" rIns="0" bIns="0" rtlCol="0" anchor="t"/>
+          <a:lstStyle/>
+          <a:p>
+            <a:pPr indent="0" marL="0">
               <a:buNone/>
             </a:pPr>
             <a:r>
-              <a:rPr lang="en-US" sz="1400" b="1" dirty="0">
+              <a:rPr lang="en-US" sz="1800" b="1" dirty="0">
+                <a:solidFill>
+                  <a:srgbClr val="154360"/>
+                </a:solidFill>
+                <a:latin typeface="Arial" pitchFamily="34" charset="0"/>
+                <a:ea typeface="Arial" pitchFamily="34" charset="-122"/>
+                <a:cs typeface="Arial" pitchFamily="34" charset="-120"/>
+              </a:rPr>
+              <a:t>Kenmerk</a:t>
+            </a:r>
+            <a:endParaRPr lang="en-US" sz="1800" dirty="0"/>
+          </a:p>
+        </p:txBody>
+      </p:sp>
+      <p:sp>
+        <p:nvSpPr>
+          <p:cNvPr id="6" name="Text 4"/>
+          <p:cNvSpPr/>
+          <p:nvPr/>
+        </p:nvSpPr>
+        <p:spPr>
+          <a:xfrm>
+            <a:off x="640080" y="1463040"/>
+            <a:ext cx="3611880" cy="2926080"/>
+          </a:xfrm>
+          <a:prstGeom prst="rect">
+            <a:avLst/>
+          </a:prstGeom>
+          <a:noFill/>
+          <a:ln/>
+        </p:spPr>
+        <p:txBody>
+          <a:bodyPr wrap="square" lIns="0" tIns="0" rIns="0" bIns="0" rtlCol="0" anchor="t"/>
+          <a:lstStyle/>
+          <a:p>
+            <a:pPr algn="l" marL="342900" indent="-342900">
+              <a:lnSpc>
+                <a:spcPct val="120000"/>
+              </a:lnSpc>
+              <a:buSzPct val="100000"/>
+              <a:buChar char="■"/>
+            </a:pPr>
+            <a:r>
+              <a:rPr lang="en-US" sz="1300" dirty="0">
                 <a:solidFill>
                   <a:srgbClr val="2D3748"/>
                 </a:solidFill>
@@ -3622,76 +7117,95 @@
                 <a:ea typeface="Arial" pitchFamily="34" charset="-122"/>
                 <a:cs typeface="Arial" pitchFamily="34" charset="-120"/>
               </a:rPr>
-              <a:t>Bedrijf produceert</a:t>
-            </a:r>
-            <a:endParaRPr lang="en-US" sz="1400" dirty="0"/>
-          </a:p>
-        </p:txBody>
-      </p:sp>
-      <p:sp>
-        <p:nvSpPr>
-          <p:cNvPr id="5" name="Text 3"/>
-          <p:cNvSpPr/>
-          <p:nvPr/>
-        </p:nvSpPr>
-        <p:spPr>
-          <a:xfrm>
-            <a:off x="685800" y="1554480"/>
-            <a:ext cx="3474720" cy="201168"/>
-          </a:xfrm>
-          <a:prstGeom prst="rect">
-            <a:avLst/>
-          </a:prstGeom>
-          <a:noFill/>
-          <a:ln/>
-        </p:spPr>
-        <p:txBody>
-          <a:bodyPr wrap="square" rtlCol="0" anchor="ctr"/>
-          <a:lstStyle/>
-          <a:p>
-            <a:pPr algn="ctr" indent="0" marL="0">
-              <a:buNone/>
-            </a:pPr>
-            <a:r>
-              <a:rPr lang="en-US" sz="1600" b="1" dirty="0">
-                <a:solidFill>
-                  <a:srgbClr val="1A5276"/>
-                </a:solidFill>
-                <a:latin typeface="Arial" pitchFamily="34" charset="0"/>
-                <a:ea typeface="Arial" pitchFamily="34" charset="-122"/>
-                <a:cs typeface="Arial" pitchFamily="34" charset="-120"/>
-              </a:rPr>
-              <a:t>↓</a:t>
-            </a:r>
-            <a:endParaRPr lang="en-US" sz="1600" dirty="0"/>
-          </a:p>
-        </p:txBody>
-      </p:sp>
-      <p:sp>
-        <p:nvSpPr>
-          <p:cNvPr id="6" name="Shape 4"/>
-          <p:cNvSpPr/>
-          <p:nvPr/>
-        </p:nvSpPr>
-        <p:spPr>
-          <a:xfrm>
-            <a:off x="685800" y="1755648"/>
-            <a:ext cx="3474720" cy="457200"/>
+              <a:t>Hoge vaste kosten</a:t>
+            </a:r>
+            <a:endParaRPr lang="en-US" sz="1300" dirty="0"/>
+          </a:p>
+          <a:p>
+            <a:pPr algn="l" marL="342900" indent="-342900">
+              <a:lnSpc>
+                <a:spcPct val="120000"/>
+              </a:lnSpc>
+              <a:buSzPct val="100000"/>
+              <a:buChar char="■"/>
+            </a:pPr>
+            <a:r>
+              <a:rPr lang="en-US" sz="1300" dirty="0">
+                <a:solidFill>
+                  <a:srgbClr val="2D3748"/>
+                </a:solidFill>
+                <a:latin typeface="Arial" pitchFamily="34" charset="0"/>
+                <a:ea typeface="Arial" pitchFamily="34" charset="-122"/>
+                <a:cs typeface="Arial" pitchFamily="34" charset="-120"/>
+              </a:rPr>
+              <a:t>Lage variabele kosten</a:t>
+            </a:r>
+            <a:endParaRPr lang="en-US" sz="1300" dirty="0"/>
+          </a:p>
+          <a:p>
+            <a:pPr algn="l" marL="342900" indent="-342900">
+              <a:lnSpc>
+                <a:spcPct val="120000"/>
+              </a:lnSpc>
+              <a:buSzPct val="100000"/>
+              <a:buChar char="■"/>
+            </a:pPr>
+            <a:r>
+              <a:rPr lang="en-US" sz="1300" b="1" dirty="0">
+                <a:solidFill>
+                  <a:srgbClr val="154360"/>
+                </a:solidFill>
+                <a:latin typeface="Arial" pitchFamily="34" charset="0"/>
+                <a:ea typeface="Arial" pitchFamily="34" charset="-122"/>
+                <a:cs typeface="Arial" pitchFamily="34" charset="-120"/>
+              </a:rPr>
+              <a:t>GTK daalt bij meer productie</a:t>
+            </a:r>
+            <a:endParaRPr lang="en-US" sz="1300" dirty="0"/>
+          </a:p>
+          <a:p>
+            <a:pPr algn="l" marL="342900" indent="-342900">
+              <a:lnSpc>
+                <a:spcPct val="120000"/>
+              </a:lnSpc>
+              <a:buSzPct val="100000"/>
+              <a:buChar char="■"/>
+            </a:pPr>
+            <a:r>
+              <a:rPr lang="en-US" sz="1300" dirty="0">
+                <a:solidFill>
+                  <a:srgbClr val="2D3748"/>
+                </a:solidFill>
+                <a:latin typeface="Arial" pitchFamily="34" charset="0"/>
+                <a:ea typeface="Arial" pitchFamily="34" charset="-122"/>
+                <a:cs typeface="Arial" pitchFamily="34" charset="-120"/>
+              </a:rPr>
+              <a:t>één aanbieder is goedkoper dan twee</a:t>
+            </a:r>
+            <a:endParaRPr lang="en-US" sz="1300" dirty="0"/>
+          </a:p>
+        </p:txBody>
+      </p:sp>
+      <p:sp>
+        <p:nvSpPr>
+          <p:cNvPr id="7" name="Shape 5"/>
+          <p:cNvSpPr/>
+          <p:nvPr/>
+        </p:nvSpPr>
+        <p:spPr>
+          <a:xfrm>
+            <a:off x="4754880" y="960120"/>
+            <a:ext cx="3931920" cy="3566160"/>
           </a:xfrm>
           <a:prstGeom prst="rect">
             <a:avLst>
-              <a:gd name="adj" fmla="val 10000"/>
+              <a:gd name="adj" fmla="val 1282"/>
             </a:avLst>
           </a:prstGeom>
           <a:solidFill>
-            <a:srgbClr val="F9F6F1"/>
+            <a:srgbClr val="FFF8E1"/>
           </a:solidFill>
-          <a:ln w="12700">
-            <a:solidFill>
-              <a:srgbClr val="1A5276"/>
-            </a:solidFill>
-            <a:prstDash val="solid"/>
-          </a:ln>
+          <a:ln/>
           <a:effectLst>
             <a:outerShdw sx="100000" sy="100000" kx="0" ky="0" algn="bl" rotWithShape="0" blurRad="76200" dist="25400" dir="8100000">
               <a:srgbClr val="000000">
@@ -3700,21 +7214,37 @@
             </a:outerShdw>
           </a:effectLst>
         </p:spPr>
-        <p:txBody>
-          <a:bodyPr/>
-          <a:p/>
-        </p:txBody>
-      </p:sp>
-      <p:sp>
-        <p:nvSpPr>
-          <p:cNvPr id="7" name="Text 5"/>
-          <p:cNvSpPr/>
-          <p:nvPr/>
-        </p:nvSpPr>
-        <p:spPr>
-          <a:xfrm>
-            <a:off x="685800" y="1755648"/>
-            <a:ext cx="3474720" cy="457200"/>
+      </p:sp>
+      <p:sp>
+        <p:nvSpPr>
+          <p:cNvPr id="8" name="Shape 6"/>
+          <p:cNvSpPr/>
+          <p:nvPr/>
+        </p:nvSpPr>
+        <p:spPr>
+          <a:xfrm>
+            <a:off x="4754880" y="960120"/>
+            <a:ext cx="54864" cy="3566160"/>
+          </a:xfrm>
+          <a:prstGeom prst="rect">
+            <a:avLst/>
+          </a:prstGeom>
+          <a:solidFill>
+            <a:srgbClr val="B58500"/>
+          </a:solidFill>
+          <a:ln/>
+        </p:spPr>
+      </p:sp>
+      <p:sp>
+        <p:nvSpPr>
+          <p:cNvPr id="9" name="Text 7"/>
+          <p:cNvSpPr/>
+          <p:nvPr/>
+        </p:nvSpPr>
+        <p:spPr>
+          <a:xfrm>
+            <a:off x="4937760" y="1069848"/>
+            <a:ext cx="3611880" cy="365760"/>
           </a:xfrm>
           <a:prstGeom prst="rect">
             <a:avLst/>
@@ -3723,365 +7253,37 @@
           <a:ln/>
         </p:spPr>
         <p:txBody>
-          <a:bodyPr wrap="square" rtlCol="0" anchor="ctr"/>
-          <a:lstStyle/>
-          <a:p>
-            <a:pPr algn="ctr" indent="0" marL="0">
-              <a:buNone/>
-            </a:pPr>
-            <a:r>
-              <a:rPr lang="en-US" sz="1400" b="1" dirty="0">
-                <a:solidFill>
-                  <a:srgbClr val="2D3748"/>
-                </a:solidFill>
-                <a:latin typeface="Arial" pitchFamily="34" charset="0"/>
-                <a:ea typeface="Arial" pitchFamily="34" charset="-122"/>
-                <a:cs typeface="Arial" pitchFamily="34" charset="-120"/>
-              </a:rPr>
-              <a:t>Vervuiling ontstaat</a:t>
-            </a:r>
-            <a:endParaRPr lang="en-US" sz="1400" dirty="0"/>
-          </a:p>
-        </p:txBody>
-      </p:sp>
-      <p:sp>
-        <p:nvSpPr>
-          <p:cNvPr id="8" name="Text 6"/>
-          <p:cNvSpPr/>
-          <p:nvPr/>
-        </p:nvSpPr>
-        <p:spPr>
-          <a:xfrm>
-            <a:off x="685800" y="2212848"/>
-            <a:ext cx="3474720" cy="201168"/>
-          </a:xfrm>
-          <a:prstGeom prst="rect">
-            <a:avLst/>
-          </a:prstGeom>
-          <a:noFill/>
-          <a:ln/>
-        </p:spPr>
-        <p:txBody>
-          <a:bodyPr wrap="square" rtlCol="0" anchor="ctr"/>
-          <a:lstStyle/>
-          <a:p>
-            <a:pPr algn="ctr" indent="0" marL="0">
-              <a:buNone/>
-            </a:pPr>
-            <a:r>
-              <a:rPr lang="en-US" sz="1600" b="1" dirty="0">
-                <a:solidFill>
-                  <a:srgbClr val="1A5276"/>
-                </a:solidFill>
-                <a:latin typeface="Arial" pitchFamily="34" charset="0"/>
-                <a:ea typeface="Arial" pitchFamily="34" charset="-122"/>
-                <a:cs typeface="Arial" pitchFamily="34" charset="-120"/>
-              </a:rPr>
-              <a:t>↓</a:t>
-            </a:r>
-            <a:endParaRPr lang="en-US" sz="1600" dirty="0"/>
-          </a:p>
-        </p:txBody>
-      </p:sp>
-      <p:sp>
-        <p:nvSpPr>
-          <p:cNvPr id="9" name="Shape 7"/>
-          <p:cNvSpPr/>
-          <p:nvPr/>
-        </p:nvSpPr>
-        <p:spPr>
-          <a:xfrm>
-            <a:off x="685800" y="2414016"/>
-            <a:ext cx="3474720" cy="457200"/>
-          </a:xfrm>
-          <a:prstGeom prst="rect">
-            <a:avLst>
-              <a:gd name="adj" fmla="val 10000"/>
-            </a:avLst>
-          </a:prstGeom>
-          <a:solidFill>
-            <a:srgbClr val="F9F6F1"/>
-          </a:solidFill>
-          <a:ln w="12700">
-            <a:solidFill>
-              <a:srgbClr val="1A5276"/>
-            </a:solidFill>
-            <a:prstDash val="solid"/>
-          </a:ln>
-          <a:effectLst>
-            <a:outerShdw sx="100000" sy="100000" kx="0" ky="0" algn="bl" rotWithShape="0" blurRad="76200" dist="25400" dir="8100000">
-              <a:srgbClr val="000000">
-                <a:alpha val="10000"/>
-              </a:srgbClr>
-            </a:outerShdw>
-          </a:effectLst>
-        </p:spPr>
-        <p:txBody>
-          <a:bodyPr/>
-          <a:p/>
-        </p:txBody>
-      </p:sp>
-      <p:sp>
-        <p:nvSpPr>
-          <p:cNvPr id="10" name="Text 8"/>
-          <p:cNvSpPr/>
-          <p:nvPr/>
-        </p:nvSpPr>
-        <p:spPr>
-          <a:xfrm>
-            <a:off x="685800" y="2414016"/>
-            <a:ext cx="3474720" cy="457200"/>
-          </a:xfrm>
-          <a:prstGeom prst="rect">
-            <a:avLst/>
-          </a:prstGeom>
-          <a:noFill/>
-          <a:ln/>
-        </p:spPr>
-        <p:txBody>
-          <a:bodyPr wrap="square" rtlCol="0" anchor="ctr"/>
-          <a:lstStyle/>
-          <a:p>
-            <a:pPr algn="ctr" indent="0" marL="0">
-              <a:buNone/>
-            </a:pPr>
-            <a:r>
-              <a:rPr lang="en-US" sz="1400" b="1" dirty="0">
-                <a:solidFill>
-                  <a:srgbClr val="2D3748"/>
-                </a:solidFill>
-                <a:latin typeface="Arial" pitchFamily="34" charset="0"/>
-                <a:ea typeface="Arial" pitchFamily="34" charset="-122"/>
-                <a:cs typeface="Arial" pitchFamily="34" charset="-120"/>
-              </a:rPr>
-              <a:t>Derden lijden schade</a:t>
-            </a:r>
-            <a:endParaRPr lang="en-US" sz="1400" dirty="0"/>
-          </a:p>
-        </p:txBody>
-      </p:sp>
-      <p:sp>
-        <p:nvSpPr>
-          <p:cNvPr id="11" name="Text 9"/>
-          <p:cNvSpPr/>
-          <p:nvPr/>
-        </p:nvSpPr>
-        <p:spPr>
-          <a:xfrm>
-            <a:off x="685800" y="2871216"/>
-            <a:ext cx="3474720" cy="201168"/>
-          </a:xfrm>
-          <a:prstGeom prst="rect">
-            <a:avLst/>
-          </a:prstGeom>
-          <a:noFill/>
-          <a:ln/>
-        </p:spPr>
-        <p:txBody>
-          <a:bodyPr wrap="square" rtlCol="0" anchor="ctr"/>
-          <a:lstStyle/>
-          <a:p>
-            <a:pPr algn="ctr" indent="0" marL="0">
-              <a:buNone/>
-            </a:pPr>
-            <a:r>
-              <a:rPr lang="en-US" sz="1600" b="1" dirty="0">
-                <a:solidFill>
-                  <a:srgbClr val="1A5276"/>
-                </a:solidFill>
-                <a:latin typeface="Arial" pitchFamily="34" charset="0"/>
-                <a:ea typeface="Arial" pitchFamily="34" charset="-122"/>
-                <a:cs typeface="Arial" pitchFamily="34" charset="-120"/>
-              </a:rPr>
-              <a:t>↓</a:t>
-            </a:r>
-            <a:endParaRPr lang="en-US" sz="1600" dirty="0"/>
-          </a:p>
-        </p:txBody>
-      </p:sp>
-      <p:sp>
-        <p:nvSpPr>
-          <p:cNvPr id="12" name="Shape 10"/>
-          <p:cNvSpPr/>
-          <p:nvPr/>
-        </p:nvSpPr>
-        <p:spPr>
-          <a:xfrm>
-            <a:off x="685800" y="3072384"/>
-            <a:ext cx="3474720" cy="457200"/>
-          </a:xfrm>
-          <a:prstGeom prst="rect">
-            <a:avLst>
-              <a:gd name="adj" fmla="val 10000"/>
-            </a:avLst>
-          </a:prstGeom>
-          <a:solidFill>
-            <a:srgbClr val="1A5276"/>
-          </a:solidFill>
-          <a:ln w="12700">
-            <a:solidFill>
-              <a:srgbClr val="1A5276"/>
-            </a:solidFill>
-            <a:prstDash val="solid"/>
-          </a:ln>
-          <a:effectLst>
-            <a:outerShdw sx="100000" sy="100000" kx="0" ky="0" algn="bl" rotWithShape="0" blurRad="76200" dist="25400" dir="8100000">
-              <a:srgbClr val="000000">
-                <a:alpha val="10000"/>
-              </a:srgbClr>
-            </a:outerShdw>
-          </a:effectLst>
-        </p:spPr>
-        <p:txBody>
-          <a:bodyPr/>
-          <a:p/>
-        </p:txBody>
-      </p:sp>
-      <p:sp>
-        <p:nvSpPr>
-          <p:cNvPr id="13" name="Text 11"/>
-          <p:cNvSpPr/>
-          <p:nvPr/>
-        </p:nvSpPr>
-        <p:spPr>
-          <a:xfrm>
-            <a:off x="685800" y="3072384"/>
-            <a:ext cx="3474720" cy="457200"/>
-          </a:xfrm>
-          <a:prstGeom prst="rect">
-            <a:avLst/>
-          </a:prstGeom>
-          <a:noFill/>
-          <a:ln/>
-        </p:spPr>
-        <p:txBody>
-          <a:bodyPr wrap="square" rtlCol="0" anchor="ctr"/>
-          <a:lstStyle/>
-          <a:p>
-            <a:pPr algn="ctr" indent="0" marL="0">
-              <a:buNone/>
-            </a:pPr>
-            <a:r>
-              <a:rPr lang="en-US" sz="1400" b="1" dirty="0">
-                <a:solidFill>
-                  <a:srgbClr val="FFFFFF"/>
-                </a:solidFill>
-                <a:latin typeface="Arial" pitchFamily="34" charset="0"/>
-                <a:ea typeface="Arial" pitchFamily="34" charset="-122"/>
-                <a:cs typeface="Arial" pitchFamily="34" charset="-120"/>
-              </a:rPr>
-              <a:t>Kosten niet in de prijs</a:t>
-            </a:r>
-            <a:endParaRPr lang="en-US" sz="1400" dirty="0"/>
-          </a:p>
-        </p:txBody>
-      </p:sp>
-      <p:sp>
-        <p:nvSpPr>
-          <p:cNvPr id="14" name="Shape 12"/>
-          <p:cNvSpPr/>
-          <p:nvPr/>
-        </p:nvSpPr>
-        <p:spPr>
-          <a:xfrm>
-            <a:off x="4754880" y="1005840"/>
-            <a:ext cx="3931920" cy="2926080"/>
-          </a:xfrm>
-          <a:prstGeom prst="rect">
-            <a:avLst>
-              <a:gd name="adj" fmla="val 1563"/>
-            </a:avLst>
-          </a:prstGeom>
-          <a:solidFill>
-            <a:srgbClr val="F9F6F1"/>
-          </a:solidFill>
-          <a:ln/>
-          <a:effectLst>
-            <a:outerShdw sx="100000" sy="100000" kx="0" ky="0" algn="bl" rotWithShape="0" blurRad="76200" dist="25400" dir="8100000">
-              <a:srgbClr val="000000">
-                <a:alpha val="10000"/>
-              </a:srgbClr>
-            </a:outerShdw>
-          </a:effectLst>
-        </p:spPr>
-        <p:txBody>
-          <a:bodyPr/>
-          <a:p/>
-        </p:txBody>
-      </p:sp>
-      <p:sp>
-        <p:nvSpPr>
-          <p:cNvPr id="15" name="Shape 13"/>
-          <p:cNvSpPr/>
-          <p:nvPr/>
-        </p:nvSpPr>
-        <p:spPr>
-          <a:xfrm>
-            <a:off x="4754880" y="1005840"/>
-            <a:ext cx="54864" cy="2926080"/>
-          </a:xfrm>
-          <a:prstGeom prst="rect">
-            <a:avLst/>
-          </a:prstGeom>
-          <a:solidFill>
-            <a:srgbClr val="1A5276"/>
-          </a:solidFill>
-          <a:ln/>
-        </p:spPr>
-        <p:txBody>
-          <a:bodyPr/>
-          <a:p/>
-        </p:txBody>
-      </p:sp>
-      <p:sp>
-        <p:nvSpPr>
-          <p:cNvPr id="16" name="Text 14"/>
-          <p:cNvSpPr/>
-          <p:nvPr/>
-        </p:nvSpPr>
-        <p:spPr>
-          <a:xfrm>
-            <a:off x="4937760" y="1143000"/>
-            <a:ext cx="3611880" cy="365760"/>
-          </a:xfrm>
-          <a:prstGeom prst="rect">
-            <a:avLst/>
-          </a:prstGeom>
-          <a:noFill/>
-          <a:ln/>
-        </p:spPr>
-        <p:txBody>
-          <a:bodyPr wrap="square" rtlCol="0" anchor="t"/>
+          <a:bodyPr wrap="square" lIns="0" tIns="0" rIns="0" bIns="0" rtlCol="0" anchor="t"/>
           <a:lstStyle/>
           <a:p>
             <a:pPr indent="0" marL="0">
               <a:buNone/>
             </a:pPr>
             <a:r>
-              <a:rPr lang="en-US" sz="2000" b="1" dirty="0">
-                <a:solidFill>
-                  <a:srgbClr val="1A5276"/>
-                </a:solidFill>
-                <a:latin typeface="Arial" pitchFamily="34" charset="0"/>
-                <a:ea typeface="Arial" pitchFamily="34" charset="-122"/>
-                <a:cs typeface="Arial" pitchFamily="34" charset="-120"/>
-              </a:rPr>
-              <a:t>Voorbeeld</a:t>
-            </a:r>
-            <a:endParaRPr lang="en-US" sz="2000" dirty="0"/>
-          </a:p>
-        </p:txBody>
-      </p:sp>
-      <p:sp>
-        <p:nvSpPr>
-          <p:cNvPr id="17" name="Text 15"/>
-          <p:cNvSpPr/>
-          <p:nvPr/>
-        </p:nvSpPr>
-        <p:spPr>
-          <a:xfrm>
-            <a:off x="4937760" y="1554480"/>
-            <a:ext cx="3611880" cy="2240280"/>
+              <a:rPr lang="en-US" sz="1800" b="1" dirty="0">
+                <a:solidFill>
+                  <a:srgbClr val="7B4A12"/>
+                </a:solidFill>
+                <a:latin typeface="Arial" pitchFamily="34" charset="0"/>
+                <a:ea typeface="Arial" pitchFamily="34" charset="-122"/>
+                <a:cs typeface="Arial" pitchFamily="34" charset="-120"/>
+              </a:rPr>
+              <a:t>Voorbeelden</a:t>
+            </a:r>
+            <a:endParaRPr lang="en-US" sz="1800" dirty="0"/>
+          </a:p>
+        </p:txBody>
+      </p:sp>
+      <p:sp>
+        <p:nvSpPr>
+          <p:cNvPr id="10" name="Text 8"/>
+          <p:cNvSpPr/>
+          <p:nvPr/>
+        </p:nvSpPr>
+        <p:spPr>
+          <a:xfrm>
+            <a:off x="4937760" y="1463040"/>
+            <a:ext cx="3611880" cy="2926080"/>
           </a:xfrm>
           <a:prstGeom prst="rect">
             <a:avLst/>
@@ -4090,17 +7292,18 @@
           <a:ln/>
         </p:spPr>
         <p:txBody>
-          <a:bodyPr wrap="square" rtlCol="0" anchor="t"/>
-          <a:lstStyle/>
-          <a:p>
-            <a:pPr algn="l" indent="0" marL="0">
+          <a:bodyPr wrap="square" lIns="0" tIns="0" rIns="0" bIns="0" rtlCol="0" anchor="t"/>
+          <a:lstStyle/>
+          <a:p>
+            <a:pPr algn="l" marL="342900" indent="-342900">
               <a:lnSpc>
-                <a:spcPct val="115000"/>
+                <a:spcPct val="120000"/>
               </a:lnSpc>
-              <a:buNone/>
-            </a:pPr>
-            <a:r>
-              <a:rPr lang="en-US" sz="1400" dirty="0">
+              <a:buSzPct val="100000"/>
+              <a:buChar char="■"/>
+            </a:pPr>
+            <a:r>
+              <a:rPr lang="en-US" sz="1300" dirty="0">
                 <a:solidFill>
                   <a:srgbClr val="2D3748"/>
                 </a:solidFill>
@@ -4108,27 +7311,72 @@
                 <a:ea typeface="Arial" pitchFamily="34" charset="-122"/>
                 <a:cs typeface="Arial" pitchFamily="34" charset="-120"/>
               </a:rPr>
-              <a:t>Vliegverkeer veroorzaakt luchtvervuiling — de kosten betaalt de maatschappij, niet de reiziger.
-</a:t>
-            </a:r>
-            <a:pPr algn="l" indent="0" marL="0">
+              <a:t>Waterleidingnet — één net is goedkoper dan twee</a:t>
+            </a:r>
+            <a:endParaRPr lang="en-US" sz="1300" dirty="0"/>
+          </a:p>
+          <a:p>
+            <a:pPr algn="l" marL="342900" indent="-342900">
               <a:lnSpc>
-                <a:spcPct val="115000"/>
+                <a:spcPct val="120000"/>
               </a:lnSpc>
-              <a:buNone/>
-            </a:pPr>
-            <a:r>
-              <a:rPr lang="en-US" sz="1400" b="1" dirty="0">
-                <a:solidFill>
-                  <a:srgbClr val="D9534F"/>
-                </a:solidFill>
-                <a:latin typeface="Arial" pitchFamily="34" charset="0"/>
-                <a:ea typeface="Arial" pitchFamily="34" charset="-122"/>
-                <a:cs typeface="Arial" pitchFamily="34" charset="-120"/>
-              </a:rPr>
-              <a:t>De prijs is te laag → te veel productie → welvaartsverlies</a:t>
-            </a:r>
-            <a:endParaRPr lang="en-US" sz="1400" dirty="0"/>
+              <a:buSzPct val="100000"/>
+              <a:buChar char="■"/>
+            </a:pPr>
+            <a:r>
+              <a:rPr lang="en-US" sz="1300" dirty="0">
+                <a:solidFill>
+                  <a:srgbClr val="2D3748"/>
+                </a:solidFill>
+                <a:latin typeface="Arial" pitchFamily="34" charset="0"/>
+                <a:ea typeface="Arial" pitchFamily="34" charset="-122"/>
+                <a:cs typeface="Arial" pitchFamily="34" charset="-120"/>
+              </a:rPr>
+              <a:t>Spoorwegen — dubbele rails zijn onnodig duur</a:t>
+            </a:r>
+            <a:endParaRPr lang="en-US" sz="1300" dirty="0"/>
+          </a:p>
+          <a:p>
+            <a:pPr algn="l" marL="342900" indent="-342900">
+              <a:lnSpc>
+                <a:spcPct val="120000"/>
+              </a:lnSpc>
+              <a:buSzPct val="100000"/>
+              <a:buChar char="■"/>
+            </a:pPr>
+            <a:r>
+              <a:rPr lang="en-US" sz="1300" dirty="0">
+                <a:solidFill>
+                  <a:srgbClr val="2D3748"/>
+                </a:solidFill>
+                <a:latin typeface="Arial" pitchFamily="34" charset="0"/>
+                <a:ea typeface="Arial" pitchFamily="34" charset="-122"/>
+                <a:cs typeface="Arial" pitchFamily="34" charset="-120"/>
+              </a:rPr>
+              <a:t>Elektriciteitsnet — netwerk is natuurlijk monopolie</a:t>
+            </a:r>
+            <a:endParaRPr lang="en-US" sz="1300" dirty="0"/>
+          </a:p>
+          <a:p>
+            <a:pPr algn="l" marL="342900" indent="-342900">
+              <a:lnSpc>
+                <a:spcPct val="120000"/>
+              </a:lnSpc>
+              <a:buSzPct val="100000"/>
+              <a:buChar char="■"/>
+            </a:pPr>
+            <a:r>
+              <a:rPr lang="en-US" sz="1300" dirty="0">
+                <a:solidFill>
+                  <a:srgbClr val="2D3748"/>
+                </a:solidFill>
+                <a:latin typeface="Arial" pitchFamily="34" charset="0"/>
+                <a:ea typeface="Arial" pitchFamily="34" charset="-122"/>
+                <a:cs typeface="Arial" pitchFamily="34" charset="-120"/>
+              </a:rPr>
+              <a:t>Postbezorging — meer volume → lagere GTK</a:t>
+            </a:r>
+            <a:endParaRPr lang="en-US" sz="1300" dirty="0"/>
           </a:p>
         </p:txBody>
       </p:sp>
@@ -4190,593 +7438,36 @@
                 <a:ea typeface="Arial" pitchFamily="34" charset="-122"/>
                 <a:cs typeface="Arial" pitchFamily="34" charset="-120"/>
               </a:rPr>
-              <a:t>Positieve externe effecten</a:t>
+              <a:t>Waarom één aanbieder goedkoper is</a:t>
             </a:r>
             <a:endParaRPr lang="en-US" sz="2400" dirty="0"/>
           </a:p>
         </p:txBody>
       </p:sp>
-      <p:sp>
-        <p:nvSpPr>
-          <p:cNvPr id="3" name="Shape 1"/>
-          <p:cNvSpPr/>
-          <p:nvPr/>
-        </p:nvSpPr>
-        <p:spPr>
-          <a:xfrm>
-            <a:off x="685800" y="1097280"/>
-            <a:ext cx="3474720" cy="457200"/>
-          </a:xfrm>
-          <a:prstGeom prst="rect">
-            <a:avLst>
-              <a:gd name="adj" fmla="val 10000"/>
-            </a:avLst>
-          </a:prstGeom>
-          <a:solidFill>
-            <a:srgbClr val="F9F6F1"/>
-          </a:solidFill>
-          <a:ln w="12700">
-            <a:solidFill>
-              <a:srgbClr val="1E8449"/>
-            </a:solidFill>
-            <a:prstDash val="solid"/>
-          </a:ln>
-          <a:effectLst>
-            <a:outerShdw sx="100000" sy="100000" kx="0" ky="0" algn="bl" rotWithShape="0" blurRad="76200" dist="25400" dir="8100000">
-              <a:srgbClr val="000000">
-                <a:alpha val="10000"/>
-              </a:srgbClr>
-            </a:outerShdw>
-          </a:effectLst>
-        </p:spPr>
-        <p:txBody>
-          <a:bodyPr/>
-          <a:p/>
-        </p:txBody>
-      </p:sp>
-      <p:sp>
-        <p:nvSpPr>
-          <p:cNvPr id="4" name="Text 2"/>
-          <p:cNvSpPr/>
-          <p:nvPr/>
-        </p:nvSpPr>
-        <p:spPr>
-          <a:xfrm>
-            <a:off x="685800" y="1097280"/>
-            <a:ext cx="3474720" cy="457200"/>
-          </a:xfrm>
-          <a:prstGeom prst="rect">
-            <a:avLst/>
-          </a:prstGeom>
-          <a:noFill/>
-          <a:ln/>
-        </p:spPr>
-        <p:txBody>
-          <a:bodyPr wrap="square" rtlCol="0" anchor="ctr"/>
-          <a:lstStyle/>
-          <a:p>
-            <a:pPr algn="ctr" indent="0" marL="0">
-              <a:buNone/>
-            </a:pPr>
-            <a:r>
-              <a:rPr lang="en-US" sz="1400" b="1" dirty="0">
-                <a:solidFill>
-                  <a:srgbClr val="2D3748"/>
-                </a:solidFill>
-                <a:latin typeface="Arial" pitchFamily="34" charset="0"/>
-                <a:ea typeface="Arial" pitchFamily="34" charset="-122"/>
-                <a:cs typeface="Arial" pitchFamily="34" charset="-120"/>
-              </a:rPr>
-              <a:t>Iemand koopt vaccinatie</a:t>
-            </a:r>
-            <a:endParaRPr lang="en-US" sz="1400" dirty="0"/>
-          </a:p>
-        </p:txBody>
-      </p:sp>
-      <p:sp>
-        <p:nvSpPr>
-          <p:cNvPr id="5" name="Text 3"/>
-          <p:cNvSpPr/>
-          <p:nvPr/>
-        </p:nvSpPr>
-        <p:spPr>
-          <a:xfrm>
-            <a:off x="685800" y="1554480"/>
-            <a:ext cx="3474720" cy="201168"/>
-          </a:xfrm>
-          <a:prstGeom prst="rect">
-            <a:avLst/>
-          </a:prstGeom>
-          <a:noFill/>
-          <a:ln/>
-        </p:spPr>
-        <p:txBody>
-          <a:bodyPr wrap="square" rtlCol="0" anchor="ctr"/>
-          <a:lstStyle/>
-          <a:p>
-            <a:pPr algn="ctr" indent="0" marL="0">
-              <a:buNone/>
-            </a:pPr>
-            <a:r>
-              <a:rPr lang="en-US" sz="1600" b="1" dirty="0">
-                <a:solidFill>
-                  <a:srgbClr val="1E8449"/>
-                </a:solidFill>
-                <a:latin typeface="Arial" pitchFamily="34" charset="0"/>
-                <a:ea typeface="Arial" pitchFamily="34" charset="-122"/>
-                <a:cs typeface="Arial" pitchFamily="34" charset="-120"/>
-              </a:rPr>
-              <a:t>↓</a:t>
-            </a:r>
-            <a:endParaRPr lang="en-US" sz="1600" dirty="0"/>
-          </a:p>
-        </p:txBody>
-      </p:sp>
-      <p:sp>
-        <p:nvSpPr>
-          <p:cNvPr id="6" name="Shape 4"/>
-          <p:cNvSpPr/>
-          <p:nvPr/>
-        </p:nvSpPr>
-        <p:spPr>
-          <a:xfrm>
-            <a:off x="685800" y="1755648"/>
-            <a:ext cx="3474720" cy="457200"/>
-          </a:xfrm>
-          <a:prstGeom prst="rect">
-            <a:avLst>
-              <a:gd name="adj" fmla="val 10000"/>
-            </a:avLst>
-          </a:prstGeom>
-          <a:solidFill>
-            <a:srgbClr val="F9F6F1"/>
-          </a:solidFill>
-          <a:ln w="12700">
-            <a:solidFill>
-              <a:srgbClr val="1E8449"/>
-            </a:solidFill>
-            <a:prstDash val="solid"/>
-          </a:ln>
-          <a:effectLst>
-            <a:outerShdw sx="100000" sy="100000" kx="0" ky="0" algn="bl" rotWithShape="0" blurRad="76200" dist="25400" dir="8100000">
-              <a:srgbClr val="000000">
-                <a:alpha val="10000"/>
-              </a:srgbClr>
-            </a:outerShdw>
-          </a:effectLst>
-        </p:spPr>
-        <p:txBody>
-          <a:bodyPr/>
-          <a:p/>
-        </p:txBody>
-      </p:sp>
-      <p:sp>
-        <p:nvSpPr>
-          <p:cNvPr id="7" name="Text 5"/>
-          <p:cNvSpPr/>
-          <p:nvPr/>
-        </p:nvSpPr>
-        <p:spPr>
-          <a:xfrm>
-            <a:off x="685800" y="1755648"/>
-            <a:ext cx="3474720" cy="457200"/>
-          </a:xfrm>
-          <a:prstGeom prst="rect">
-            <a:avLst/>
-          </a:prstGeom>
-          <a:noFill/>
-          <a:ln/>
-        </p:spPr>
-        <p:txBody>
-          <a:bodyPr wrap="square" rtlCol="0" anchor="ctr"/>
-          <a:lstStyle/>
-          <a:p>
-            <a:pPr algn="ctr" indent="0" marL="0">
-              <a:buNone/>
-            </a:pPr>
-            <a:r>
-              <a:rPr lang="en-US" sz="1400" b="1" dirty="0">
-                <a:solidFill>
-                  <a:srgbClr val="2D3748"/>
-                </a:solidFill>
-                <a:latin typeface="Arial" pitchFamily="34" charset="0"/>
-                <a:ea typeface="Arial" pitchFamily="34" charset="-122"/>
-                <a:cs typeface="Arial" pitchFamily="34" charset="-120"/>
-              </a:rPr>
-              <a:t>Minder besmetting</a:t>
-            </a:r>
-            <a:endParaRPr lang="en-US" sz="1400" dirty="0"/>
-          </a:p>
-        </p:txBody>
-      </p:sp>
-      <p:sp>
-        <p:nvSpPr>
-          <p:cNvPr id="8" name="Text 6"/>
-          <p:cNvSpPr/>
-          <p:nvPr/>
-        </p:nvSpPr>
-        <p:spPr>
-          <a:xfrm>
-            <a:off x="685800" y="2212848"/>
-            <a:ext cx="3474720" cy="201168"/>
-          </a:xfrm>
-          <a:prstGeom prst="rect">
-            <a:avLst/>
-          </a:prstGeom>
-          <a:noFill/>
-          <a:ln/>
-        </p:spPr>
-        <p:txBody>
-          <a:bodyPr wrap="square" rtlCol="0" anchor="ctr"/>
-          <a:lstStyle/>
-          <a:p>
-            <a:pPr algn="ctr" indent="0" marL="0">
-              <a:buNone/>
-            </a:pPr>
-            <a:r>
-              <a:rPr lang="en-US" sz="1600" b="1" dirty="0">
-                <a:solidFill>
-                  <a:srgbClr val="1E8449"/>
-                </a:solidFill>
-                <a:latin typeface="Arial" pitchFamily="34" charset="0"/>
-                <a:ea typeface="Arial" pitchFamily="34" charset="-122"/>
-                <a:cs typeface="Arial" pitchFamily="34" charset="-120"/>
-              </a:rPr>
-              <a:t>↓</a:t>
-            </a:r>
-            <a:endParaRPr lang="en-US" sz="1600" dirty="0"/>
-          </a:p>
-        </p:txBody>
-      </p:sp>
-      <p:sp>
-        <p:nvSpPr>
-          <p:cNvPr id="9" name="Shape 7"/>
-          <p:cNvSpPr/>
-          <p:nvPr/>
-        </p:nvSpPr>
-        <p:spPr>
-          <a:xfrm>
-            <a:off x="685800" y="2414016"/>
-            <a:ext cx="3474720" cy="457200"/>
-          </a:xfrm>
-          <a:prstGeom prst="rect">
-            <a:avLst>
-              <a:gd name="adj" fmla="val 10000"/>
-            </a:avLst>
-          </a:prstGeom>
-          <a:solidFill>
-            <a:srgbClr val="F9F6F1"/>
-          </a:solidFill>
-          <a:ln w="12700">
-            <a:solidFill>
-              <a:srgbClr val="1E8449"/>
-            </a:solidFill>
-            <a:prstDash val="solid"/>
-          </a:ln>
-          <a:effectLst>
-            <a:outerShdw sx="100000" sy="100000" kx="0" ky="0" algn="bl" rotWithShape="0" blurRad="76200" dist="25400" dir="8100000">
-              <a:srgbClr val="000000">
-                <a:alpha val="10000"/>
-              </a:srgbClr>
-            </a:outerShdw>
-          </a:effectLst>
-        </p:spPr>
-        <p:txBody>
-          <a:bodyPr/>
-          <a:p/>
-        </p:txBody>
-      </p:sp>
-      <p:sp>
-        <p:nvSpPr>
-          <p:cNvPr id="10" name="Text 8"/>
-          <p:cNvSpPr/>
-          <p:nvPr/>
-        </p:nvSpPr>
-        <p:spPr>
-          <a:xfrm>
-            <a:off x="685800" y="2414016"/>
-            <a:ext cx="3474720" cy="457200"/>
-          </a:xfrm>
-          <a:prstGeom prst="rect">
-            <a:avLst/>
-          </a:prstGeom>
-          <a:noFill/>
-          <a:ln/>
-        </p:spPr>
-        <p:txBody>
-          <a:bodyPr wrap="square" rtlCol="0" anchor="ctr"/>
-          <a:lstStyle/>
-          <a:p>
-            <a:pPr algn="ctr" indent="0" marL="0">
-              <a:buNone/>
-            </a:pPr>
-            <a:r>
-              <a:rPr lang="en-US" sz="1400" b="1" dirty="0">
-                <a:solidFill>
-                  <a:srgbClr val="2D3748"/>
-                </a:solidFill>
-                <a:latin typeface="Arial" pitchFamily="34" charset="0"/>
-                <a:ea typeface="Arial" pitchFamily="34" charset="-122"/>
-                <a:cs typeface="Arial" pitchFamily="34" charset="-120"/>
-              </a:rPr>
-              <a:t>Derden profiteren mee</a:t>
-            </a:r>
-            <a:endParaRPr lang="en-US" sz="1400" dirty="0"/>
-          </a:p>
-        </p:txBody>
-      </p:sp>
-      <p:sp>
-        <p:nvSpPr>
-          <p:cNvPr id="11" name="Text 9"/>
-          <p:cNvSpPr/>
-          <p:nvPr/>
-        </p:nvSpPr>
-        <p:spPr>
-          <a:xfrm>
-            <a:off x="685800" y="2871216"/>
-            <a:ext cx="3474720" cy="201168"/>
-          </a:xfrm>
-          <a:prstGeom prst="rect">
-            <a:avLst/>
-          </a:prstGeom>
-          <a:noFill/>
-          <a:ln/>
-        </p:spPr>
-        <p:txBody>
-          <a:bodyPr wrap="square" rtlCol="0" anchor="ctr"/>
-          <a:lstStyle/>
-          <a:p>
-            <a:pPr algn="ctr" indent="0" marL="0">
-              <a:buNone/>
-            </a:pPr>
-            <a:r>
-              <a:rPr lang="en-US" sz="1600" b="1" dirty="0">
-                <a:solidFill>
-                  <a:srgbClr val="1E8449"/>
-                </a:solidFill>
-                <a:latin typeface="Arial" pitchFamily="34" charset="0"/>
-                <a:ea typeface="Arial" pitchFamily="34" charset="-122"/>
-                <a:cs typeface="Arial" pitchFamily="34" charset="-120"/>
-              </a:rPr>
-              <a:t>↓</a:t>
-            </a:r>
-            <a:endParaRPr lang="en-US" sz="1600" dirty="0"/>
-          </a:p>
-        </p:txBody>
-      </p:sp>
-      <p:sp>
-        <p:nvSpPr>
-          <p:cNvPr id="12" name="Shape 10"/>
-          <p:cNvSpPr/>
-          <p:nvPr/>
-        </p:nvSpPr>
-        <p:spPr>
-          <a:xfrm>
-            <a:off x="685800" y="3072384"/>
-            <a:ext cx="3474720" cy="457200"/>
-          </a:xfrm>
-          <a:prstGeom prst="rect">
-            <a:avLst>
-              <a:gd name="adj" fmla="val 10000"/>
-            </a:avLst>
-          </a:prstGeom>
-          <a:solidFill>
-            <a:srgbClr val="1E8449"/>
-          </a:solidFill>
-          <a:ln w="12700">
-            <a:solidFill>
-              <a:srgbClr val="1E8449"/>
-            </a:solidFill>
-            <a:prstDash val="solid"/>
-          </a:ln>
-          <a:effectLst>
-            <a:outerShdw sx="100000" sy="100000" kx="0" ky="0" algn="bl" rotWithShape="0" blurRad="76200" dist="25400" dir="8100000">
-              <a:srgbClr val="000000">
-                <a:alpha val="10000"/>
-              </a:srgbClr>
-            </a:outerShdw>
-          </a:effectLst>
-        </p:spPr>
-        <p:txBody>
-          <a:bodyPr/>
-          <a:p/>
-        </p:txBody>
-      </p:sp>
-      <p:sp>
-        <p:nvSpPr>
-          <p:cNvPr id="13" name="Text 11"/>
-          <p:cNvSpPr/>
-          <p:nvPr/>
-        </p:nvSpPr>
-        <p:spPr>
-          <a:xfrm>
-            <a:off x="685800" y="3072384"/>
-            <a:ext cx="3474720" cy="457200"/>
-          </a:xfrm>
-          <a:prstGeom prst="rect">
-            <a:avLst/>
-          </a:prstGeom>
-          <a:noFill/>
-          <a:ln/>
-        </p:spPr>
-        <p:txBody>
-          <a:bodyPr wrap="square" rtlCol="0" anchor="ctr"/>
-          <a:lstStyle/>
-          <a:p>
-            <a:pPr algn="ctr" indent="0" marL="0">
-              <a:buNone/>
-            </a:pPr>
-            <a:r>
-              <a:rPr lang="en-US" sz="1400" b="1" dirty="0">
-                <a:solidFill>
-                  <a:srgbClr val="FFFFFF"/>
-                </a:solidFill>
-                <a:latin typeface="Arial" pitchFamily="34" charset="0"/>
-                <a:ea typeface="Arial" pitchFamily="34" charset="-122"/>
-                <a:cs typeface="Arial" pitchFamily="34" charset="-120"/>
-              </a:rPr>
-              <a:t>Baten niet in de prijs</a:t>
-            </a:r>
-            <a:endParaRPr lang="en-US" sz="1400" dirty="0"/>
-          </a:p>
-        </p:txBody>
-      </p:sp>
-      <p:sp>
-        <p:nvSpPr>
-          <p:cNvPr id="14" name="Shape 12"/>
-          <p:cNvSpPr/>
-          <p:nvPr/>
-        </p:nvSpPr>
-        <p:spPr>
-          <a:xfrm>
-            <a:off x="4754880" y="1005840"/>
-            <a:ext cx="3931920" cy="2926080"/>
-          </a:xfrm>
-          <a:prstGeom prst="rect">
-            <a:avLst>
-              <a:gd name="adj" fmla="val 1563"/>
-            </a:avLst>
-          </a:prstGeom>
-          <a:solidFill>
-            <a:srgbClr val="E8F8F0"/>
-          </a:solidFill>
-          <a:ln/>
-          <a:effectLst>
-            <a:outerShdw sx="100000" sy="100000" kx="0" ky="0" algn="bl" rotWithShape="0" blurRad="76200" dist="25400" dir="8100000">
-              <a:srgbClr val="000000">
-                <a:alpha val="10000"/>
-              </a:srgbClr>
-            </a:outerShdw>
-          </a:effectLst>
-        </p:spPr>
-        <p:txBody>
-          <a:bodyPr/>
-          <a:p/>
-        </p:txBody>
-      </p:sp>
-      <p:sp>
-        <p:nvSpPr>
-          <p:cNvPr id="15" name="Shape 13"/>
-          <p:cNvSpPr/>
-          <p:nvPr/>
-        </p:nvSpPr>
-        <p:spPr>
-          <a:xfrm>
-            <a:off x="4754880" y="1005840"/>
-            <a:ext cx="54864" cy="2926080"/>
-          </a:xfrm>
-          <a:prstGeom prst="rect">
-            <a:avLst/>
-          </a:prstGeom>
-          <a:solidFill>
-            <a:srgbClr val="1E8449"/>
-          </a:solidFill>
-          <a:ln/>
-        </p:spPr>
-        <p:txBody>
-          <a:bodyPr/>
-          <a:p/>
-        </p:txBody>
-      </p:sp>
-      <p:sp>
-        <p:nvSpPr>
-          <p:cNvPr id="16" name="Text 14"/>
-          <p:cNvSpPr/>
-          <p:nvPr/>
-        </p:nvSpPr>
-        <p:spPr>
-          <a:xfrm>
-            <a:off x="4937760" y="1143000"/>
-            <a:ext cx="3611880" cy="365760"/>
-          </a:xfrm>
-          <a:prstGeom prst="rect">
-            <a:avLst/>
-          </a:prstGeom>
-          <a:noFill/>
-          <a:ln/>
-        </p:spPr>
-        <p:txBody>
-          <a:bodyPr wrap="square" rtlCol="0" anchor="t"/>
-          <a:lstStyle/>
-          <a:p>
-            <a:pPr indent="0" marL="0">
-              <a:buNone/>
-            </a:pPr>
-            <a:r>
-              <a:rPr lang="en-US" sz="2000" b="1" dirty="0">
-                <a:solidFill>
-                  <a:srgbClr val="1E8449"/>
-                </a:solidFill>
-                <a:latin typeface="Arial" pitchFamily="34" charset="0"/>
-                <a:ea typeface="Arial" pitchFamily="34" charset="-122"/>
-                <a:cs typeface="Arial" pitchFamily="34" charset="-120"/>
-              </a:rPr>
-              <a:t>Voorbeeld</a:t>
-            </a:r>
-            <a:endParaRPr lang="en-US" sz="2000" dirty="0"/>
-          </a:p>
-        </p:txBody>
-      </p:sp>
-      <p:sp>
-        <p:nvSpPr>
-          <p:cNvPr id="17" name="Text 15"/>
-          <p:cNvSpPr/>
-          <p:nvPr/>
-        </p:nvSpPr>
-        <p:spPr>
-          <a:xfrm>
-            <a:off x="4937760" y="1554480"/>
-            <a:ext cx="3611880" cy="2240280"/>
-          </a:xfrm>
-          <a:prstGeom prst="rect">
-            <a:avLst/>
-          </a:prstGeom>
-          <a:noFill/>
-          <a:ln/>
-        </p:spPr>
-        <p:txBody>
-          <a:bodyPr wrap="square" rtlCol="0" anchor="t"/>
-          <a:lstStyle/>
-          <a:p>
-            <a:pPr algn="l" indent="0" marL="0">
-              <a:lnSpc>
-                <a:spcPct val="115000"/>
-              </a:lnSpc>
-              <a:buNone/>
-            </a:pPr>
-            <a:r>
-              <a:rPr lang="en-US" sz="1400" dirty="0">
-                <a:solidFill>
-                  <a:srgbClr val="2D3748"/>
-                </a:solidFill>
-                <a:latin typeface="Arial" pitchFamily="34" charset="0"/>
-                <a:ea typeface="Arial" pitchFamily="34" charset="-122"/>
-                <a:cs typeface="Arial" pitchFamily="34" charset="-120"/>
-              </a:rPr>
-              <a:t>Vaccinatie beschermt niet alleen jezelf maar ook mensen om je heen.
-</a:t>
-            </a:r>
-            <a:pPr algn="l" indent="0" marL="0">
-              <a:lnSpc>
-                <a:spcPct val="115000"/>
-              </a:lnSpc>
-              <a:buNone/>
-            </a:pPr>
-            <a:r>
-              <a:rPr lang="en-US" sz="1400" b="1" dirty="0">
-                <a:solidFill>
-                  <a:srgbClr val="1E8449"/>
-                </a:solidFill>
-                <a:latin typeface="Arial" pitchFamily="34" charset="0"/>
-                <a:ea typeface="Arial" pitchFamily="34" charset="-122"/>
-                <a:cs typeface="Arial" pitchFamily="34" charset="-120"/>
-              </a:rPr>
-              <a:t>De prijs is te hoog → te weinig consumptie → welvaartsverlies</a:t>
-            </a:r>
-            <a:endParaRPr lang="en-US" sz="1400" dirty="0"/>
-          </a:p>
-        </p:txBody>
-      </p:sp>
+      <p:pic>
+        <p:nvPicPr>
+          <p:cNvPr id="3" name="Image 0" descr="preencoded.png">    </p:cNvPr>
+          <p:cNvPicPr>
+            <a:picLocks noChangeAspect="1"/>
+          </p:cNvPicPr>
+          <p:nvPr/>
+        </p:nvPicPr>
+        <p:blipFill>
+          <a:blip r:embed="rId1"/>
+          <a:stretch>
+            <a:fillRect/>
+          </a:stretch>
+        </p:blipFill>
+        <p:spPr>
+          <a:xfrm>
+            <a:off x="685800" y="868680"/>
+            <a:ext cx="7772400" cy="3886200"/>
+          </a:xfrm>
+          <a:prstGeom prst="rect">
+            <a:avLst/>
+          </a:prstGeom>
+        </p:spPr>
+      </p:pic>
     </p:spTree>
   </p:cSld>
   <p:clrMapOvr>
@@ -4835,7 +7526,7 @@
                 <a:ea typeface="Arial" pitchFamily="34" charset="-122"/>
                 <a:cs typeface="Arial" pitchFamily="34" charset="-120"/>
               </a:rPr>
-              <a:t>Internaliseren</a:t>
+              <a:t>Economische machtspositie</a:t>
             </a:r>
             <a:endParaRPr lang="en-US" sz="2400" dirty="0"/>
           </a:p>
@@ -4849,12 +7540,12 @@
         </p:nvSpPr>
         <p:spPr>
           <a:xfrm>
-            <a:off x="1371600" y="1097280"/>
-            <a:ext cx="6400800" cy="502920"/>
+            <a:off x="457200" y="1005840"/>
+            <a:ext cx="4206240" cy="594360"/>
           </a:xfrm>
           <a:prstGeom prst="rect">
             <a:avLst>
-              <a:gd name="adj" fmla="val 9091"/>
+              <a:gd name="adj" fmla="val 6154"/>
             </a:avLst>
           </a:prstGeom>
           <a:solidFill>
@@ -4869,10 +7560,6 @@
             </a:outerShdw>
           </a:effectLst>
         </p:spPr>
-        <p:txBody>
-          <a:bodyPr/>
-          <a:p/>
-        </p:txBody>
       </p:sp>
       <p:sp>
         <p:nvSpPr>
@@ -4882,8 +7569,8 @@
         </p:nvSpPr>
         <p:spPr>
           <a:xfrm>
-            <a:off x="1554480" y="1097280"/>
-            <a:ext cx="6035040" cy="502920"/>
+            <a:off x="621792" y="1005840"/>
+            <a:ext cx="3931920" cy="594360"/>
           </a:xfrm>
           <a:prstGeom prst="rect">
             <a:avLst/>
@@ -4892,14 +7579,14 @@
           <a:ln/>
         </p:spPr>
         <p:txBody>
-          <a:bodyPr wrap="square" rtlCol="0" anchor="ctr"/>
+          <a:bodyPr wrap="square" lIns="0" tIns="0" rIns="0" bIns="0" rtlCol="0" anchor="ctr"/>
           <a:lstStyle/>
           <a:p>
             <a:pPr indent="0" marL="0">
               <a:buNone/>
             </a:pPr>
             <a:r>
-              <a:rPr lang="en-US" sz="1500" dirty="0">
+              <a:rPr lang="en-US" sz="1400" dirty="0">
                 <a:solidFill>
                   <a:srgbClr val="2D3748"/>
                 </a:solidFill>
@@ -4907,9 +7594,9 @@
                 <a:ea typeface="Arial" pitchFamily="34" charset="-122"/>
                 <a:cs typeface="Arial" pitchFamily="34" charset="-120"/>
               </a:rPr>
-              <a:t>Negatief extern effect: vervuiling is gratis</a:t>
-            </a:r>
-            <a:endParaRPr lang="en-US" sz="1500" dirty="0"/>
+              <a:t>1. Bepaal het marktaandeel</a:t>
+            </a:r>
+            <a:endParaRPr lang="en-US" sz="1400" dirty="0"/>
           </a:p>
         </p:txBody>
       </p:sp>
@@ -4921,16 +7608,16 @@
         </p:nvSpPr>
         <p:spPr>
           <a:xfrm>
-            <a:off x="1371600" y="1709928"/>
-            <a:ext cx="6400800" cy="502920"/>
+            <a:off x="457200" y="1737360"/>
+            <a:ext cx="4206240" cy="594360"/>
           </a:xfrm>
           <a:prstGeom prst="rect">
             <a:avLst>
-              <a:gd name="adj" fmla="val 9091"/>
+              <a:gd name="adj" fmla="val 6154"/>
             </a:avLst>
           </a:prstGeom>
           <a:solidFill>
-            <a:srgbClr val="F9F6F1"/>
+            <a:srgbClr val="1A5276"/>
           </a:solidFill>
           <a:ln/>
           <a:effectLst>
@@ -4941,10 +7628,6 @@
             </a:outerShdw>
           </a:effectLst>
         </p:spPr>
-        <p:txBody>
-          <a:bodyPr/>
-          <a:p/>
-        </p:txBody>
       </p:sp>
       <p:sp>
         <p:nvSpPr>
@@ -4954,8 +7637,8 @@
         </p:nvSpPr>
         <p:spPr>
           <a:xfrm>
-            <a:off x="1554480" y="1709928"/>
-            <a:ext cx="6035040" cy="502920"/>
+            <a:off x="621792" y="1737360"/>
+            <a:ext cx="3931920" cy="594360"/>
           </a:xfrm>
           <a:prstGeom prst="rect">
             <a:avLst/>
@@ -4964,24 +7647,24 @@
           <a:ln/>
         </p:spPr>
         <p:txBody>
-          <a:bodyPr wrap="square" rtlCol="0" anchor="ctr"/>
+          <a:bodyPr wrap="square" lIns="0" tIns="0" rIns="0" bIns="0" rtlCol="0" anchor="ctr"/>
           <a:lstStyle/>
           <a:p>
             <a:pPr indent="0" marL="0">
               <a:buNone/>
             </a:pPr>
             <a:r>
-              <a:rPr lang="en-US" sz="1500" dirty="0">
-                <a:solidFill>
-                  <a:srgbClr val="2D3748"/>
-                </a:solidFill>
-                <a:latin typeface="Arial" pitchFamily="34" charset="0"/>
-                <a:ea typeface="Arial" pitchFamily="34" charset="-122"/>
-                <a:cs typeface="Arial" pitchFamily="34" charset="-120"/>
-              </a:rPr>
-              <a:t>↓  Overheid heft belasting (bijv. vliegtaks)</a:t>
-            </a:r>
-            <a:endParaRPr lang="en-US" sz="1500" dirty="0"/>
+              <a:rPr lang="en-US" sz="1400" b="1" dirty="0">
+                <a:solidFill>
+                  <a:srgbClr val="FFFFFF"/>
+                </a:solidFill>
+                <a:latin typeface="Arial" pitchFamily="34" charset="0"/>
+                <a:ea typeface="Arial" pitchFamily="34" charset="-122"/>
+                <a:cs typeface="Arial" pitchFamily="34" charset="-120"/>
+              </a:rPr>
+              <a:t>2. ≥ 35 %?   → machtspositie</a:t>
+            </a:r>
+            <a:endParaRPr lang="en-US" sz="1400" dirty="0"/>
           </a:p>
         </p:txBody>
       </p:sp>
@@ -4993,12 +7676,12 @@
         </p:nvSpPr>
         <p:spPr>
           <a:xfrm>
-            <a:off x="1371600" y="2322576"/>
-            <a:ext cx="6400800" cy="502920"/>
+            <a:off x="457200" y="2468880"/>
+            <a:ext cx="4206240" cy="594360"/>
           </a:xfrm>
           <a:prstGeom prst="rect">
             <a:avLst>
-              <a:gd name="adj" fmla="val 9091"/>
+              <a:gd name="adj" fmla="val 6154"/>
             </a:avLst>
           </a:prstGeom>
           <a:solidFill>
@@ -5013,10 +7696,6 @@
             </a:outerShdw>
           </a:effectLst>
         </p:spPr>
-        <p:txBody>
-          <a:bodyPr/>
-          <a:p/>
-        </p:txBody>
       </p:sp>
       <p:sp>
         <p:nvSpPr>
@@ -5026,8 +7705,8 @@
         </p:nvSpPr>
         <p:spPr>
           <a:xfrm>
-            <a:off x="1554480" y="2322576"/>
-            <a:ext cx="6035040" cy="502920"/>
+            <a:off x="621792" y="2468880"/>
+            <a:ext cx="3931920" cy="594360"/>
           </a:xfrm>
           <a:prstGeom prst="rect">
             <a:avLst/>
@@ -5036,14 +7715,14 @@
           <a:ln/>
         </p:spPr>
         <p:txBody>
-          <a:bodyPr wrap="square" rtlCol="0" anchor="ctr"/>
+          <a:bodyPr wrap="square" lIns="0" tIns="0" rIns="0" bIns="0" rtlCol="0" anchor="ctr"/>
           <a:lstStyle/>
           <a:p>
             <a:pPr indent="0" marL="0">
               <a:buNone/>
             </a:pPr>
             <a:r>
-              <a:rPr lang="en-US" sz="1500" dirty="0">
+              <a:rPr lang="en-US" sz="1400" dirty="0">
                 <a:solidFill>
                   <a:srgbClr val="2D3748"/>
                 </a:solidFill>
@@ -5051,9 +7730,9 @@
                 <a:ea typeface="Arial" pitchFamily="34" charset="-122"/>
                 <a:cs typeface="Arial" pitchFamily="34" charset="-120"/>
               </a:rPr>
-              <a:t>↓  Prijs stijgt → externe kosten zitten nu in de prijs</a:t>
-            </a:r>
-            <a:endParaRPr lang="en-US" sz="1500" dirty="0"/>
+              <a:t>3. Misbruikt het bedrijf die positie?</a:t>
+            </a:r>
+            <a:endParaRPr lang="en-US" sz="1400" dirty="0"/>
           </a:p>
         </p:txBody>
       </p:sp>
@@ -5065,16 +7744,16 @@
         </p:nvSpPr>
         <p:spPr>
           <a:xfrm>
-            <a:off x="1371600" y="2935224"/>
-            <a:ext cx="6400800" cy="502920"/>
+            <a:off x="457200" y="3200400"/>
+            <a:ext cx="4206240" cy="594360"/>
           </a:xfrm>
           <a:prstGeom prst="rect">
             <a:avLst>
-              <a:gd name="adj" fmla="val 9091"/>
+              <a:gd name="adj" fmla="val 6154"/>
             </a:avLst>
           </a:prstGeom>
           <a:solidFill>
-            <a:srgbClr val="F9F6F1"/>
+            <a:srgbClr val="1A5276"/>
           </a:solidFill>
           <a:ln/>
           <a:effectLst>
@@ -5085,10 +7764,6 @@
             </a:outerShdw>
           </a:effectLst>
         </p:spPr>
-        <p:txBody>
-          <a:bodyPr/>
-          <a:p/>
-        </p:txBody>
       </p:sp>
       <p:sp>
         <p:nvSpPr>
@@ -5098,8 +7773,8 @@
         </p:nvSpPr>
         <p:spPr>
           <a:xfrm>
-            <a:off x="1554480" y="2935224"/>
-            <a:ext cx="6035040" cy="502920"/>
+            <a:off x="621792" y="3200400"/>
+            <a:ext cx="3931920" cy="594360"/>
           </a:xfrm>
           <a:prstGeom prst="rect">
             <a:avLst/>
@@ -5108,24 +7783,24 @@
           <a:ln/>
         </p:spPr>
         <p:txBody>
-          <a:bodyPr wrap="square" rtlCol="0" anchor="ctr"/>
+          <a:bodyPr wrap="square" lIns="0" tIns="0" rIns="0" bIns="0" rtlCol="0" anchor="ctr"/>
           <a:lstStyle/>
           <a:p>
             <a:pPr indent="0" marL="0">
               <a:buNone/>
             </a:pPr>
             <a:r>
-              <a:rPr lang="en-US" sz="1500" dirty="0">
-                <a:solidFill>
-                  <a:srgbClr val="2D3748"/>
-                </a:solidFill>
-                <a:latin typeface="Arial" pitchFamily="34" charset="0"/>
-                <a:ea typeface="Arial" pitchFamily="34" charset="-122"/>
-                <a:cs typeface="Arial" pitchFamily="34" charset="-120"/>
-              </a:rPr>
-              <a:t>↓  Consumptie daalt → minder vervuiling</a:t>
-            </a:r>
-            <a:endParaRPr lang="en-US" sz="1500" dirty="0"/>
+              <a:rPr lang="en-US" sz="1400" b="1" dirty="0">
+                <a:solidFill>
+                  <a:srgbClr val="FFFFFF"/>
+                </a:solidFill>
+                <a:latin typeface="Arial" pitchFamily="34" charset="0"/>
+                <a:ea typeface="Arial" pitchFamily="34" charset="-122"/>
+                <a:cs typeface="Arial" pitchFamily="34" charset="-120"/>
+              </a:rPr>
+              <a:t>4. Zo ja: boete / regulering door ACM of EC</a:t>
+            </a:r>
+            <a:endParaRPr lang="en-US" sz="1400" dirty="0"/>
           </a:p>
         </p:txBody>
       </p:sp>
@@ -5137,16 +7812,16 @@
         </p:nvSpPr>
         <p:spPr>
           <a:xfrm>
-            <a:off x="1371600" y="3547872"/>
-            <a:ext cx="6400800" cy="502920"/>
+            <a:off x="4846320" y="1005840"/>
+            <a:ext cx="3840480" cy="3017520"/>
           </a:xfrm>
           <a:prstGeom prst="rect">
             <a:avLst>
-              <a:gd name="adj" fmla="val 9091"/>
+              <a:gd name="adj" fmla="val 1515"/>
             </a:avLst>
           </a:prstGeom>
           <a:solidFill>
-            <a:srgbClr val="1A5276"/>
+            <a:srgbClr val="FDE8E8"/>
           </a:solidFill>
           <a:ln/>
           <a:effectLst>
@@ -5157,21 +7832,37 @@
             </a:outerShdw>
           </a:effectLst>
         </p:spPr>
-        <p:txBody>
-          <a:bodyPr/>
-          <a:p/>
-        </p:txBody>
-      </p:sp>
-      <p:sp>
-        <p:nvSpPr>
-          <p:cNvPr id="12" name="Text 10"/>
-          <p:cNvSpPr/>
-          <p:nvPr/>
-        </p:nvSpPr>
-        <p:spPr>
-          <a:xfrm>
-            <a:off x="1554480" y="3547872"/>
-            <a:ext cx="6035040" cy="502920"/>
+      </p:sp>
+      <p:sp>
+        <p:nvSpPr>
+          <p:cNvPr id="12" name="Shape 10"/>
+          <p:cNvSpPr/>
+          <p:nvPr/>
+        </p:nvSpPr>
+        <p:spPr>
+          <a:xfrm>
+            <a:off x="4846320" y="1005840"/>
+            <a:ext cx="54864" cy="3017520"/>
+          </a:xfrm>
+          <a:prstGeom prst="rect">
+            <a:avLst/>
+          </a:prstGeom>
+          <a:solidFill>
+            <a:srgbClr val="D9534F"/>
+          </a:solidFill>
+          <a:ln/>
+        </p:spPr>
+      </p:sp>
+      <p:sp>
+        <p:nvSpPr>
+          <p:cNvPr id="13" name="Text 11"/>
+          <p:cNvSpPr/>
+          <p:nvPr/>
+        </p:nvSpPr>
+        <p:spPr>
+          <a:xfrm>
+            <a:off x="5029200" y="1115568"/>
+            <a:ext cx="3520440" cy="365760"/>
           </a:xfrm>
           <a:prstGeom prst="rect">
             <a:avLst/>
@@ -5180,87 +7871,37 @@
           <a:ln/>
         </p:spPr>
         <p:txBody>
-          <a:bodyPr wrap="square" rtlCol="0" anchor="ctr"/>
+          <a:bodyPr wrap="square" lIns="0" tIns="0" rIns="0" bIns="0" rtlCol="0" anchor="t"/>
           <a:lstStyle/>
           <a:p>
             <a:pPr indent="0" marL="0">
               <a:buNone/>
             </a:pPr>
             <a:r>
-              <a:rPr lang="en-US" sz="1500" b="1" dirty="0">
-                <a:solidFill>
-                  <a:srgbClr val="FFFFFF"/>
-                </a:solidFill>
-                <a:latin typeface="Arial" pitchFamily="34" charset="0"/>
-                <a:ea typeface="Arial" pitchFamily="34" charset="-122"/>
-                <a:cs typeface="Arial" pitchFamily="34" charset="-120"/>
-              </a:rPr>
-              <a:t>↓  Extern effect is geïnternaliseerd</a:t>
-            </a:r>
-            <a:endParaRPr lang="en-US" sz="1500" dirty="0"/>
-          </a:p>
-        </p:txBody>
-      </p:sp>
-      <p:sp>
-        <p:nvSpPr>
-          <p:cNvPr id="13" name="Shape 11"/>
-          <p:cNvSpPr/>
-          <p:nvPr/>
-        </p:nvSpPr>
-        <p:spPr>
-          <a:xfrm>
-            <a:off x="1371600" y="4297680"/>
-            <a:ext cx="6400800" cy="457200"/>
-          </a:xfrm>
-          <a:prstGeom prst="rect">
-            <a:avLst>
-              <a:gd name="adj" fmla="val 10000"/>
-            </a:avLst>
-          </a:prstGeom>
-          <a:solidFill>
-            <a:srgbClr val="EBF5FB"/>
-          </a:solidFill>
-          <a:ln/>
-        </p:spPr>
-        <p:txBody>
-          <a:bodyPr/>
-          <a:p/>
-        </p:txBody>
-      </p:sp>
-      <p:sp>
-        <p:nvSpPr>
-          <p:cNvPr id="14" name="Shape 12"/>
-          <p:cNvSpPr/>
-          <p:nvPr/>
-        </p:nvSpPr>
-        <p:spPr>
-          <a:xfrm>
-            <a:off x="1371600" y="4297680"/>
-            <a:ext cx="54864" cy="457200"/>
-          </a:xfrm>
-          <a:prstGeom prst="rect">
-            <a:avLst/>
-          </a:prstGeom>
-          <a:solidFill>
-            <a:srgbClr val="1A5276"/>
-          </a:solidFill>
-          <a:ln/>
-        </p:spPr>
-        <p:txBody>
-          <a:bodyPr/>
-          <a:p/>
-        </p:txBody>
-      </p:sp>
-      <p:sp>
-        <p:nvSpPr>
-          <p:cNvPr id="15" name="Text 13"/>
-          <p:cNvSpPr/>
-          <p:nvPr/>
-        </p:nvSpPr>
-        <p:spPr>
-          <a:xfrm>
-            <a:off x="1554480" y="4297680"/>
-            <a:ext cx="6035040" cy="457200"/>
+              <a:rPr lang="en-US" sz="1800" b="1" dirty="0">
+                <a:solidFill>
+                  <a:srgbClr val="922B21"/>
+                </a:solidFill>
+                <a:latin typeface="Arial" pitchFamily="34" charset="0"/>
+                <a:ea typeface="Arial" pitchFamily="34" charset="-122"/>
+                <a:cs typeface="Arial" pitchFamily="34" charset="-120"/>
+              </a:rPr>
+              <a:t>Casus: Google</a:t>
+            </a:r>
+            <a:endParaRPr lang="en-US" sz="1800" dirty="0"/>
+          </a:p>
+        </p:txBody>
+      </p:sp>
+      <p:sp>
+        <p:nvSpPr>
+          <p:cNvPr id="14" name="Text 12"/>
+          <p:cNvSpPr/>
+          <p:nvPr/>
+        </p:nvSpPr>
+        <p:spPr>
+          <a:xfrm>
+            <a:off x="5029200" y="1508760"/>
+            <a:ext cx="3520440" cy="2377440"/>
           </a:xfrm>
           <a:prstGeom prst="rect">
             <a:avLst/>
@@ -5269,24 +7910,87 @@
           <a:ln/>
         </p:spPr>
         <p:txBody>
-          <a:bodyPr wrap="square" rtlCol="0" anchor="ctr"/>
-          <a:lstStyle/>
-          <a:p>
-            <a:pPr indent="0" marL="0">
+          <a:bodyPr wrap="square" lIns="0" tIns="0" rIns="0" bIns="0" rtlCol="0" anchor="t"/>
+          <a:lstStyle/>
+          <a:p>
+            <a:pPr algn="l" indent="0" marL="0">
+              <a:lnSpc>
+                <a:spcPct val="120000"/>
+              </a:lnSpc>
               <a:buNone/>
             </a:pPr>
             <a:r>
+              <a:rPr lang="en-US" sz="1200" dirty="0">
+                <a:solidFill>
+                  <a:srgbClr val="718096"/>
+                </a:solidFill>
+                <a:latin typeface="Arial" pitchFamily="34" charset="0"/>
+                <a:ea typeface="Arial" pitchFamily="34" charset="-122"/>
+                <a:cs typeface="Arial" pitchFamily="34" charset="-120"/>
+              </a:rPr>
+              <a:t>Marktaandeel zoekmachines EU</a:t>
+            </a:r>
+            <a:endParaRPr lang="en-US" sz="1300" dirty="0"/>
+          </a:p>
+          <a:p>
+            <a:pPr algn="l" indent="0" marL="0">
+              <a:lnSpc>
+                <a:spcPct val="120000"/>
+              </a:lnSpc>
+              <a:buNone/>
+            </a:pPr>
+            <a:r>
+              <a:rPr lang="en-US" sz="2200" b="1" dirty="0">
+                <a:solidFill>
+                  <a:srgbClr val="922B21"/>
+                </a:solidFill>
+                <a:latin typeface="Arial" pitchFamily="34" charset="0"/>
+                <a:ea typeface="Arial" pitchFamily="34" charset="-122"/>
+                <a:cs typeface="Arial" pitchFamily="34" charset="-120"/>
+              </a:rPr>
+              <a:t>&gt;  90 %</a:t>
+            </a:r>
+            <a:endParaRPr lang="en-US" sz="1300" dirty="0"/>
+          </a:p>
+          <a:p>
+            <a:pPr algn="l" indent="0" marL="0">
+              <a:lnSpc>
+                <a:spcPct val="120000"/>
+              </a:lnSpc>
+              <a:buNone/>
+            </a:pPr>
+            <a:r>
+              <a:rPr lang="en-US" sz="1200" dirty="0">
+                <a:solidFill>
+                  <a:srgbClr val="2D3748"/>
+                </a:solidFill>
+                <a:latin typeface="Arial" pitchFamily="34" charset="0"/>
+                <a:ea typeface="Arial" pitchFamily="34" charset="-122"/>
+                <a:cs typeface="Arial" pitchFamily="34" charset="-120"/>
+              </a:rPr>
+              <a:t>Machtsmisbruik: dwong sites alleen Google-advertenties te tonen</a:t>
+            </a:r>
+            <a:endParaRPr lang="en-US" sz="1300" dirty="0"/>
+          </a:p>
+          <a:p>
+            <a:pPr algn="l" indent="0" marL="0">
+              <a:lnSpc>
+                <a:spcPct val="120000"/>
+              </a:lnSpc>
+              <a:buNone/>
+            </a:pPr>
+            <a:r>
               <a:rPr lang="en-US" sz="1400" b="1" dirty="0">
                 <a:solidFill>
-                  <a:srgbClr val="154360"/>
-                </a:solidFill>
-                <a:latin typeface="Arial" pitchFamily="34" charset="0"/>
-                <a:ea typeface="Arial" pitchFamily="34" charset="-122"/>
-                <a:cs typeface="Arial" pitchFamily="34" charset="-120"/>
-              </a:rPr>
-              <a:t>Internaliseren = externe kosten of baten in de prijs verwerken</a:t>
-            </a:r>
-            <a:endParaRPr lang="en-US" sz="1400" dirty="0"/>
+                  <a:srgbClr val="922B21"/>
+                </a:solidFill>
+                <a:latin typeface="Arial" pitchFamily="34" charset="0"/>
+                <a:ea typeface="Arial" pitchFamily="34" charset="-122"/>
+                <a:cs typeface="Arial" pitchFamily="34" charset="-120"/>
+              </a:rPr>
+              <a:t>→ boete € 1,49 mrd</a:t>
+            </a:r>
+            <a:endParaRPr lang="en-US" sz="1300" dirty="0"/>
           </a:p>
         </p:txBody>
       </p:sp>
@@ -5348,7 +8052,7 @@
                 <a:ea typeface="Arial" pitchFamily="34" charset="-122"/>
                 <a:cs typeface="Arial" pitchFamily="34" charset="-120"/>
               </a:rPr>
-              <a:t>Instrumenten van de overheid</a:t>
+              <a:t>Negatief extern effect — wat gebeurt er?</a:t>
             </a:r>
             <a:endParaRPr lang="en-US" sz="2400" dirty="0"/>
           </a:p>
@@ -5362,12 +8066,12 @@
         </p:nvSpPr>
         <p:spPr>
           <a:xfrm>
-            <a:off x="457200" y="1005840"/>
-            <a:ext cx="3931920" cy="1554480"/>
+            <a:off x="1371600" y="1005840"/>
+            <a:ext cx="6400800" cy="548640"/>
           </a:xfrm>
           <a:prstGeom prst="rect">
             <a:avLst>
-              <a:gd name="adj" fmla="val 2941"/>
+              <a:gd name="adj" fmla="val 6667"/>
             </a:avLst>
           </a:prstGeom>
           <a:solidFill>
@@ -5382,45 +8086,17 @@
             </a:outerShdw>
           </a:effectLst>
         </p:spPr>
-        <p:txBody>
-          <a:bodyPr/>
-          <a:p/>
-        </p:txBody>
-      </p:sp>
-      <p:sp>
-        <p:nvSpPr>
-          <p:cNvPr id="4" name="Shape 2"/>
-          <p:cNvSpPr/>
-          <p:nvPr/>
-        </p:nvSpPr>
-        <p:spPr>
-          <a:xfrm>
-            <a:off x="457200" y="1005840"/>
-            <a:ext cx="54864" cy="1554480"/>
-          </a:xfrm>
-          <a:prstGeom prst="rect">
-            <a:avLst/>
-          </a:prstGeom>
-          <a:solidFill>
-            <a:srgbClr val="1A5276"/>
-          </a:solidFill>
-          <a:ln/>
-        </p:spPr>
-        <p:txBody>
-          <a:bodyPr/>
-          <a:p/>
-        </p:txBody>
-      </p:sp>
-      <p:sp>
-        <p:nvSpPr>
-          <p:cNvPr id="5" name="Text 3"/>
-          <p:cNvSpPr/>
-          <p:nvPr/>
-        </p:nvSpPr>
-        <p:spPr>
-          <a:xfrm>
-            <a:off x="640080" y="1143000"/>
-            <a:ext cx="3611880" cy="365760"/>
+      </p:sp>
+      <p:sp>
+        <p:nvSpPr>
+          <p:cNvPr id="4" name="Text 2"/>
+          <p:cNvSpPr/>
+          <p:nvPr/>
+        </p:nvSpPr>
+        <p:spPr>
+          <a:xfrm>
+            <a:off x="1554480" y="1005840"/>
+            <a:ext cx="6126480" cy="548640"/>
           </a:xfrm>
           <a:prstGeom prst="rect">
             <a:avLst/>
@@ -5429,56 +8105,14 @@
           <a:ln/>
         </p:spPr>
         <p:txBody>
-          <a:bodyPr wrap="square" rtlCol="0" anchor="t"/>
+          <a:bodyPr wrap="square" lIns="0" tIns="0" rIns="0" bIns="0" rtlCol="0" anchor="ctr"/>
           <a:lstStyle/>
           <a:p>
             <a:pPr indent="0" marL="0">
               <a:buNone/>
             </a:pPr>
             <a:r>
-              <a:rPr lang="en-US" sz="2000" b="1" dirty="0">
-                <a:solidFill>
-                  <a:srgbClr val="1A5276"/>
-                </a:solidFill>
-                <a:latin typeface="Arial" pitchFamily="34" charset="0"/>
-                <a:ea typeface="Arial" pitchFamily="34" charset="-122"/>
-                <a:cs typeface="Arial" pitchFamily="34" charset="-120"/>
-              </a:rPr>
-              <a:t>Mededingingsbeleid</a:t>
-            </a:r>
-            <a:endParaRPr lang="en-US" sz="2000" dirty="0"/>
-          </a:p>
-        </p:txBody>
-      </p:sp>
-      <p:sp>
-        <p:nvSpPr>
-          <p:cNvPr id="6" name="Text 4"/>
-          <p:cNvSpPr/>
-          <p:nvPr/>
-        </p:nvSpPr>
-        <p:spPr>
-          <a:xfrm>
-            <a:off x="640080" y="1554480"/>
-            <a:ext cx="3611880" cy="868680"/>
-          </a:xfrm>
-          <a:prstGeom prst="rect">
-            <a:avLst/>
-          </a:prstGeom>
-          <a:noFill/>
-          <a:ln/>
-        </p:spPr>
-        <p:txBody>
-          <a:bodyPr wrap="square" rtlCol="0" anchor="t"/>
-          <a:lstStyle/>
-          <a:p>
-            <a:pPr algn="l" indent="0" marL="0">
-              <a:lnSpc>
-                <a:spcPct val="115000"/>
-              </a:lnSpc>
-              <a:buNone/>
-            </a:pPr>
-            <a:r>
-              <a:rPr lang="en-US" sz="1400" dirty="0">
+              <a:rPr lang="en-US" sz="1500" dirty="0">
                 <a:solidFill>
                   <a:srgbClr val="2D3748"/>
                 </a:solidFill>
@@ -5486,26 +8120,26 @@
                 <a:ea typeface="Arial" pitchFamily="34" charset="-122"/>
                 <a:cs typeface="Arial" pitchFamily="34" charset="-120"/>
               </a:rPr>
-              <a:t>Monopolies aanpakken, boetes bij machtsmisbruik</a:t>
-            </a:r>
-            <a:endParaRPr lang="en-US" sz="1400" dirty="0"/>
-          </a:p>
-        </p:txBody>
-      </p:sp>
-      <p:sp>
-        <p:nvSpPr>
-          <p:cNvPr id="7" name="Shape 5"/>
-          <p:cNvSpPr/>
-          <p:nvPr/>
-        </p:nvSpPr>
-        <p:spPr>
-          <a:xfrm>
-            <a:off x="4754880" y="1005840"/>
-            <a:ext cx="3931920" cy="1554480"/>
+              <a:t>Bedrijf produceert</a:t>
+            </a:r>
+            <a:endParaRPr lang="en-US" sz="1500" dirty="0"/>
+          </a:p>
+        </p:txBody>
+      </p:sp>
+      <p:sp>
+        <p:nvSpPr>
+          <p:cNvPr id="5" name="Shape 3"/>
+          <p:cNvSpPr/>
+          <p:nvPr/>
+        </p:nvSpPr>
+        <p:spPr>
+          <a:xfrm>
+            <a:off x="1371600" y="1664208"/>
+            <a:ext cx="6400800" cy="548640"/>
           </a:xfrm>
           <a:prstGeom prst="rect">
             <a:avLst>
-              <a:gd name="adj" fmla="val 2941"/>
+              <a:gd name="adj" fmla="val 6667"/>
             </a:avLst>
           </a:prstGeom>
           <a:solidFill>
@@ -5520,45 +8154,17 @@
             </a:outerShdw>
           </a:effectLst>
         </p:spPr>
-        <p:txBody>
-          <a:bodyPr/>
-          <a:p/>
-        </p:txBody>
-      </p:sp>
-      <p:sp>
-        <p:nvSpPr>
-          <p:cNvPr id="8" name="Shape 6"/>
-          <p:cNvSpPr/>
-          <p:nvPr/>
-        </p:nvSpPr>
-        <p:spPr>
-          <a:xfrm>
-            <a:off x="4754880" y="1005840"/>
-            <a:ext cx="54864" cy="1554480"/>
-          </a:xfrm>
-          <a:prstGeom prst="rect">
-            <a:avLst/>
-          </a:prstGeom>
-          <a:solidFill>
-            <a:srgbClr val="1A5276"/>
-          </a:solidFill>
-          <a:ln/>
-        </p:spPr>
-        <p:txBody>
-          <a:bodyPr/>
-          <a:p/>
-        </p:txBody>
-      </p:sp>
-      <p:sp>
-        <p:nvSpPr>
-          <p:cNvPr id="9" name="Text 7"/>
-          <p:cNvSpPr/>
-          <p:nvPr/>
-        </p:nvSpPr>
-        <p:spPr>
-          <a:xfrm>
-            <a:off x="4937760" y="1143000"/>
-            <a:ext cx="3611880" cy="365760"/>
+      </p:sp>
+      <p:sp>
+        <p:nvSpPr>
+          <p:cNvPr id="6" name="Text 4"/>
+          <p:cNvSpPr/>
+          <p:nvPr/>
+        </p:nvSpPr>
+        <p:spPr>
+          <a:xfrm>
+            <a:off x="1554480" y="1664208"/>
+            <a:ext cx="6126480" cy="548640"/>
           </a:xfrm>
           <a:prstGeom prst="rect">
             <a:avLst/>
@@ -5567,56 +8173,14 @@
           <a:ln/>
         </p:spPr>
         <p:txBody>
-          <a:bodyPr wrap="square" rtlCol="0" anchor="t"/>
+          <a:bodyPr wrap="square" lIns="0" tIns="0" rIns="0" bIns="0" rtlCol="0" anchor="ctr"/>
           <a:lstStyle/>
           <a:p>
             <a:pPr indent="0" marL="0">
               <a:buNone/>
             </a:pPr>
             <a:r>
-              <a:rPr lang="en-US" sz="2000" b="1" dirty="0">
-                <a:solidFill>
-                  <a:srgbClr val="1A5276"/>
-                </a:solidFill>
-                <a:latin typeface="Arial" pitchFamily="34" charset="0"/>
-                <a:ea typeface="Arial" pitchFamily="34" charset="-122"/>
-                <a:cs typeface="Arial" pitchFamily="34" charset="-120"/>
-              </a:rPr>
-              <a:t>Belastingen</a:t>
-            </a:r>
-            <a:endParaRPr lang="en-US" sz="2000" dirty="0"/>
-          </a:p>
-        </p:txBody>
-      </p:sp>
-      <p:sp>
-        <p:nvSpPr>
-          <p:cNvPr id="10" name="Text 8"/>
-          <p:cNvSpPr/>
-          <p:nvPr/>
-        </p:nvSpPr>
-        <p:spPr>
-          <a:xfrm>
-            <a:off x="4937760" y="1554480"/>
-            <a:ext cx="3611880" cy="868680"/>
-          </a:xfrm>
-          <a:prstGeom prst="rect">
-            <a:avLst/>
-          </a:prstGeom>
-          <a:noFill/>
-          <a:ln/>
-        </p:spPr>
-        <p:txBody>
-          <a:bodyPr wrap="square" rtlCol="0" anchor="t"/>
-          <a:lstStyle/>
-          <a:p>
-            <a:pPr algn="l" indent="0" marL="0">
-              <a:lnSpc>
-                <a:spcPct val="115000"/>
-              </a:lnSpc>
-              <a:buNone/>
-            </a:pPr>
-            <a:r>
-              <a:rPr lang="en-US" sz="1400" dirty="0">
+              <a:rPr lang="en-US" sz="1500" dirty="0">
                 <a:solidFill>
                   <a:srgbClr val="2D3748"/>
                 </a:solidFill>
@@ -5624,30 +8188,30 @@
                 <a:ea typeface="Arial" pitchFamily="34" charset="-122"/>
                 <a:cs typeface="Arial" pitchFamily="34" charset="-120"/>
               </a:rPr>
-              <a:t>Negatieve externe effecten internaliseren (bijv. vliegtaks)</a:t>
-            </a:r>
-            <a:endParaRPr lang="en-US" sz="1400" dirty="0"/>
-          </a:p>
-        </p:txBody>
-      </p:sp>
-      <p:sp>
-        <p:nvSpPr>
-          <p:cNvPr id="11" name="Shape 9"/>
-          <p:cNvSpPr/>
-          <p:nvPr/>
-        </p:nvSpPr>
-        <p:spPr>
-          <a:xfrm>
-            <a:off x="457200" y="2834640"/>
-            <a:ext cx="3931920" cy="1554480"/>
+              <a:t>↓  Derden lijden schade (bv. vervuiling)</a:t>
+            </a:r>
+            <a:endParaRPr lang="en-US" sz="1500" dirty="0"/>
+          </a:p>
+        </p:txBody>
+      </p:sp>
+      <p:sp>
+        <p:nvSpPr>
+          <p:cNvPr id="7" name="Shape 5"/>
+          <p:cNvSpPr/>
+          <p:nvPr/>
+        </p:nvSpPr>
+        <p:spPr>
+          <a:xfrm>
+            <a:off x="1371600" y="2322576"/>
+            <a:ext cx="6400800" cy="548640"/>
           </a:xfrm>
           <a:prstGeom prst="rect">
             <a:avLst>
-              <a:gd name="adj" fmla="val 2941"/>
+              <a:gd name="adj" fmla="val 6667"/>
             </a:avLst>
           </a:prstGeom>
           <a:solidFill>
-            <a:srgbClr val="F9F6F1"/>
+            <a:srgbClr val="D9534F"/>
           </a:solidFill>
           <a:ln/>
           <a:effectLst>
@@ -5658,45 +8222,17 @@
             </a:outerShdw>
           </a:effectLst>
         </p:spPr>
-        <p:txBody>
-          <a:bodyPr/>
-          <a:p/>
-        </p:txBody>
-      </p:sp>
-      <p:sp>
-        <p:nvSpPr>
-          <p:cNvPr id="12" name="Shape 10"/>
-          <p:cNvSpPr/>
-          <p:nvPr/>
-        </p:nvSpPr>
-        <p:spPr>
-          <a:xfrm>
-            <a:off x="457200" y="2834640"/>
-            <a:ext cx="54864" cy="1554480"/>
-          </a:xfrm>
-          <a:prstGeom prst="rect">
-            <a:avLst/>
-          </a:prstGeom>
-          <a:solidFill>
-            <a:srgbClr val="1A5276"/>
-          </a:solidFill>
-          <a:ln/>
-        </p:spPr>
-        <p:txBody>
-          <a:bodyPr/>
-          <a:p/>
-        </p:txBody>
-      </p:sp>
-      <p:sp>
-        <p:nvSpPr>
-          <p:cNvPr id="13" name="Text 11"/>
-          <p:cNvSpPr/>
-          <p:nvPr/>
-        </p:nvSpPr>
-        <p:spPr>
-          <a:xfrm>
-            <a:off x="640080" y="2971800"/>
-            <a:ext cx="3611880" cy="365760"/>
+      </p:sp>
+      <p:sp>
+        <p:nvSpPr>
+          <p:cNvPr id="8" name="Text 6"/>
+          <p:cNvSpPr/>
+          <p:nvPr/>
+        </p:nvSpPr>
+        <p:spPr>
+          <a:xfrm>
+            <a:off x="1554480" y="2322576"/>
+            <a:ext cx="6126480" cy="548640"/>
           </a:xfrm>
           <a:prstGeom prst="rect">
             <a:avLst/>
@@ -5705,83 +8241,41 @@
           <a:ln/>
         </p:spPr>
         <p:txBody>
-          <a:bodyPr wrap="square" rtlCol="0" anchor="t"/>
+          <a:bodyPr wrap="square" lIns="0" tIns="0" rIns="0" bIns="0" rtlCol="0" anchor="ctr"/>
           <a:lstStyle/>
           <a:p>
             <a:pPr indent="0" marL="0">
               <a:buNone/>
             </a:pPr>
             <a:r>
-              <a:rPr lang="en-US" sz="2000" b="1" dirty="0">
-                <a:solidFill>
-                  <a:srgbClr val="1A5276"/>
-                </a:solidFill>
-                <a:latin typeface="Arial" pitchFamily="34" charset="0"/>
-                <a:ea typeface="Arial" pitchFamily="34" charset="-122"/>
-                <a:cs typeface="Arial" pitchFamily="34" charset="-120"/>
-              </a:rPr>
-              <a:t>Subsidies</a:t>
-            </a:r>
-            <a:endParaRPr lang="en-US" sz="2000" dirty="0"/>
-          </a:p>
-        </p:txBody>
-      </p:sp>
-      <p:sp>
-        <p:nvSpPr>
-          <p:cNvPr id="14" name="Text 12"/>
-          <p:cNvSpPr/>
-          <p:nvPr/>
-        </p:nvSpPr>
-        <p:spPr>
-          <a:xfrm>
-            <a:off x="640080" y="3383280"/>
-            <a:ext cx="3611880" cy="868680"/>
-          </a:xfrm>
-          <a:prstGeom prst="rect">
-            <a:avLst/>
-          </a:prstGeom>
-          <a:noFill/>
-          <a:ln/>
-        </p:spPr>
-        <p:txBody>
-          <a:bodyPr wrap="square" rtlCol="0" anchor="t"/>
-          <a:lstStyle/>
-          <a:p>
-            <a:pPr algn="l" indent="0" marL="0">
-              <a:lnSpc>
-                <a:spcPct val="115000"/>
-              </a:lnSpc>
-              <a:buNone/>
-            </a:pPr>
-            <a:r>
-              <a:rPr lang="en-US" sz="1400" dirty="0">
-                <a:solidFill>
-                  <a:srgbClr val="2D3748"/>
-                </a:solidFill>
-                <a:latin typeface="Arial" pitchFamily="34" charset="0"/>
-                <a:ea typeface="Arial" pitchFamily="34" charset="-122"/>
-                <a:cs typeface="Arial" pitchFamily="34" charset="-120"/>
-              </a:rPr>
-              <a:t>Positieve externe effecten stimuleren (bijv. vaccinatie)</a:t>
-            </a:r>
-            <a:endParaRPr lang="en-US" sz="1400" dirty="0"/>
-          </a:p>
-        </p:txBody>
-      </p:sp>
-      <p:sp>
-        <p:nvSpPr>
-          <p:cNvPr id="15" name="Shape 13"/>
-          <p:cNvSpPr/>
-          <p:nvPr/>
-        </p:nvSpPr>
-        <p:spPr>
-          <a:xfrm>
-            <a:off x="4754880" y="2834640"/>
-            <a:ext cx="3931920" cy="1554480"/>
+              <a:rPr lang="en-US" sz="1500" b="1" dirty="0">
+                <a:solidFill>
+                  <a:srgbClr val="FFFFFF"/>
+                </a:solidFill>
+                <a:latin typeface="Arial" pitchFamily="34" charset="0"/>
+                <a:ea typeface="Arial" pitchFamily="34" charset="-122"/>
+                <a:cs typeface="Arial" pitchFamily="34" charset="-120"/>
+              </a:rPr>
+              <a:t>↓  Kosten zitten niet in de prijs</a:t>
+            </a:r>
+            <a:endParaRPr lang="en-US" sz="1500" dirty="0"/>
+          </a:p>
+        </p:txBody>
+      </p:sp>
+      <p:sp>
+        <p:nvSpPr>
+          <p:cNvPr id="9" name="Shape 7"/>
+          <p:cNvSpPr/>
+          <p:nvPr/>
+        </p:nvSpPr>
+        <p:spPr>
+          <a:xfrm>
+            <a:off x="1371600" y="2980944"/>
+            <a:ext cx="6400800" cy="548640"/>
           </a:xfrm>
           <a:prstGeom prst="rect">
             <a:avLst>
-              <a:gd name="adj" fmla="val 2941"/>
+              <a:gd name="adj" fmla="val 6667"/>
             </a:avLst>
           </a:prstGeom>
           <a:solidFill>
@@ -5796,45 +8290,17 @@
             </a:outerShdw>
           </a:effectLst>
         </p:spPr>
-        <p:txBody>
-          <a:bodyPr/>
-          <a:p/>
-        </p:txBody>
-      </p:sp>
-      <p:sp>
-        <p:nvSpPr>
-          <p:cNvPr id="16" name="Shape 14"/>
-          <p:cNvSpPr/>
-          <p:nvPr/>
-        </p:nvSpPr>
-        <p:spPr>
-          <a:xfrm>
-            <a:off x="4754880" y="2834640"/>
-            <a:ext cx="54864" cy="1554480"/>
-          </a:xfrm>
-          <a:prstGeom prst="rect">
-            <a:avLst/>
-          </a:prstGeom>
-          <a:solidFill>
-            <a:srgbClr val="1A5276"/>
-          </a:solidFill>
-          <a:ln/>
-        </p:spPr>
-        <p:txBody>
-          <a:bodyPr/>
-          <a:p/>
-        </p:txBody>
-      </p:sp>
-      <p:sp>
-        <p:nvSpPr>
-          <p:cNvPr id="17" name="Text 15"/>
-          <p:cNvSpPr/>
-          <p:nvPr/>
-        </p:nvSpPr>
-        <p:spPr>
-          <a:xfrm>
-            <a:off x="4937760" y="2971800"/>
-            <a:ext cx="3611880" cy="365760"/>
+      </p:sp>
+      <p:sp>
+        <p:nvSpPr>
+          <p:cNvPr id="10" name="Text 8"/>
+          <p:cNvSpPr/>
+          <p:nvPr/>
+        </p:nvSpPr>
+        <p:spPr>
+          <a:xfrm>
+            <a:off x="1554480" y="2980944"/>
+            <a:ext cx="6126480" cy="548640"/>
           </a:xfrm>
           <a:prstGeom prst="rect">
             <a:avLst/>
@@ -5843,37 +8309,66 @@
           <a:ln/>
         </p:spPr>
         <p:txBody>
-          <a:bodyPr wrap="square" rtlCol="0" anchor="t"/>
+          <a:bodyPr wrap="square" lIns="0" tIns="0" rIns="0" bIns="0" rtlCol="0" anchor="ctr"/>
           <a:lstStyle/>
           <a:p>
             <a:pPr indent="0" marL="0">
               <a:buNone/>
             </a:pPr>
             <a:r>
-              <a:rPr lang="en-US" sz="2000" b="1" dirty="0">
-                <a:solidFill>
-                  <a:srgbClr val="1A5276"/>
-                </a:solidFill>
-                <a:latin typeface="Arial" pitchFamily="34" charset="0"/>
-                <a:ea typeface="Arial" pitchFamily="34" charset="-122"/>
-                <a:cs typeface="Arial" pitchFamily="34" charset="-120"/>
-              </a:rPr>
-              <a:t>Prijsbeleid</a:t>
-            </a:r>
-            <a:endParaRPr lang="en-US" sz="2000" dirty="0"/>
-          </a:p>
-        </p:txBody>
-      </p:sp>
-      <p:sp>
-        <p:nvSpPr>
-          <p:cNvPr id="18" name="Text 16"/>
-          <p:cNvSpPr/>
-          <p:nvPr/>
-        </p:nvSpPr>
-        <p:spPr>
-          <a:xfrm>
-            <a:off x="4937760" y="3383280"/>
-            <a:ext cx="3611880" cy="868680"/>
+              <a:rPr lang="en-US" sz="1500" dirty="0">
+                <a:solidFill>
+                  <a:srgbClr val="2D3748"/>
+                </a:solidFill>
+                <a:latin typeface="Arial" pitchFamily="34" charset="0"/>
+                <a:ea typeface="Arial" pitchFamily="34" charset="-122"/>
+                <a:cs typeface="Arial" pitchFamily="34" charset="-120"/>
+              </a:rPr>
+              <a:t>↓  Prijs te laag → te veel productie</a:t>
+            </a:r>
+            <a:endParaRPr lang="en-US" sz="1500" dirty="0"/>
+          </a:p>
+        </p:txBody>
+      </p:sp>
+      <p:sp>
+        <p:nvSpPr>
+          <p:cNvPr id="11" name="Shape 9"/>
+          <p:cNvSpPr/>
+          <p:nvPr/>
+        </p:nvSpPr>
+        <p:spPr>
+          <a:xfrm>
+            <a:off x="1371600" y="3639312"/>
+            <a:ext cx="6400800" cy="548640"/>
+          </a:xfrm>
+          <a:prstGeom prst="rect">
+            <a:avLst>
+              <a:gd name="adj" fmla="val 6667"/>
+            </a:avLst>
+          </a:prstGeom>
+          <a:solidFill>
+            <a:srgbClr val="D9534F"/>
+          </a:solidFill>
+          <a:ln/>
+          <a:effectLst>
+            <a:outerShdw sx="100000" sy="100000" kx="0" ky="0" algn="bl" rotWithShape="0" blurRad="76200" dist="25400" dir="8100000">
+              <a:srgbClr val="000000">
+                <a:alpha val="10000"/>
+              </a:srgbClr>
+            </a:outerShdw>
+          </a:effectLst>
+        </p:spPr>
+      </p:sp>
+      <p:sp>
+        <p:nvSpPr>
+          <p:cNvPr id="12" name="Text 10"/>
+          <p:cNvSpPr/>
+          <p:nvPr/>
+        </p:nvSpPr>
+        <p:spPr>
+          <a:xfrm>
+            <a:off x="1554480" y="3639312"/>
+            <a:ext cx="6126480" cy="548640"/>
           </a:xfrm>
           <a:prstGeom prst="rect">
             <a:avLst/>
@@ -5882,27 +8377,24 @@
           <a:ln/>
         </p:spPr>
         <p:txBody>
-          <a:bodyPr wrap="square" rtlCol="0" anchor="t"/>
-          <a:lstStyle/>
-          <a:p>
-            <a:pPr algn="l" indent="0" marL="0">
-              <a:lnSpc>
-                <a:spcPct val="115000"/>
-              </a:lnSpc>
+          <a:bodyPr wrap="square" lIns="0" tIns="0" rIns="0" bIns="0" rtlCol="0" anchor="ctr"/>
+          <a:lstStyle/>
+          <a:p>
+            <a:pPr indent="0" marL="0">
               <a:buNone/>
             </a:pPr>
             <a:r>
-              <a:rPr lang="en-US" sz="1400" dirty="0">
-                <a:solidFill>
-                  <a:srgbClr val="2D3748"/>
-                </a:solidFill>
-                <a:latin typeface="Arial" pitchFamily="34" charset="0"/>
-                <a:ea typeface="Arial" pitchFamily="34" charset="-122"/>
-                <a:cs typeface="Arial" pitchFamily="34" charset="-120"/>
-              </a:rPr>
-              <a:t>Minimum-/maximumprijzen of vaste prijzen instellen</a:t>
-            </a:r>
-            <a:endParaRPr lang="en-US" sz="1400" dirty="0"/>
+              <a:rPr lang="en-US" sz="1500" b="1" dirty="0">
+                <a:solidFill>
+                  <a:srgbClr val="FFFFFF"/>
+                </a:solidFill>
+                <a:latin typeface="Arial" pitchFamily="34" charset="0"/>
+                <a:ea typeface="Arial" pitchFamily="34" charset="-122"/>
+                <a:cs typeface="Arial" pitchFamily="34" charset="-120"/>
+              </a:rPr>
+              <a:t>↓  Welvaartsverlies voor de samenleving</a:t>
+            </a:r>
+            <a:endParaRPr lang="en-US" sz="1500" dirty="0"/>
           </a:p>
         </p:txBody>
       </p:sp>
@@ -5964,55 +8456,308 @@
                 <a:ea typeface="Arial" pitchFamily="34" charset="-122"/>
                 <a:cs typeface="Arial" pitchFamily="34" charset="-120"/>
               </a:rPr>
-              <a:t>Valkuilen</a:t>
+              <a:t>Negatief extern effect in de grafiek</a:t>
             </a:r>
             <a:endParaRPr lang="en-US" sz="2400" dirty="0"/>
           </a:p>
         </p:txBody>
       </p:sp>
-      <p:sp>
-        <p:nvSpPr>
-          <p:cNvPr id="3" name="Shape 1"/>
-          <p:cNvSpPr/>
-          <p:nvPr/>
-        </p:nvSpPr>
-        <p:spPr>
-          <a:xfrm>
-            <a:off x="457200" y="960120"/>
-            <a:ext cx="8229600" cy="960120"/>
-          </a:xfrm>
-          <a:prstGeom prst="rect">
-            <a:avLst>
-              <a:gd name="adj" fmla="val 4762"/>
-            </a:avLst>
+      <p:pic>
+        <p:nvPicPr>
+          <p:cNvPr id="3" name="Image 0" descr="preencoded.png">    </p:cNvPr>
+          <p:cNvPicPr>
+            <a:picLocks noChangeAspect="1"/>
+          </p:cNvPicPr>
+          <p:nvPr/>
+        </p:nvPicPr>
+        <p:blipFill>
+          <a:blip r:embed="rId1"/>
+          <a:stretch>
+            <a:fillRect/>
+          </a:stretch>
+        </p:blipFill>
+        <p:spPr>
+          <a:xfrm>
+            <a:off x="914400" y="749808"/>
+            <a:ext cx="7315200" cy="3657600"/>
+          </a:xfrm>
+          <a:prstGeom prst="rect">
+            <a:avLst/>
+          </a:prstGeom>
+        </p:spPr>
+      </p:pic>
+      <p:sp>
+        <p:nvSpPr>
+          <p:cNvPr id="4" name="Shape 1"/>
+          <p:cNvSpPr/>
+          <p:nvPr/>
+        </p:nvSpPr>
+        <p:spPr>
+          <a:xfrm>
+            <a:off x="457200" y="4480560"/>
+            <a:ext cx="8229600" cy="566928"/>
+          </a:xfrm>
+          <a:prstGeom prst="rect">
+            <a:avLst/>
           </a:prstGeom>
           <a:solidFill>
-            <a:srgbClr val="FDE8E8"/>
+            <a:srgbClr val="F7F8FA"/>
           </a:solidFill>
-          <a:ln/>
-          <a:effectLst>
-            <a:outerShdw sx="100000" sy="100000" kx="0" ky="0" algn="bl" rotWithShape="0" blurRad="76200" dist="25400" dir="8100000">
-              <a:srgbClr val="000000">
-                <a:alpha val="10000"/>
-              </a:srgbClr>
-            </a:outerShdw>
-          </a:effectLst>
-        </p:spPr>
-        <p:txBody>
-          <a:bodyPr/>
-          <a:p/>
-        </p:txBody>
-      </p:sp>
-      <p:sp>
-        <p:nvSpPr>
-          <p:cNvPr id="4" name="Shape 2"/>
-          <p:cNvSpPr/>
-          <p:nvPr/>
-        </p:nvSpPr>
-        <p:spPr>
-          <a:xfrm>
-            <a:off x="457200" y="960120"/>
-            <a:ext cx="54864" cy="960120"/>
+          <a:ln w="6350">
+            <a:solidFill>
+              <a:srgbClr val="CBD5E0"/>
+            </a:solidFill>
+            <a:prstDash val="solid"/>
+          </a:ln>
+        </p:spPr>
+      </p:sp>
+      <p:sp>
+        <p:nvSpPr>
+          <p:cNvPr id="5" name="Shape 2"/>
+          <p:cNvSpPr/>
+          <p:nvPr/>
+        </p:nvSpPr>
+        <p:spPr>
+          <a:xfrm>
+            <a:off x="566928" y="4636008"/>
+            <a:ext cx="201168" cy="201168"/>
+          </a:xfrm>
+          <a:prstGeom prst="rect">
+            <a:avLst/>
+          </a:prstGeom>
+          <a:solidFill>
+            <a:srgbClr val="1A5276"/>
+          </a:solidFill>
+          <a:ln/>
+        </p:spPr>
+      </p:sp>
+      <p:sp>
+        <p:nvSpPr>
+          <p:cNvPr id="6" name="Text 3"/>
+          <p:cNvSpPr/>
+          <p:nvPr/>
+        </p:nvSpPr>
+        <p:spPr>
+          <a:xfrm>
+            <a:off x="841248" y="4553712"/>
+            <a:ext cx="1600200" cy="420624"/>
+          </a:xfrm>
+          <a:prstGeom prst="rect">
+            <a:avLst/>
+          </a:prstGeom>
+          <a:noFill/>
+          <a:ln/>
+        </p:spPr>
+        <p:txBody>
+          <a:bodyPr wrap="square" lIns="0" tIns="0" rIns="0" bIns="0" rtlCol="0" anchor="ctr"/>
+          <a:lstStyle/>
+          <a:p>
+            <a:pPr indent="0" marL="0">
+              <a:lnSpc>
+                <a:spcPct val="110000"/>
+              </a:lnSpc>
+              <a:buNone/>
+            </a:pPr>
+            <a:r>
+              <a:rPr lang="en-US" sz="1100" b="1" dirty="0">
+                <a:solidFill>
+                  <a:srgbClr val="1A5276"/>
+                </a:solidFill>
+                <a:latin typeface="Arial" pitchFamily="34" charset="0"/>
+                <a:ea typeface="Arial" pitchFamily="34" charset="-122"/>
+                <a:cs typeface="Arial" pitchFamily="34" charset="-120"/>
+              </a:rPr>
+              <a:t>V</a:t>
+            </a:r>
+            <a:pPr indent="0" marL="0">
+              <a:lnSpc>
+                <a:spcPct val="110000"/>
+              </a:lnSpc>
+              <a:buNone/>
+            </a:pPr>
+            <a:r>
+              <a:rPr lang="en-US" sz="1100" dirty="0">
+                <a:solidFill>
+                  <a:srgbClr val="2D3748"/>
+                </a:solidFill>
+                <a:latin typeface="Arial" pitchFamily="34" charset="0"/>
+                <a:ea typeface="Arial" pitchFamily="34" charset="-122"/>
+                <a:cs typeface="Arial" pitchFamily="34" charset="-120"/>
+              </a:rPr>
+              <a:t>  vraag</a:t>
+            </a:r>
+            <a:endParaRPr lang="en-US" sz="1100" dirty="0"/>
+          </a:p>
+        </p:txBody>
+      </p:sp>
+      <p:sp>
+        <p:nvSpPr>
+          <p:cNvPr id="7" name="Shape 4"/>
+          <p:cNvSpPr/>
+          <p:nvPr/>
+        </p:nvSpPr>
+        <p:spPr>
+          <a:xfrm>
+            <a:off x="2624328" y="4636008"/>
+            <a:ext cx="201168" cy="201168"/>
+          </a:xfrm>
+          <a:prstGeom prst="rect">
+            <a:avLst/>
+          </a:prstGeom>
+          <a:solidFill>
+            <a:srgbClr val="1E8449"/>
+          </a:solidFill>
+          <a:ln/>
+        </p:spPr>
+      </p:sp>
+      <p:sp>
+        <p:nvSpPr>
+          <p:cNvPr id="8" name="Text 5"/>
+          <p:cNvSpPr/>
+          <p:nvPr/>
+        </p:nvSpPr>
+        <p:spPr>
+          <a:xfrm>
+            <a:off x="2898648" y="4553712"/>
+            <a:ext cx="1600200" cy="420624"/>
+          </a:xfrm>
+          <a:prstGeom prst="rect">
+            <a:avLst/>
+          </a:prstGeom>
+          <a:noFill/>
+          <a:ln/>
+        </p:spPr>
+        <p:txBody>
+          <a:bodyPr wrap="square" lIns="0" tIns="0" rIns="0" bIns="0" rtlCol="0" anchor="ctr"/>
+          <a:lstStyle/>
+          <a:p>
+            <a:pPr indent="0" marL="0">
+              <a:lnSpc>
+                <a:spcPct val="110000"/>
+              </a:lnSpc>
+              <a:buNone/>
+            </a:pPr>
+            <a:r>
+              <a:rPr lang="en-US" sz="1100" b="1" dirty="0">
+                <a:solidFill>
+                  <a:srgbClr val="1E8449"/>
+                </a:solidFill>
+                <a:latin typeface="Arial" pitchFamily="34" charset="0"/>
+                <a:ea typeface="Arial" pitchFamily="34" charset="-122"/>
+                <a:cs typeface="Arial" pitchFamily="34" charset="-120"/>
+              </a:rPr>
+              <a:t>MPK</a:t>
+            </a:r>
+            <a:pPr indent="0" marL="0">
+              <a:lnSpc>
+                <a:spcPct val="110000"/>
+              </a:lnSpc>
+              <a:buNone/>
+            </a:pPr>
+            <a:r>
+              <a:rPr lang="en-US" sz="1100" dirty="0">
+                <a:solidFill>
+                  <a:srgbClr val="2D3748"/>
+                </a:solidFill>
+                <a:latin typeface="Arial" pitchFamily="34" charset="0"/>
+                <a:ea typeface="Arial" pitchFamily="34" charset="-122"/>
+                <a:cs typeface="Arial" pitchFamily="34" charset="-120"/>
+              </a:rPr>
+              <a:t>  private kosten</a:t>
+            </a:r>
+            <a:endParaRPr lang="en-US" sz="1100" dirty="0"/>
+          </a:p>
+        </p:txBody>
+      </p:sp>
+      <p:sp>
+        <p:nvSpPr>
+          <p:cNvPr id="9" name="Shape 6"/>
+          <p:cNvSpPr/>
+          <p:nvPr/>
+        </p:nvSpPr>
+        <p:spPr>
+          <a:xfrm>
+            <a:off x="4681728" y="4636008"/>
+            <a:ext cx="201168" cy="201168"/>
+          </a:xfrm>
+          <a:prstGeom prst="rect">
+            <a:avLst/>
+          </a:prstGeom>
+          <a:solidFill>
+            <a:srgbClr val="E67E22"/>
+          </a:solidFill>
+          <a:ln/>
+        </p:spPr>
+      </p:sp>
+      <p:sp>
+        <p:nvSpPr>
+          <p:cNvPr id="10" name="Text 7"/>
+          <p:cNvSpPr/>
+          <p:nvPr/>
+        </p:nvSpPr>
+        <p:spPr>
+          <a:xfrm>
+            <a:off x="4956048" y="4553712"/>
+            <a:ext cx="1600200" cy="420624"/>
+          </a:xfrm>
+          <a:prstGeom prst="rect">
+            <a:avLst/>
+          </a:prstGeom>
+          <a:noFill/>
+          <a:ln/>
+        </p:spPr>
+        <p:txBody>
+          <a:bodyPr wrap="square" lIns="0" tIns="0" rIns="0" bIns="0" rtlCol="0" anchor="ctr"/>
+          <a:lstStyle/>
+          <a:p>
+            <a:pPr indent="0" marL="0">
+              <a:lnSpc>
+                <a:spcPct val="110000"/>
+              </a:lnSpc>
+              <a:buNone/>
+            </a:pPr>
+            <a:r>
+              <a:rPr lang="en-US" sz="1100" b="1" dirty="0">
+                <a:solidFill>
+                  <a:srgbClr val="E67E22"/>
+                </a:solidFill>
+                <a:latin typeface="Arial" pitchFamily="34" charset="0"/>
+                <a:ea typeface="Arial" pitchFamily="34" charset="-122"/>
+                <a:cs typeface="Arial" pitchFamily="34" charset="-120"/>
+              </a:rPr>
+              <a:t>MMK</a:t>
+            </a:r>
+            <a:pPr indent="0" marL="0">
+              <a:lnSpc>
+                <a:spcPct val="110000"/>
+              </a:lnSpc>
+              <a:buNone/>
+            </a:pPr>
+            <a:r>
+              <a:rPr lang="en-US" sz="1100" dirty="0">
+                <a:solidFill>
+                  <a:srgbClr val="2D3748"/>
+                </a:solidFill>
+                <a:latin typeface="Arial" pitchFamily="34" charset="0"/>
+                <a:ea typeface="Arial" pitchFamily="34" charset="-122"/>
+                <a:cs typeface="Arial" pitchFamily="34" charset="-120"/>
+              </a:rPr>
+              <a:t>  MPK + externe kosten</a:t>
+            </a:r>
+            <a:endParaRPr lang="en-US" sz="1100" dirty="0"/>
+          </a:p>
+        </p:txBody>
+      </p:sp>
+      <p:sp>
+        <p:nvSpPr>
+          <p:cNvPr id="11" name="Shape 8"/>
+          <p:cNvSpPr/>
+          <p:nvPr/>
+        </p:nvSpPr>
+        <p:spPr>
+          <a:xfrm>
+            <a:off x="6739128" y="4636008"/>
+            <a:ext cx="201168" cy="201168"/>
           </a:xfrm>
           <a:prstGeom prst="rect">
             <a:avLst/>
@@ -6022,21 +8767,17 @@
           </a:solidFill>
           <a:ln/>
         </p:spPr>
-        <p:txBody>
-          <a:bodyPr/>
-          <a:p/>
-        </p:txBody>
-      </p:sp>
-      <p:sp>
-        <p:nvSpPr>
-          <p:cNvPr id="5" name="Text 3"/>
-          <p:cNvSpPr/>
-          <p:nvPr/>
-        </p:nvSpPr>
-        <p:spPr>
-          <a:xfrm>
-            <a:off x="658368" y="1033272"/>
-            <a:ext cx="7863840" cy="320040"/>
+      </p:sp>
+      <p:sp>
+        <p:nvSpPr>
+          <p:cNvPr id="12" name="Text 9"/>
+          <p:cNvSpPr/>
+          <p:nvPr/>
+        </p:nvSpPr>
+        <p:spPr>
+          <a:xfrm>
+            <a:off x="7013448" y="4553712"/>
+            <a:ext cx="1600200" cy="420624"/>
           </a:xfrm>
           <a:prstGeom prst="rect">
             <a:avLst/>
@@ -6045,14 +8786,17 @@
           <a:ln/>
         </p:spPr>
         <p:txBody>
-          <a:bodyPr wrap="square" rtlCol="0" anchor="t"/>
-          <a:lstStyle/>
-          <a:p>
-            <a:pPr algn="l" indent="0" marL="0">
+          <a:bodyPr wrap="square" lIns="0" tIns="0" rIns="0" bIns="0" rtlCol="0" anchor="ctr"/>
+          <a:lstStyle/>
+          <a:p>
+            <a:pPr indent="0" marL="0">
+              <a:lnSpc>
+                <a:spcPct val="110000"/>
+              </a:lnSpc>
               <a:buNone/>
             </a:pPr>
             <a:r>
-              <a:rPr lang="en-US" sz="1400" b="1" dirty="0">
+              <a:rPr lang="en-US" sz="1100" b="1" dirty="0">
                 <a:solidFill>
                   <a:srgbClr val="D9534F"/>
                 </a:solidFill>
@@ -6060,38 +8804,16 @@
                 <a:ea typeface="Arial" pitchFamily="34" charset="-122"/>
                 <a:cs typeface="Arial" pitchFamily="34" charset="-120"/>
               </a:rPr>
-              <a:t>"Alle monopolies zijn slecht"</a:t>
-            </a:r>
-            <a:endParaRPr lang="en-US" sz="1400" dirty="0"/>
-          </a:p>
-        </p:txBody>
-      </p:sp>
-      <p:sp>
-        <p:nvSpPr>
-          <p:cNvPr id="6" name="Text 4"/>
-          <p:cNvSpPr/>
-          <p:nvPr/>
-        </p:nvSpPr>
-        <p:spPr>
-          <a:xfrm>
-            <a:off x="658368" y="1344168"/>
-            <a:ext cx="7863840" cy="502920"/>
-          </a:xfrm>
-          <a:prstGeom prst="rect">
-            <a:avLst/>
-          </a:prstGeom>
-          <a:noFill/>
-          <a:ln/>
-        </p:spPr>
-        <p:txBody>
-          <a:bodyPr wrap="square" rtlCol="0" anchor="t"/>
-          <a:lstStyle/>
-          <a:p>
-            <a:pPr algn="l" indent="0" marL="0">
+              <a:t>▲</a:t>
+            </a:r>
+            <a:pPr indent="0" marL="0">
+              <a:lnSpc>
+                <a:spcPct val="110000"/>
+              </a:lnSpc>
               <a:buNone/>
             </a:pPr>
             <a:r>
-              <a:rPr lang="en-US" sz="1300" dirty="0">
+              <a:rPr lang="en-US" sz="1100" dirty="0">
                 <a:solidFill>
                   <a:srgbClr val="2D3748"/>
                 </a:solidFill>
@@ -6099,279 +8821,9 @@
                 <a:ea typeface="Arial" pitchFamily="34" charset="-122"/>
                 <a:cs typeface="Arial" pitchFamily="34" charset="-120"/>
               </a:rPr>
-              <a:t>Onjuist: een natuurlijk monopolie is efficiënter dan meerdere aanbieders. De overheid reguleert, maar heft het monopolie niet op.</a:t>
-            </a:r>
-            <a:endParaRPr lang="en-US" sz="1300" dirty="0"/>
-          </a:p>
-        </p:txBody>
-      </p:sp>
-      <p:sp>
-        <p:nvSpPr>
-          <p:cNvPr id="7" name="Shape 5"/>
-          <p:cNvSpPr/>
-          <p:nvPr/>
-        </p:nvSpPr>
-        <p:spPr>
-          <a:xfrm>
-            <a:off x="457200" y="2103120"/>
-            <a:ext cx="8229600" cy="960120"/>
-          </a:xfrm>
-          <a:prstGeom prst="rect">
-            <a:avLst>
-              <a:gd name="adj" fmla="val 4762"/>
-            </a:avLst>
-          </a:prstGeom>
-          <a:solidFill>
-            <a:srgbClr val="FDE8E8"/>
-          </a:solidFill>
-          <a:ln/>
-          <a:effectLst>
-            <a:outerShdw sx="100000" sy="100000" kx="0" ky="0" algn="bl" rotWithShape="0" blurRad="76200" dist="25400" dir="8100000">
-              <a:srgbClr val="000000">
-                <a:alpha val="10000"/>
-              </a:srgbClr>
-            </a:outerShdw>
-          </a:effectLst>
-        </p:spPr>
-        <p:txBody>
-          <a:bodyPr/>
-          <a:p/>
-        </p:txBody>
-      </p:sp>
-      <p:sp>
-        <p:nvSpPr>
-          <p:cNvPr id="8" name="Shape 6"/>
-          <p:cNvSpPr/>
-          <p:nvPr/>
-        </p:nvSpPr>
-        <p:spPr>
-          <a:xfrm>
-            <a:off x="457200" y="2103120"/>
-            <a:ext cx="54864" cy="960120"/>
-          </a:xfrm>
-          <a:prstGeom prst="rect">
-            <a:avLst/>
-          </a:prstGeom>
-          <a:solidFill>
-            <a:srgbClr val="D9534F"/>
-          </a:solidFill>
-          <a:ln/>
-        </p:spPr>
-        <p:txBody>
-          <a:bodyPr/>
-          <a:p/>
-        </p:txBody>
-      </p:sp>
-      <p:sp>
-        <p:nvSpPr>
-          <p:cNvPr id="9" name="Text 7"/>
-          <p:cNvSpPr/>
-          <p:nvPr/>
-        </p:nvSpPr>
-        <p:spPr>
-          <a:xfrm>
-            <a:off x="658368" y="2176272"/>
-            <a:ext cx="7863840" cy="320040"/>
-          </a:xfrm>
-          <a:prstGeom prst="rect">
-            <a:avLst/>
-          </a:prstGeom>
-          <a:noFill/>
-          <a:ln/>
-        </p:spPr>
-        <p:txBody>
-          <a:bodyPr wrap="square" rtlCol="0" anchor="t"/>
-          <a:lstStyle/>
-          <a:p>
-            <a:pPr algn="l" indent="0" marL="0">
-              <a:buNone/>
-            </a:pPr>
-            <a:r>
-              <a:rPr lang="en-US" sz="1400" b="1" dirty="0">
-                <a:solidFill>
-                  <a:srgbClr val="D9534F"/>
-                </a:solidFill>
-                <a:latin typeface="Arial" pitchFamily="34" charset="0"/>
-                <a:ea typeface="Arial" pitchFamily="34" charset="-122"/>
-                <a:cs typeface="Arial" pitchFamily="34" charset="-120"/>
-              </a:rPr>
-              <a:t>"Externe effecten zijn altijd negatief"</a:t>
-            </a:r>
-            <a:endParaRPr lang="en-US" sz="1400" dirty="0"/>
-          </a:p>
-        </p:txBody>
-      </p:sp>
-      <p:sp>
-        <p:nvSpPr>
-          <p:cNvPr id="10" name="Text 8"/>
-          <p:cNvSpPr/>
-          <p:nvPr/>
-        </p:nvSpPr>
-        <p:spPr>
-          <a:xfrm>
-            <a:off x="658368" y="2487168"/>
-            <a:ext cx="7863840" cy="502920"/>
-          </a:xfrm>
-          <a:prstGeom prst="rect">
-            <a:avLst/>
-          </a:prstGeom>
-          <a:noFill/>
-          <a:ln/>
-        </p:spPr>
-        <p:txBody>
-          <a:bodyPr wrap="square" rtlCol="0" anchor="t"/>
-          <a:lstStyle/>
-          <a:p>
-            <a:pPr algn="l" indent="0" marL="0">
-              <a:buNone/>
-            </a:pPr>
-            <a:r>
-              <a:rPr lang="en-US" sz="1300" dirty="0">
-                <a:solidFill>
-                  <a:srgbClr val="2D3748"/>
-                </a:solidFill>
-                <a:latin typeface="Arial" pitchFamily="34" charset="0"/>
-                <a:ea typeface="Arial" pitchFamily="34" charset="-122"/>
-                <a:cs typeface="Arial" pitchFamily="34" charset="-120"/>
-              </a:rPr>
-              <a:t>Onjuist: er bestaan ook positieve externe effecten (onderwijs, vaccinatie). Die leiden juist tot te weinig productie.</a:t>
-            </a:r>
-            <a:endParaRPr lang="en-US" sz="1300" dirty="0"/>
-          </a:p>
-        </p:txBody>
-      </p:sp>
-      <p:sp>
-        <p:nvSpPr>
-          <p:cNvPr id="11" name="Shape 9"/>
-          <p:cNvSpPr/>
-          <p:nvPr/>
-        </p:nvSpPr>
-        <p:spPr>
-          <a:xfrm>
-            <a:off x="457200" y="3246120"/>
-            <a:ext cx="8229600" cy="960120"/>
-          </a:xfrm>
-          <a:prstGeom prst="rect">
-            <a:avLst>
-              <a:gd name="adj" fmla="val 4762"/>
-            </a:avLst>
-          </a:prstGeom>
-          <a:solidFill>
-            <a:srgbClr val="FDE8E8"/>
-          </a:solidFill>
-          <a:ln/>
-          <a:effectLst>
-            <a:outerShdw sx="100000" sy="100000" kx="0" ky="0" algn="bl" rotWithShape="0" blurRad="76200" dist="25400" dir="8100000">
-              <a:srgbClr val="000000">
-                <a:alpha val="10000"/>
-              </a:srgbClr>
-            </a:outerShdw>
-          </a:effectLst>
-        </p:spPr>
-        <p:txBody>
-          <a:bodyPr/>
-          <a:p/>
-        </p:txBody>
-      </p:sp>
-      <p:sp>
-        <p:nvSpPr>
-          <p:cNvPr id="12" name="Shape 10"/>
-          <p:cNvSpPr/>
-          <p:nvPr/>
-        </p:nvSpPr>
-        <p:spPr>
-          <a:xfrm>
-            <a:off x="457200" y="3246120"/>
-            <a:ext cx="54864" cy="960120"/>
-          </a:xfrm>
-          <a:prstGeom prst="rect">
-            <a:avLst/>
-          </a:prstGeom>
-          <a:solidFill>
-            <a:srgbClr val="D9534F"/>
-          </a:solidFill>
-          <a:ln/>
-        </p:spPr>
-        <p:txBody>
-          <a:bodyPr/>
-          <a:p/>
-        </p:txBody>
-      </p:sp>
-      <p:sp>
-        <p:nvSpPr>
-          <p:cNvPr id="13" name="Text 11"/>
-          <p:cNvSpPr/>
-          <p:nvPr/>
-        </p:nvSpPr>
-        <p:spPr>
-          <a:xfrm>
-            <a:off x="658368" y="3319272"/>
-            <a:ext cx="7863840" cy="320040"/>
-          </a:xfrm>
-          <a:prstGeom prst="rect">
-            <a:avLst/>
-          </a:prstGeom>
-          <a:noFill/>
-          <a:ln/>
-        </p:spPr>
-        <p:txBody>
-          <a:bodyPr wrap="square" rtlCol="0" anchor="t"/>
-          <a:lstStyle/>
-          <a:p>
-            <a:pPr algn="l" indent="0" marL="0">
-              <a:buNone/>
-            </a:pPr>
-            <a:r>
-              <a:rPr lang="en-US" sz="1400" b="1" dirty="0">
-                <a:solidFill>
-                  <a:srgbClr val="D9534F"/>
-                </a:solidFill>
-                <a:latin typeface="Arial" pitchFamily="34" charset="0"/>
-                <a:ea typeface="Arial" pitchFamily="34" charset="-122"/>
-                <a:cs typeface="Arial" pitchFamily="34" charset="-120"/>
-              </a:rPr>
-              <a:t>"Internaliseren = verbieden"</a:t>
-            </a:r>
-            <a:endParaRPr lang="en-US" sz="1400" dirty="0"/>
-          </a:p>
-        </p:txBody>
-      </p:sp>
-      <p:sp>
-        <p:nvSpPr>
-          <p:cNvPr id="14" name="Text 12"/>
-          <p:cNvSpPr/>
-          <p:nvPr/>
-        </p:nvSpPr>
-        <p:spPr>
-          <a:xfrm>
-            <a:off x="658368" y="3630168"/>
-            <a:ext cx="7863840" cy="502920"/>
-          </a:xfrm>
-          <a:prstGeom prst="rect">
-            <a:avLst/>
-          </a:prstGeom>
-          <a:noFill/>
-          <a:ln/>
-        </p:spPr>
-        <p:txBody>
-          <a:bodyPr wrap="square" rtlCol="0" anchor="t"/>
-          <a:lstStyle/>
-          <a:p>
-            <a:pPr algn="l" indent="0" marL="0">
-              <a:buNone/>
-            </a:pPr>
-            <a:r>
-              <a:rPr lang="en-US" sz="1300" dirty="0">
-                <a:solidFill>
-                  <a:srgbClr val="2D3748"/>
-                </a:solidFill>
-                <a:latin typeface="Arial" pitchFamily="34" charset="0"/>
-                <a:ea typeface="Arial" pitchFamily="34" charset="-122"/>
-                <a:cs typeface="Arial" pitchFamily="34" charset="-120"/>
-              </a:rPr>
-              <a:t>Onjuist: internaliseren = de kosten/baten in de prijs verwerken via belasting of subsidie. Het product wordt niet verboden.</a:t>
-            </a:r>
-            <a:endParaRPr lang="en-US" sz="1300" dirty="0"/>
+              <a:t>  welvaartsverlies</a:t>
+            </a:r>
+            <a:endParaRPr lang="en-US" sz="1100" dirty="0"/>
           </a:p>
         </p:txBody>
       </p:sp>
